--- a/Lab 2 (Week 8)/FIT3143 Group 3 Lab 2.pptx
+++ b/Lab 2 (Week 8)/FIT3143 Group 3 Lab 2.pptx
@@ -20,23 +20,36 @@
     <p:sldId id="265" r:id="rId16"/>
     <p:sldId id="266" r:id="rId17"/>
     <p:sldId id="267" r:id="rId18"/>
+    <p:sldId id="268" r:id="rId19"/>
+    <p:sldId id="269" r:id="rId20"/>
+    <p:sldId id="270" r:id="rId21"/>
+    <p:sldId id="271" r:id="rId22"/>
+    <p:sldId id="272" r:id="rId23"/>
+    <p:sldId id="273" r:id="rId24"/>
+    <p:sldId id="274" r:id="rId25"/>
+    <p:sldId id="275" r:id="rId26"/>
+    <p:sldId id="276" r:id="rId27"/>
+    <p:sldId id="277" r:id="rId28"/>
+    <p:sldId id="278" r:id="rId29"/>
+    <p:sldId id="279" r:id="rId30"/>
+    <p:sldId id="280" r:id="rId31"/>
   </p:sldIdLst>
   <p:sldSz cy="5143500" cx="9144000"/>
   <p:notesSz cx="6858000" cy="9144000"/>
   <p:embeddedFontLst>
     <p:embeddedFont>
       <p:font typeface="Roboto"/>
-      <p:regular r:id="rId19"/>
-      <p:bold r:id="rId20"/>
-      <p:italic r:id="rId21"/>
-      <p:boldItalic r:id="rId22"/>
+      <p:regular r:id="rId32"/>
+      <p:bold r:id="rId33"/>
+      <p:italic r:id="rId34"/>
+      <p:boldItalic r:id="rId35"/>
     </p:embeddedFont>
     <p:embeddedFont>
       <p:font typeface="Helvetica Neue"/>
-      <p:regular r:id="rId23"/>
-      <p:bold r:id="rId24"/>
-      <p:italic r:id="rId25"/>
-      <p:boldItalic r:id="rId26"/>
+      <p:regular r:id="rId36"/>
+      <p:bold r:id="rId37"/>
+      <p:italic r:id="rId38"/>
+      <p:boldItalic r:id="rId39"/>
     </p:embeddedFont>
   </p:embeddedFontLst>
   <p:defaultTextStyle>
@@ -1109,6 +1122,699 @@
 </p:notes>
 </file>
 
+<file path=ppt/notesSlides/notesSlide13.xml><?xml version="1.0" encoding="utf-8"?>
+<p:notes xmlns:a="http://schemas.openxmlformats.org/drawingml/2006/main" xmlns:r="http://schemas.openxmlformats.org/officeDocument/2006/relationships" xmlns:mc="http://schemas.openxmlformats.org/markup-compatibility/2006" xmlns:mv="urn:schemas-microsoft-com:mac:vml" xmlns:p="http://schemas.openxmlformats.org/presentationml/2006/main" xmlns:c="http://schemas.openxmlformats.org/drawingml/2006/chart" xmlns:dgm="http://schemas.openxmlformats.org/drawingml/2006/diagram" xmlns:o="urn:schemas-microsoft-com:office:office" xmlns:v="urn:schemas-microsoft-com:vml" xmlns:pvml="urn:schemas-microsoft-com:office:powerpoint" xmlns:com="http://schemas.openxmlformats.org/drawingml/2006/compatibility" xmlns:p14="http://schemas.microsoft.com/office/powerpoint/2010/main" xmlns:p15="http://schemas.microsoft.com/office/powerpoint/2012/main" xmlns:ahyp="http://schemas.microsoft.com/office/drawing/2018/hyperlinkcolor" showMasterPhAnim="0" showMasterSp="0">
+  <p:cSld>
+    <p:spTree>
+      <p:nvGrpSpPr>
+        <p:cNvPr id="161" name="Shape 161"/>
+        <p:cNvGrpSpPr/>
+        <p:nvPr/>
+      </p:nvGrpSpPr>
+      <p:grpSpPr>
+        <a:xfrm>
+          <a:off x="0" y="0"/>
+          <a:ext cx="0" cy="0"/>
+          <a:chOff x="0" y="0"/>
+          <a:chExt cx="0" cy="0"/>
+        </a:xfrm>
+      </p:grpSpPr>
+      <p:sp>
+        <p:nvSpPr>
+          <p:cNvPr id="162" name="Google Shape;162;g409eb1452dc_0_0:notes"/>
+          <p:cNvSpPr/>
+          <p:nvPr>
+            <p:ph idx="2" type="sldImg"/>
+          </p:nvPr>
+        </p:nvSpPr>
+        <p:spPr>
+          <a:xfrm>
+            <a:off x="381300" y="685800"/>
+            <a:ext cx="6096000" cy="3429000"/>
+          </a:xfrm>
+          <a:custGeom>
+            <a:rect b="b" l="l" r="r" t="t"/>
+            <a:pathLst>
+              <a:path extrusionOk="0" h="120000" w="120000">
+                <a:moveTo>
+                  <a:pt x="0" y="0"/>
+                </a:moveTo>
+                <a:lnTo>
+                  <a:pt x="120000" y="0"/>
+                </a:lnTo>
+                <a:lnTo>
+                  <a:pt x="120000" y="120000"/>
+                </a:lnTo>
+                <a:lnTo>
+                  <a:pt x="0" y="120000"/>
+                </a:lnTo>
+                <a:close/>
+              </a:path>
+            </a:pathLst>
+          </a:custGeom>
+        </p:spPr>
+      </p:sp>
+      <p:sp>
+        <p:nvSpPr>
+          <p:cNvPr id="163" name="Google Shape;163;g409eb1452dc_0_0:notes"/>
+          <p:cNvSpPr txBox="1"/>
+          <p:nvPr>
+            <p:ph idx="1" type="body"/>
+          </p:nvPr>
+        </p:nvSpPr>
+        <p:spPr>
+          <a:xfrm>
+            <a:off x="685800" y="4343400"/>
+            <a:ext cx="5486400" cy="4114800"/>
+          </a:xfrm>
+          <a:prstGeom prst="rect">
+            <a:avLst/>
+          </a:prstGeom>
+        </p:spPr>
+        <p:txBody>
+          <a:bodyPr anchorCtr="0" anchor="t" bIns="91425" lIns="91425" spcFirstLastPara="1" rIns="91425" wrap="square" tIns="91425">
+            <a:noAutofit/>
+          </a:bodyPr>
+          <a:lstStyle/>
+          <a:p>
+            <a:pPr indent="0" lvl="0" marL="0" rtl="0" algn="l">
+              <a:spcBef>
+                <a:spcPts val="0"/>
+              </a:spcBef>
+              <a:spcAft>
+                <a:spcPts val="0"/>
+              </a:spcAft>
+              <a:buNone/>
+            </a:pPr>
+            <a:r>
+              <a:t/>
+            </a:r>
+            <a:endParaRPr/>
+          </a:p>
+        </p:txBody>
+      </p:sp>
+    </p:spTree>
+  </p:cSld>
+  <p:clrMapOvr>
+    <a:masterClrMapping/>
+  </p:clrMapOvr>
+</p:notes>
+</file>
+
+<file path=ppt/notesSlides/notesSlide14.xml><?xml version="1.0" encoding="utf-8"?>
+<p:notes xmlns:a="http://schemas.openxmlformats.org/drawingml/2006/main" xmlns:r="http://schemas.openxmlformats.org/officeDocument/2006/relationships" xmlns:mc="http://schemas.openxmlformats.org/markup-compatibility/2006" xmlns:mv="urn:schemas-microsoft-com:mac:vml" xmlns:p="http://schemas.openxmlformats.org/presentationml/2006/main" xmlns:c="http://schemas.openxmlformats.org/drawingml/2006/chart" xmlns:dgm="http://schemas.openxmlformats.org/drawingml/2006/diagram" xmlns:o="urn:schemas-microsoft-com:office:office" xmlns:v="urn:schemas-microsoft-com:vml" xmlns:pvml="urn:schemas-microsoft-com:office:powerpoint" xmlns:com="http://schemas.openxmlformats.org/drawingml/2006/compatibility" xmlns:p14="http://schemas.microsoft.com/office/powerpoint/2010/main" xmlns:p15="http://schemas.microsoft.com/office/powerpoint/2012/main" xmlns:ahyp="http://schemas.microsoft.com/office/drawing/2018/hyperlinkcolor" showMasterPhAnim="0" showMasterSp="0">
+  <p:cSld>
+    <p:spTree>
+      <p:nvGrpSpPr>
+        <p:cNvPr id="166" name="Shape 166"/>
+        <p:cNvGrpSpPr/>
+        <p:nvPr/>
+      </p:nvGrpSpPr>
+      <p:grpSpPr>
+        <a:xfrm>
+          <a:off x="0" y="0"/>
+          <a:ext cx="0" cy="0"/>
+          <a:chOff x="0" y="0"/>
+          <a:chExt cx="0" cy="0"/>
+        </a:xfrm>
+      </p:grpSpPr>
+      <p:sp>
+        <p:nvSpPr>
+          <p:cNvPr id="167" name="Google Shape;167;g409eb1452dc_0_21:notes"/>
+          <p:cNvSpPr/>
+          <p:nvPr>
+            <p:ph idx="2" type="sldImg"/>
+          </p:nvPr>
+        </p:nvSpPr>
+        <p:spPr>
+          <a:xfrm>
+            <a:off x="381300" y="685800"/>
+            <a:ext cx="6096000" cy="3429000"/>
+          </a:xfrm>
+          <a:custGeom>
+            <a:rect b="b" l="l" r="r" t="t"/>
+            <a:pathLst>
+              <a:path extrusionOk="0" h="120000" w="120000">
+                <a:moveTo>
+                  <a:pt x="0" y="0"/>
+                </a:moveTo>
+                <a:lnTo>
+                  <a:pt x="120000" y="0"/>
+                </a:lnTo>
+                <a:lnTo>
+                  <a:pt x="120000" y="120000"/>
+                </a:lnTo>
+                <a:lnTo>
+                  <a:pt x="0" y="120000"/>
+                </a:lnTo>
+                <a:close/>
+              </a:path>
+            </a:pathLst>
+          </a:custGeom>
+        </p:spPr>
+      </p:sp>
+      <p:sp>
+        <p:nvSpPr>
+          <p:cNvPr id="168" name="Google Shape;168;g409eb1452dc_0_21:notes"/>
+          <p:cNvSpPr txBox="1"/>
+          <p:nvPr>
+            <p:ph idx="1" type="body"/>
+          </p:nvPr>
+        </p:nvSpPr>
+        <p:spPr>
+          <a:xfrm>
+            <a:off x="685800" y="4343400"/>
+            <a:ext cx="5486400" cy="4114800"/>
+          </a:xfrm>
+          <a:prstGeom prst="rect">
+            <a:avLst/>
+          </a:prstGeom>
+        </p:spPr>
+        <p:txBody>
+          <a:bodyPr anchorCtr="0" anchor="t" bIns="91425" lIns="91425" spcFirstLastPara="1" rIns="91425" wrap="square" tIns="91425">
+            <a:noAutofit/>
+          </a:bodyPr>
+          <a:lstStyle/>
+          <a:p>
+            <a:pPr indent="0" lvl="0" marL="0" rtl="0" algn="l">
+              <a:spcBef>
+                <a:spcPts val="0"/>
+              </a:spcBef>
+              <a:spcAft>
+                <a:spcPts val="0"/>
+              </a:spcAft>
+              <a:buNone/>
+            </a:pPr>
+            <a:r>
+              <a:t/>
+            </a:r>
+            <a:endParaRPr/>
+          </a:p>
+        </p:txBody>
+      </p:sp>
+    </p:spTree>
+  </p:cSld>
+  <p:clrMapOvr>
+    <a:masterClrMapping/>
+  </p:clrMapOvr>
+</p:notes>
+</file>
+
+<file path=ppt/notesSlides/notesSlide15.xml><?xml version="1.0" encoding="utf-8"?>
+<p:notes xmlns:a="http://schemas.openxmlformats.org/drawingml/2006/main" xmlns:r="http://schemas.openxmlformats.org/officeDocument/2006/relationships" xmlns:mc="http://schemas.openxmlformats.org/markup-compatibility/2006" xmlns:mv="urn:schemas-microsoft-com:mac:vml" xmlns:p="http://schemas.openxmlformats.org/presentationml/2006/main" xmlns:c="http://schemas.openxmlformats.org/drawingml/2006/chart" xmlns:dgm="http://schemas.openxmlformats.org/drawingml/2006/diagram" xmlns:o="urn:schemas-microsoft-com:office:office" xmlns:v="urn:schemas-microsoft-com:vml" xmlns:pvml="urn:schemas-microsoft-com:office:powerpoint" xmlns:com="http://schemas.openxmlformats.org/drawingml/2006/compatibility" xmlns:p14="http://schemas.microsoft.com/office/powerpoint/2010/main" xmlns:p15="http://schemas.microsoft.com/office/powerpoint/2012/main" xmlns:ahyp="http://schemas.microsoft.com/office/drawing/2018/hyperlinkcolor" showMasterPhAnim="0" showMasterSp="0">
+  <p:cSld>
+    <p:spTree>
+      <p:nvGrpSpPr>
+        <p:cNvPr id="172" name="Shape 172"/>
+        <p:cNvGrpSpPr/>
+        <p:nvPr/>
+      </p:nvGrpSpPr>
+      <p:grpSpPr>
+        <a:xfrm>
+          <a:off x="0" y="0"/>
+          <a:ext cx="0" cy="0"/>
+          <a:chOff x="0" y="0"/>
+          <a:chExt cx="0" cy="0"/>
+        </a:xfrm>
+      </p:grpSpPr>
+      <p:sp>
+        <p:nvSpPr>
+          <p:cNvPr id="173" name="Google Shape;173;g409eb1452dc_0_15:notes"/>
+          <p:cNvSpPr/>
+          <p:nvPr>
+            <p:ph idx="2" type="sldImg"/>
+          </p:nvPr>
+        </p:nvSpPr>
+        <p:spPr>
+          <a:xfrm>
+            <a:off x="381300" y="685800"/>
+            <a:ext cx="6096000" cy="3429000"/>
+          </a:xfrm>
+          <a:custGeom>
+            <a:rect b="b" l="l" r="r" t="t"/>
+            <a:pathLst>
+              <a:path extrusionOk="0" h="120000" w="120000">
+                <a:moveTo>
+                  <a:pt x="0" y="0"/>
+                </a:moveTo>
+                <a:lnTo>
+                  <a:pt x="120000" y="0"/>
+                </a:lnTo>
+                <a:lnTo>
+                  <a:pt x="120000" y="120000"/>
+                </a:lnTo>
+                <a:lnTo>
+                  <a:pt x="0" y="120000"/>
+                </a:lnTo>
+                <a:close/>
+              </a:path>
+            </a:pathLst>
+          </a:custGeom>
+        </p:spPr>
+      </p:sp>
+      <p:sp>
+        <p:nvSpPr>
+          <p:cNvPr id="174" name="Google Shape;174;g409eb1452dc_0_15:notes"/>
+          <p:cNvSpPr txBox="1"/>
+          <p:nvPr>
+            <p:ph idx="1" type="body"/>
+          </p:nvPr>
+        </p:nvSpPr>
+        <p:spPr>
+          <a:xfrm>
+            <a:off x="685800" y="4343400"/>
+            <a:ext cx="5486400" cy="4114800"/>
+          </a:xfrm>
+          <a:prstGeom prst="rect">
+            <a:avLst/>
+          </a:prstGeom>
+        </p:spPr>
+        <p:txBody>
+          <a:bodyPr anchorCtr="0" anchor="t" bIns="91425" lIns="91425" spcFirstLastPara="1" rIns="91425" wrap="square" tIns="91425">
+            <a:noAutofit/>
+          </a:bodyPr>
+          <a:lstStyle/>
+          <a:p>
+            <a:pPr indent="0" lvl="0" marL="0" rtl="0" algn="l">
+              <a:spcBef>
+                <a:spcPts val="0"/>
+              </a:spcBef>
+              <a:spcAft>
+                <a:spcPts val="0"/>
+              </a:spcAft>
+              <a:buNone/>
+            </a:pPr>
+            <a:r>
+              <a:t/>
+            </a:r>
+            <a:endParaRPr/>
+          </a:p>
+        </p:txBody>
+      </p:sp>
+    </p:spTree>
+  </p:cSld>
+  <p:clrMapOvr>
+    <a:masterClrMapping/>
+  </p:clrMapOvr>
+</p:notes>
+</file>
+
+<file path=ppt/notesSlides/notesSlide16.xml><?xml version="1.0" encoding="utf-8"?>
+<p:notes xmlns:a="http://schemas.openxmlformats.org/drawingml/2006/main" xmlns:r="http://schemas.openxmlformats.org/officeDocument/2006/relationships" xmlns:mc="http://schemas.openxmlformats.org/markup-compatibility/2006" xmlns:mv="urn:schemas-microsoft-com:mac:vml" xmlns:p="http://schemas.openxmlformats.org/presentationml/2006/main" xmlns:c="http://schemas.openxmlformats.org/drawingml/2006/chart" xmlns:dgm="http://schemas.openxmlformats.org/drawingml/2006/diagram" xmlns:o="urn:schemas-microsoft-com:office:office" xmlns:v="urn:schemas-microsoft-com:vml" xmlns:pvml="urn:schemas-microsoft-com:office:powerpoint" xmlns:com="http://schemas.openxmlformats.org/drawingml/2006/compatibility" xmlns:p14="http://schemas.microsoft.com/office/powerpoint/2010/main" xmlns:p15="http://schemas.microsoft.com/office/powerpoint/2012/main" xmlns:ahyp="http://schemas.microsoft.com/office/drawing/2018/hyperlinkcolor" showMasterPhAnim="0" showMasterSp="0">
+  <p:cSld>
+    <p:spTree>
+      <p:nvGrpSpPr>
+        <p:cNvPr id="177" name="Shape 177"/>
+        <p:cNvGrpSpPr/>
+        <p:nvPr/>
+      </p:nvGrpSpPr>
+      <p:grpSpPr>
+        <a:xfrm>
+          <a:off x="0" y="0"/>
+          <a:ext cx="0" cy="0"/>
+          <a:chOff x="0" y="0"/>
+          <a:chExt cx="0" cy="0"/>
+        </a:xfrm>
+      </p:grpSpPr>
+      <p:sp>
+        <p:nvSpPr>
+          <p:cNvPr id="178" name="Google Shape;178;g409eb1452dc_0_33:notes"/>
+          <p:cNvSpPr/>
+          <p:nvPr>
+            <p:ph idx="2" type="sldImg"/>
+          </p:nvPr>
+        </p:nvSpPr>
+        <p:spPr>
+          <a:xfrm>
+            <a:off x="381300" y="685800"/>
+            <a:ext cx="6096000" cy="3429000"/>
+          </a:xfrm>
+          <a:custGeom>
+            <a:rect b="b" l="l" r="r" t="t"/>
+            <a:pathLst>
+              <a:path extrusionOk="0" h="120000" w="120000">
+                <a:moveTo>
+                  <a:pt x="0" y="0"/>
+                </a:moveTo>
+                <a:lnTo>
+                  <a:pt x="120000" y="0"/>
+                </a:lnTo>
+                <a:lnTo>
+                  <a:pt x="120000" y="120000"/>
+                </a:lnTo>
+                <a:lnTo>
+                  <a:pt x="0" y="120000"/>
+                </a:lnTo>
+                <a:close/>
+              </a:path>
+            </a:pathLst>
+          </a:custGeom>
+        </p:spPr>
+      </p:sp>
+      <p:sp>
+        <p:nvSpPr>
+          <p:cNvPr id="179" name="Google Shape;179;g409eb1452dc_0_33:notes"/>
+          <p:cNvSpPr txBox="1"/>
+          <p:nvPr>
+            <p:ph idx="1" type="body"/>
+          </p:nvPr>
+        </p:nvSpPr>
+        <p:spPr>
+          <a:xfrm>
+            <a:off x="685800" y="4343400"/>
+            <a:ext cx="5486400" cy="4114800"/>
+          </a:xfrm>
+          <a:prstGeom prst="rect">
+            <a:avLst/>
+          </a:prstGeom>
+        </p:spPr>
+        <p:txBody>
+          <a:bodyPr anchorCtr="0" anchor="t" bIns="91425" lIns="91425" spcFirstLastPara="1" rIns="91425" wrap="square" tIns="91425">
+            <a:noAutofit/>
+          </a:bodyPr>
+          <a:lstStyle/>
+          <a:p>
+            <a:pPr indent="0" lvl="0" marL="0" rtl="0" algn="l">
+              <a:spcBef>
+                <a:spcPts val="0"/>
+              </a:spcBef>
+              <a:spcAft>
+                <a:spcPts val="0"/>
+              </a:spcAft>
+              <a:buNone/>
+            </a:pPr>
+            <a:r>
+              <a:t/>
+            </a:r>
+            <a:endParaRPr/>
+          </a:p>
+        </p:txBody>
+      </p:sp>
+    </p:spTree>
+  </p:cSld>
+  <p:clrMapOvr>
+    <a:masterClrMapping/>
+  </p:clrMapOvr>
+</p:notes>
+</file>
+
+<file path=ppt/notesSlides/notesSlide17.xml><?xml version="1.0" encoding="utf-8"?>
+<p:notes xmlns:a="http://schemas.openxmlformats.org/drawingml/2006/main" xmlns:r="http://schemas.openxmlformats.org/officeDocument/2006/relationships" xmlns:mc="http://schemas.openxmlformats.org/markup-compatibility/2006" xmlns:mv="urn:schemas-microsoft-com:mac:vml" xmlns:p="http://schemas.openxmlformats.org/presentationml/2006/main" xmlns:c="http://schemas.openxmlformats.org/drawingml/2006/chart" xmlns:dgm="http://schemas.openxmlformats.org/drawingml/2006/diagram" xmlns:o="urn:schemas-microsoft-com:office:office" xmlns:v="urn:schemas-microsoft-com:vml" xmlns:pvml="urn:schemas-microsoft-com:office:powerpoint" xmlns:com="http://schemas.openxmlformats.org/drawingml/2006/compatibility" xmlns:p14="http://schemas.microsoft.com/office/powerpoint/2010/main" xmlns:p15="http://schemas.microsoft.com/office/powerpoint/2012/main" xmlns:ahyp="http://schemas.microsoft.com/office/drawing/2018/hyperlinkcolor" showMasterPhAnim="0" showMasterSp="0">
+  <p:cSld>
+    <p:spTree>
+      <p:nvGrpSpPr>
+        <p:cNvPr id="182" name="Shape 182"/>
+        <p:cNvGrpSpPr/>
+        <p:nvPr/>
+      </p:nvGrpSpPr>
+      <p:grpSpPr>
+        <a:xfrm>
+          <a:off x="0" y="0"/>
+          <a:ext cx="0" cy="0"/>
+          <a:chOff x="0" y="0"/>
+          <a:chExt cx="0" cy="0"/>
+        </a:xfrm>
+      </p:grpSpPr>
+      <p:sp>
+        <p:nvSpPr>
+          <p:cNvPr id="183" name="Google Shape;183;g409eb1452dc_0_40:notes"/>
+          <p:cNvSpPr/>
+          <p:nvPr>
+            <p:ph idx="2" type="sldImg"/>
+          </p:nvPr>
+        </p:nvSpPr>
+        <p:spPr>
+          <a:xfrm>
+            <a:off x="381300" y="685800"/>
+            <a:ext cx="6096000" cy="3429000"/>
+          </a:xfrm>
+          <a:custGeom>
+            <a:rect b="b" l="l" r="r" t="t"/>
+            <a:pathLst>
+              <a:path extrusionOk="0" h="120000" w="120000">
+                <a:moveTo>
+                  <a:pt x="0" y="0"/>
+                </a:moveTo>
+                <a:lnTo>
+                  <a:pt x="120000" y="0"/>
+                </a:lnTo>
+                <a:lnTo>
+                  <a:pt x="120000" y="120000"/>
+                </a:lnTo>
+                <a:lnTo>
+                  <a:pt x="0" y="120000"/>
+                </a:lnTo>
+                <a:close/>
+              </a:path>
+            </a:pathLst>
+          </a:custGeom>
+        </p:spPr>
+      </p:sp>
+      <p:sp>
+        <p:nvSpPr>
+          <p:cNvPr id="184" name="Google Shape;184;g409eb1452dc_0_40:notes"/>
+          <p:cNvSpPr txBox="1"/>
+          <p:nvPr>
+            <p:ph idx="1" type="body"/>
+          </p:nvPr>
+        </p:nvSpPr>
+        <p:spPr>
+          <a:xfrm>
+            <a:off x="685800" y="4343400"/>
+            <a:ext cx="5486400" cy="4114800"/>
+          </a:xfrm>
+          <a:prstGeom prst="rect">
+            <a:avLst/>
+          </a:prstGeom>
+        </p:spPr>
+        <p:txBody>
+          <a:bodyPr anchorCtr="0" anchor="t" bIns="91425" lIns="91425" spcFirstLastPara="1" rIns="91425" wrap="square" tIns="91425">
+            <a:noAutofit/>
+          </a:bodyPr>
+          <a:lstStyle/>
+          <a:p>
+            <a:pPr indent="0" lvl="0" marL="0" rtl="0" algn="l">
+              <a:spcBef>
+                <a:spcPts val="0"/>
+              </a:spcBef>
+              <a:spcAft>
+                <a:spcPts val="0"/>
+              </a:spcAft>
+              <a:buNone/>
+            </a:pPr>
+            <a:r>
+              <a:t/>
+            </a:r>
+            <a:endParaRPr/>
+          </a:p>
+        </p:txBody>
+      </p:sp>
+    </p:spTree>
+  </p:cSld>
+  <p:clrMapOvr>
+    <a:masterClrMapping/>
+  </p:clrMapOvr>
+</p:notes>
+</file>
+
+<file path=ppt/notesSlides/notesSlide18.xml><?xml version="1.0" encoding="utf-8"?>
+<p:notes xmlns:a="http://schemas.openxmlformats.org/drawingml/2006/main" xmlns:r="http://schemas.openxmlformats.org/officeDocument/2006/relationships" xmlns:mc="http://schemas.openxmlformats.org/markup-compatibility/2006" xmlns:mv="urn:schemas-microsoft-com:mac:vml" xmlns:p="http://schemas.openxmlformats.org/presentationml/2006/main" xmlns:c="http://schemas.openxmlformats.org/drawingml/2006/chart" xmlns:dgm="http://schemas.openxmlformats.org/drawingml/2006/diagram" xmlns:o="urn:schemas-microsoft-com:office:office" xmlns:v="urn:schemas-microsoft-com:vml" xmlns:pvml="urn:schemas-microsoft-com:office:powerpoint" xmlns:com="http://schemas.openxmlformats.org/drawingml/2006/compatibility" xmlns:p14="http://schemas.microsoft.com/office/powerpoint/2010/main" xmlns:p15="http://schemas.microsoft.com/office/powerpoint/2012/main" xmlns:ahyp="http://schemas.microsoft.com/office/drawing/2018/hyperlinkcolor" showMasterPhAnim="0" showMasterSp="0">
+  <p:cSld>
+    <p:spTree>
+      <p:nvGrpSpPr>
+        <p:cNvPr id="188" name="Shape 188"/>
+        <p:cNvGrpSpPr/>
+        <p:nvPr/>
+      </p:nvGrpSpPr>
+      <p:grpSpPr>
+        <a:xfrm>
+          <a:off x="0" y="0"/>
+          <a:ext cx="0" cy="0"/>
+          <a:chOff x="0" y="0"/>
+          <a:chExt cx="0" cy="0"/>
+        </a:xfrm>
+      </p:grpSpPr>
+      <p:sp>
+        <p:nvSpPr>
+          <p:cNvPr id="189" name="Google Shape;189;g409eb1452dc_0_47:notes"/>
+          <p:cNvSpPr/>
+          <p:nvPr>
+            <p:ph idx="2" type="sldImg"/>
+          </p:nvPr>
+        </p:nvSpPr>
+        <p:spPr>
+          <a:xfrm>
+            <a:off x="381300" y="685800"/>
+            <a:ext cx="6096000" cy="3429000"/>
+          </a:xfrm>
+          <a:custGeom>
+            <a:rect b="b" l="l" r="r" t="t"/>
+            <a:pathLst>
+              <a:path extrusionOk="0" h="120000" w="120000">
+                <a:moveTo>
+                  <a:pt x="0" y="0"/>
+                </a:moveTo>
+                <a:lnTo>
+                  <a:pt x="120000" y="0"/>
+                </a:lnTo>
+                <a:lnTo>
+                  <a:pt x="120000" y="120000"/>
+                </a:lnTo>
+                <a:lnTo>
+                  <a:pt x="0" y="120000"/>
+                </a:lnTo>
+                <a:close/>
+              </a:path>
+            </a:pathLst>
+          </a:custGeom>
+        </p:spPr>
+      </p:sp>
+      <p:sp>
+        <p:nvSpPr>
+          <p:cNvPr id="190" name="Google Shape;190;g409eb1452dc_0_47:notes"/>
+          <p:cNvSpPr txBox="1"/>
+          <p:nvPr>
+            <p:ph idx="1" type="body"/>
+          </p:nvPr>
+        </p:nvSpPr>
+        <p:spPr>
+          <a:xfrm>
+            <a:off x="685800" y="4343400"/>
+            <a:ext cx="5486400" cy="4114800"/>
+          </a:xfrm>
+          <a:prstGeom prst="rect">
+            <a:avLst/>
+          </a:prstGeom>
+        </p:spPr>
+        <p:txBody>
+          <a:bodyPr anchorCtr="0" anchor="t" bIns="91425" lIns="91425" spcFirstLastPara="1" rIns="91425" wrap="square" tIns="91425">
+            <a:noAutofit/>
+          </a:bodyPr>
+          <a:lstStyle/>
+          <a:p>
+            <a:pPr indent="0" lvl="0" marL="0" rtl="0" algn="l">
+              <a:spcBef>
+                <a:spcPts val="0"/>
+              </a:spcBef>
+              <a:spcAft>
+                <a:spcPts val="0"/>
+              </a:spcAft>
+              <a:buNone/>
+            </a:pPr>
+            <a:r>
+              <a:t/>
+            </a:r>
+            <a:endParaRPr/>
+          </a:p>
+        </p:txBody>
+      </p:sp>
+    </p:spTree>
+  </p:cSld>
+  <p:clrMapOvr>
+    <a:masterClrMapping/>
+  </p:clrMapOvr>
+</p:notes>
+</file>
+
+<file path=ppt/notesSlides/notesSlide19.xml><?xml version="1.0" encoding="utf-8"?>
+<p:notes xmlns:a="http://schemas.openxmlformats.org/drawingml/2006/main" xmlns:r="http://schemas.openxmlformats.org/officeDocument/2006/relationships" xmlns:mc="http://schemas.openxmlformats.org/markup-compatibility/2006" xmlns:mv="urn:schemas-microsoft-com:mac:vml" xmlns:p="http://schemas.openxmlformats.org/presentationml/2006/main" xmlns:c="http://schemas.openxmlformats.org/drawingml/2006/chart" xmlns:dgm="http://schemas.openxmlformats.org/drawingml/2006/diagram" xmlns:o="urn:schemas-microsoft-com:office:office" xmlns:v="urn:schemas-microsoft-com:vml" xmlns:pvml="urn:schemas-microsoft-com:office:powerpoint" xmlns:com="http://schemas.openxmlformats.org/drawingml/2006/compatibility" xmlns:p14="http://schemas.microsoft.com/office/powerpoint/2010/main" xmlns:p15="http://schemas.microsoft.com/office/powerpoint/2012/main" xmlns:ahyp="http://schemas.microsoft.com/office/drawing/2018/hyperlinkcolor" showMasterPhAnim="0" showMasterSp="0">
+  <p:cSld>
+    <p:spTree>
+      <p:nvGrpSpPr>
+        <p:cNvPr id="194" name="Shape 194"/>
+        <p:cNvGrpSpPr/>
+        <p:nvPr/>
+      </p:nvGrpSpPr>
+      <p:grpSpPr>
+        <a:xfrm>
+          <a:off x="0" y="0"/>
+          <a:ext cx="0" cy="0"/>
+          <a:chOff x="0" y="0"/>
+          <a:chExt cx="0" cy="0"/>
+        </a:xfrm>
+      </p:grpSpPr>
+      <p:sp>
+        <p:nvSpPr>
+          <p:cNvPr id="195" name="Google Shape;195;g409eb1452dc_0_60:notes"/>
+          <p:cNvSpPr/>
+          <p:nvPr>
+            <p:ph idx="2" type="sldImg"/>
+          </p:nvPr>
+        </p:nvSpPr>
+        <p:spPr>
+          <a:xfrm>
+            <a:off x="381300" y="685800"/>
+            <a:ext cx="6096000" cy="3429000"/>
+          </a:xfrm>
+          <a:custGeom>
+            <a:rect b="b" l="l" r="r" t="t"/>
+            <a:pathLst>
+              <a:path extrusionOk="0" h="120000" w="120000">
+                <a:moveTo>
+                  <a:pt x="0" y="0"/>
+                </a:moveTo>
+                <a:lnTo>
+                  <a:pt x="120000" y="0"/>
+                </a:lnTo>
+                <a:lnTo>
+                  <a:pt x="120000" y="120000"/>
+                </a:lnTo>
+                <a:lnTo>
+                  <a:pt x="0" y="120000"/>
+                </a:lnTo>
+                <a:close/>
+              </a:path>
+            </a:pathLst>
+          </a:custGeom>
+        </p:spPr>
+      </p:sp>
+      <p:sp>
+        <p:nvSpPr>
+          <p:cNvPr id="196" name="Google Shape;196;g409eb1452dc_0_60:notes"/>
+          <p:cNvSpPr txBox="1"/>
+          <p:nvPr>
+            <p:ph idx="1" type="body"/>
+          </p:nvPr>
+        </p:nvSpPr>
+        <p:spPr>
+          <a:xfrm>
+            <a:off x="685800" y="4343400"/>
+            <a:ext cx="5486400" cy="4114800"/>
+          </a:xfrm>
+          <a:prstGeom prst="rect">
+            <a:avLst/>
+          </a:prstGeom>
+        </p:spPr>
+        <p:txBody>
+          <a:bodyPr anchorCtr="0" anchor="t" bIns="91425" lIns="91425" spcFirstLastPara="1" rIns="91425" wrap="square" tIns="91425">
+            <a:noAutofit/>
+          </a:bodyPr>
+          <a:lstStyle/>
+          <a:p>
+            <a:pPr indent="0" lvl="0" marL="0" rtl="0" algn="l">
+              <a:spcBef>
+                <a:spcPts val="0"/>
+              </a:spcBef>
+              <a:spcAft>
+                <a:spcPts val="0"/>
+              </a:spcAft>
+              <a:buNone/>
+            </a:pPr>
+            <a:r>
+              <a:t/>
+            </a:r>
+            <a:endParaRPr/>
+          </a:p>
+        </p:txBody>
+      </p:sp>
+    </p:spTree>
+  </p:cSld>
+  <p:clrMapOvr>
+    <a:masterClrMapping/>
+  </p:clrMapOvr>
+</p:notes>
+</file>
+
 <file path=ppt/notesSlides/notesSlide2.xml><?xml version="1.0" encoding="utf-8"?>
 <p:notes xmlns:a="http://schemas.openxmlformats.org/drawingml/2006/main" xmlns:r="http://schemas.openxmlformats.org/officeDocument/2006/relationships" xmlns:mc="http://schemas.openxmlformats.org/markup-compatibility/2006" xmlns:mv="urn:schemas-microsoft-com:mac:vml" xmlns:p="http://schemas.openxmlformats.org/presentationml/2006/main" xmlns:c="http://schemas.openxmlformats.org/drawingml/2006/chart" xmlns:dgm="http://schemas.openxmlformats.org/drawingml/2006/diagram" xmlns:o="urn:schemas-microsoft-com:office:office" xmlns:v="urn:schemas-microsoft-com:vml" xmlns:pvml="urn:schemas-microsoft-com:office:powerpoint" xmlns:com="http://schemas.openxmlformats.org/drawingml/2006/compatibility" xmlns:p14="http://schemas.microsoft.com/office/powerpoint/2010/main" xmlns:p15="http://schemas.microsoft.com/office/powerpoint/2012/main" xmlns:ahyp="http://schemas.microsoft.com/office/drawing/2018/hyperlinkcolor" showMasterPhAnim="0" showMasterSp="0">
   <p:cSld>
@@ -1164,6 +1870,600 @@
       <p:sp>
         <p:nvSpPr>
           <p:cNvPr id="89" name="Google Shape;89;g409ea0604f5_0_173:notes"/>
+          <p:cNvSpPr txBox="1"/>
+          <p:nvPr>
+            <p:ph idx="1" type="body"/>
+          </p:nvPr>
+        </p:nvSpPr>
+        <p:spPr>
+          <a:xfrm>
+            <a:off x="685800" y="4343400"/>
+            <a:ext cx="5486400" cy="4114800"/>
+          </a:xfrm>
+          <a:prstGeom prst="rect">
+            <a:avLst/>
+          </a:prstGeom>
+        </p:spPr>
+        <p:txBody>
+          <a:bodyPr anchorCtr="0" anchor="t" bIns="91425" lIns="91425" spcFirstLastPara="1" rIns="91425" wrap="square" tIns="91425">
+            <a:noAutofit/>
+          </a:bodyPr>
+          <a:lstStyle/>
+          <a:p>
+            <a:pPr indent="0" lvl="0" marL="0" rtl="0" algn="l">
+              <a:spcBef>
+                <a:spcPts val="0"/>
+              </a:spcBef>
+              <a:spcAft>
+                <a:spcPts val="0"/>
+              </a:spcAft>
+              <a:buNone/>
+            </a:pPr>
+            <a:r>
+              <a:t/>
+            </a:r>
+            <a:endParaRPr/>
+          </a:p>
+        </p:txBody>
+      </p:sp>
+    </p:spTree>
+  </p:cSld>
+  <p:clrMapOvr>
+    <a:masterClrMapping/>
+  </p:clrMapOvr>
+</p:notes>
+</file>
+
+<file path=ppt/notesSlides/notesSlide20.xml><?xml version="1.0" encoding="utf-8"?>
+<p:notes xmlns:a="http://schemas.openxmlformats.org/drawingml/2006/main" xmlns:r="http://schemas.openxmlformats.org/officeDocument/2006/relationships" xmlns:mc="http://schemas.openxmlformats.org/markup-compatibility/2006" xmlns:mv="urn:schemas-microsoft-com:mac:vml" xmlns:p="http://schemas.openxmlformats.org/presentationml/2006/main" xmlns:c="http://schemas.openxmlformats.org/drawingml/2006/chart" xmlns:dgm="http://schemas.openxmlformats.org/drawingml/2006/diagram" xmlns:o="urn:schemas-microsoft-com:office:office" xmlns:v="urn:schemas-microsoft-com:vml" xmlns:pvml="urn:schemas-microsoft-com:office:powerpoint" xmlns:com="http://schemas.openxmlformats.org/drawingml/2006/compatibility" xmlns:p14="http://schemas.microsoft.com/office/powerpoint/2010/main" xmlns:p15="http://schemas.microsoft.com/office/powerpoint/2012/main" xmlns:ahyp="http://schemas.microsoft.com/office/drawing/2018/hyperlinkcolor" showMasterPhAnim="0" showMasterSp="0">
+  <p:cSld>
+    <p:spTree>
+      <p:nvGrpSpPr>
+        <p:cNvPr id="199" name="Shape 199"/>
+        <p:cNvGrpSpPr/>
+        <p:nvPr/>
+      </p:nvGrpSpPr>
+      <p:grpSpPr>
+        <a:xfrm>
+          <a:off x="0" y="0"/>
+          <a:ext cx="0" cy="0"/>
+          <a:chOff x="0" y="0"/>
+          <a:chExt cx="0" cy="0"/>
+        </a:xfrm>
+      </p:grpSpPr>
+      <p:sp>
+        <p:nvSpPr>
+          <p:cNvPr id="200" name="Google Shape;200;g3fb6cfb3d73_0_66:notes"/>
+          <p:cNvSpPr/>
+          <p:nvPr>
+            <p:ph idx="2" type="sldImg"/>
+          </p:nvPr>
+        </p:nvSpPr>
+        <p:spPr>
+          <a:xfrm>
+            <a:off x="381300" y="685800"/>
+            <a:ext cx="6096000" cy="3429000"/>
+          </a:xfrm>
+          <a:custGeom>
+            <a:rect b="b" l="l" r="r" t="t"/>
+            <a:pathLst>
+              <a:path extrusionOk="0" h="120000" w="120000">
+                <a:moveTo>
+                  <a:pt x="0" y="0"/>
+                </a:moveTo>
+                <a:lnTo>
+                  <a:pt x="120000" y="0"/>
+                </a:lnTo>
+                <a:lnTo>
+                  <a:pt x="120000" y="120000"/>
+                </a:lnTo>
+                <a:lnTo>
+                  <a:pt x="0" y="120000"/>
+                </a:lnTo>
+                <a:close/>
+              </a:path>
+            </a:pathLst>
+          </a:custGeom>
+        </p:spPr>
+      </p:sp>
+      <p:sp>
+        <p:nvSpPr>
+          <p:cNvPr id="201" name="Google Shape;201;g3fb6cfb3d73_0_66:notes"/>
+          <p:cNvSpPr txBox="1"/>
+          <p:nvPr>
+            <p:ph idx="1" type="body"/>
+          </p:nvPr>
+        </p:nvSpPr>
+        <p:spPr>
+          <a:xfrm>
+            <a:off x="685800" y="4343400"/>
+            <a:ext cx="5486400" cy="4114800"/>
+          </a:xfrm>
+          <a:prstGeom prst="rect">
+            <a:avLst/>
+          </a:prstGeom>
+        </p:spPr>
+        <p:txBody>
+          <a:bodyPr anchorCtr="0" anchor="t" bIns="91425" lIns="91425" spcFirstLastPara="1" rIns="91425" wrap="square" tIns="91425">
+            <a:noAutofit/>
+          </a:bodyPr>
+          <a:lstStyle/>
+          <a:p>
+            <a:pPr indent="0" lvl="0" marL="0" rtl="0" algn="l">
+              <a:spcBef>
+                <a:spcPts val="0"/>
+              </a:spcBef>
+              <a:spcAft>
+                <a:spcPts val="0"/>
+              </a:spcAft>
+              <a:buNone/>
+            </a:pPr>
+            <a:r>
+              <a:t/>
+            </a:r>
+            <a:endParaRPr/>
+          </a:p>
+        </p:txBody>
+      </p:sp>
+    </p:spTree>
+  </p:cSld>
+  <p:clrMapOvr>
+    <a:masterClrMapping/>
+  </p:clrMapOvr>
+</p:notes>
+</file>
+
+<file path=ppt/notesSlides/notesSlide21.xml><?xml version="1.0" encoding="utf-8"?>
+<p:notes xmlns:a="http://schemas.openxmlformats.org/drawingml/2006/main" xmlns:r="http://schemas.openxmlformats.org/officeDocument/2006/relationships" xmlns:mc="http://schemas.openxmlformats.org/markup-compatibility/2006" xmlns:mv="urn:schemas-microsoft-com:mac:vml" xmlns:p="http://schemas.openxmlformats.org/presentationml/2006/main" xmlns:c="http://schemas.openxmlformats.org/drawingml/2006/chart" xmlns:dgm="http://schemas.openxmlformats.org/drawingml/2006/diagram" xmlns:o="urn:schemas-microsoft-com:office:office" xmlns:v="urn:schemas-microsoft-com:vml" xmlns:pvml="urn:schemas-microsoft-com:office:powerpoint" xmlns:com="http://schemas.openxmlformats.org/drawingml/2006/compatibility" xmlns:p14="http://schemas.microsoft.com/office/powerpoint/2010/main" xmlns:p15="http://schemas.microsoft.com/office/powerpoint/2012/main" xmlns:ahyp="http://schemas.microsoft.com/office/drawing/2018/hyperlinkcolor" showMasterPhAnim="0" showMasterSp="0">
+  <p:cSld>
+    <p:spTree>
+      <p:nvGrpSpPr>
+        <p:cNvPr id="221" name="Shape 221"/>
+        <p:cNvGrpSpPr/>
+        <p:nvPr/>
+      </p:nvGrpSpPr>
+      <p:grpSpPr>
+        <a:xfrm>
+          <a:off x="0" y="0"/>
+          <a:ext cx="0" cy="0"/>
+          <a:chOff x="0" y="0"/>
+          <a:chExt cx="0" cy="0"/>
+        </a:xfrm>
+      </p:grpSpPr>
+      <p:sp>
+        <p:nvSpPr>
+          <p:cNvPr id="222" name="Google Shape;222;g3fb6cfb3d73_0_8:notes"/>
+          <p:cNvSpPr/>
+          <p:nvPr>
+            <p:ph idx="2" type="sldImg"/>
+          </p:nvPr>
+        </p:nvSpPr>
+        <p:spPr>
+          <a:xfrm>
+            <a:off x="381300" y="685800"/>
+            <a:ext cx="6096000" cy="3429000"/>
+          </a:xfrm>
+          <a:custGeom>
+            <a:rect b="b" l="l" r="r" t="t"/>
+            <a:pathLst>
+              <a:path extrusionOk="0" h="120000" w="120000">
+                <a:moveTo>
+                  <a:pt x="0" y="0"/>
+                </a:moveTo>
+                <a:lnTo>
+                  <a:pt x="120000" y="0"/>
+                </a:lnTo>
+                <a:lnTo>
+                  <a:pt x="120000" y="120000"/>
+                </a:lnTo>
+                <a:lnTo>
+                  <a:pt x="0" y="120000"/>
+                </a:lnTo>
+                <a:close/>
+              </a:path>
+            </a:pathLst>
+          </a:custGeom>
+        </p:spPr>
+      </p:sp>
+      <p:sp>
+        <p:nvSpPr>
+          <p:cNvPr id="223" name="Google Shape;223;g3fb6cfb3d73_0_8:notes"/>
+          <p:cNvSpPr txBox="1"/>
+          <p:nvPr>
+            <p:ph idx="1" type="body"/>
+          </p:nvPr>
+        </p:nvSpPr>
+        <p:spPr>
+          <a:xfrm>
+            <a:off x="685800" y="4343400"/>
+            <a:ext cx="5486400" cy="4114800"/>
+          </a:xfrm>
+          <a:prstGeom prst="rect">
+            <a:avLst/>
+          </a:prstGeom>
+        </p:spPr>
+        <p:txBody>
+          <a:bodyPr anchorCtr="0" anchor="t" bIns="91425" lIns="91425" spcFirstLastPara="1" rIns="91425" wrap="square" tIns="91425">
+            <a:noAutofit/>
+          </a:bodyPr>
+          <a:lstStyle/>
+          <a:p>
+            <a:pPr indent="0" lvl="0" marL="0" rtl="0" algn="l">
+              <a:spcBef>
+                <a:spcPts val="0"/>
+              </a:spcBef>
+              <a:spcAft>
+                <a:spcPts val="0"/>
+              </a:spcAft>
+              <a:buNone/>
+            </a:pPr>
+            <a:r>
+              <a:t/>
+            </a:r>
+            <a:endParaRPr/>
+          </a:p>
+        </p:txBody>
+      </p:sp>
+    </p:spTree>
+  </p:cSld>
+  <p:clrMapOvr>
+    <a:masterClrMapping/>
+  </p:clrMapOvr>
+</p:notes>
+</file>
+
+<file path=ppt/notesSlides/notesSlide22.xml><?xml version="1.0" encoding="utf-8"?>
+<p:notes xmlns:a="http://schemas.openxmlformats.org/drawingml/2006/main" xmlns:r="http://schemas.openxmlformats.org/officeDocument/2006/relationships" xmlns:mc="http://schemas.openxmlformats.org/markup-compatibility/2006" xmlns:mv="urn:schemas-microsoft-com:mac:vml" xmlns:p="http://schemas.openxmlformats.org/presentationml/2006/main" xmlns:c="http://schemas.openxmlformats.org/drawingml/2006/chart" xmlns:dgm="http://schemas.openxmlformats.org/drawingml/2006/diagram" xmlns:o="urn:schemas-microsoft-com:office:office" xmlns:v="urn:schemas-microsoft-com:vml" xmlns:pvml="urn:schemas-microsoft-com:office:powerpoint" xmlns:com="http://schemas.openxmlformats.org/drawingml/2006/compatibility" xmlns:p14="http://schemas.microsoft.com/office/powerpoint/2010/main" xmlns:p15="http://schemas.microsoft.com/office/powerpoint/2012/main" xmlns:ahyp="http://schemas.microsoft.com/office/drawing/2018/hyperlinkcolor" showMasterPhAnim="0" showMasterSp="0">
+  <p:cSld>
+    <p:spTree>
+      <p:nvGrpSpPr>
+        <p:cNvPr id="228" name="Shape 228"/>
+        <p:cNvGrpSpPr/>
+        <p:nvPr/>
+      </p:nvGrpSpPr>
+      <p:grpSpPr>
+        <a:xfrm>
+          <a:off x="0" y="0"/>
+          <a:ext cx="0" cy="0"/>
+          <a:chOff x="0" y="0"/>
+          <a:chExt cx="0" cy="0"/>
+        </a:xfrm>
+      </p:grpSpPr>
+      <p:sp>
+        <p:nvSpPr>
+          <p:cNvPr id="229" name="Google Shape;229;g3fb6cfb3d73_0_0:notes"/>
+          <p:cNvSpPr/>
+          <p:nvPr>
+            <p:ph idx="2" type="sldImg"/>
+          </p:nvPr>
+        </p:nvSpPr>
+        <p:spPr>
+          <a:xfrm>
+            <a:off x="381300" y="685800"/>
+            <a:ext cx="6096000" cy="3429000"/>
+          </a:xfrm>
+          <a:custGeom>
+            <a:rect b="b" l="l" r="r" t="t"/>
+            <a:pathLst>
+              <a:path extrusionOk="0" h="120000" w="120000">
+                <a:moveTo>
+                  <a:pt x="0" y="0"/>
+                </a:moveTo>
+                <a:lnTo>
+                  <a:pt x="120000" y="0"/>
+                </a:lnTo>
+                <a:lnTo>
+                  <a:pt x="120000" y="120000"/>
+                </a:lnTo>
+                <a:lnTo>
+                  <a:pt x="0" y="120000"/>
+                </a:lnTo>
+                <a:close/>
+              </a:path>
+            </a:pathLst>
+          </a:custGeom>
+        </p:spPr>
+      </p:sp>
+      <p:sp>
+        <p:nvSpPr>
+          <p:cNvPr id="230" name="Google Shape;230;g3fb6cfb3d73_0_0:notes"/>
+          <p:cNvSpPr txBox="1"/>
+          <p:nvPr>
+            <p:ph idx="1" type="body"/>
+          </p:nvPr>
+        </p:nvSpPr>
+        <p:spPr>
+          <a:xfrm>
+            <a:off x="685800" y="4343400"/>
+            <a:ext cx="5486400" cy="4114800"/>
+          </a:xfrm>
+          <a:prstGeom prst="rect">
+            <a:avLst/>
+          </a:prstGeom>
+        </p:spPr>
+        <p:txBody>
+          <a:bodyPr anchorCtr="0" anchor="t" bIns="91425" lIns="91425" spcFirstLastPara="1" rIns="91425" wrap="square" tIns="91425">
+            <a:noAutofit/>
+          </a:bodyPr>
+          <a:lstStyle/>
+          <a:p>
+            <a:pPr indent="0" lvl="0" marL="0" rtl="0" algn="l">
+              <a:spcBef>
+                <a:spcPts val="0"/>
+              </a:spcBef>
+              <a:spcAft>
+                <a:spcPts val="0"/>
+              </a:spcAft>
+              <a:buNone/>
+            </a:pPr>
+            <a:r>
+              <a:t/>
+            </a:r>
+            <a:endParaRPr/>
+          </a:p>
+        </p:txBody>
+      </p:sp>
+    </p:spTree>
+  </p:cSld>
+  <p:clrMapOvr>
+    <a:masterClrMapping/>
+  </p:clrMapOvr>
+</p:notes>
+</file>
+
+<file path=ppt/notesSlides/notesSlide23.xml><?xml version="1.0" encoding="utf-8"?>
+<p:notes xmlns:a="http://schemas.openxmlformats.org/drawingml/2006/main" xmlns:r="http://schemas.openxmlformats.org/officeDocument/2006/relationships" xmlns:mc="http://schemas.openxmlformats.org/markup-compatibility/2006" xmlns:mv="urn:schemas-microsoft-com:mac:vml" xmlns:p="http://schemas.openxmlformats.org/presentationml/2006/main" xmlns:c="http://schemas.openxmlformats.org/drawingml/2006/chart" xmlns:dgm="http://schemas.openxmlformats.org/drawingml/2006/diagram" xmlns:o="urn:schemas-microsoft-com:office:office" xmlns:v="urn:schemas-microsoft-com:vml" xmlns:pvml="urn:schemas-microsoft-com:office:powerpoint" xmlns:com="http://schemas.openxmlformats.org/drawingml/2006/compatibility" xmlns:p14="http://schemas.microsoft.com/office/powerpoint/2010/main" xmlns:p15="http://schemas.microsoft.com/office/powerpoint/2012/main" xmlns:ahyp="http://schemas.microsoft.com/office/drawing/2018/hyperlinkcolor" showMasterPhAnim="0" showMasterSp="0">
+  <p:cSld>
+    <p:spTree>
+      <p:nvGrpSpPr>
+        <p:cNvPr id="235" name="Shape 235"/>
+        <p:cNvGrpSpPr/>
+        <p:nvPr/>
+      </p:nvGrpSpPr>
+      <p:grpSpPr>
+        <a:xfrm>
+          <a:off x="0" y="0"/>
+          <a:ext cx="0" cy="0"/>
+          <a:chOff x="0" y="0"/>
+          <a:chExt cx="0" cy="0"/>
+        </a:xfrm>
+      </p:grpSpPr>
+      <p:sp>
+        <p:nvSpPr>
+          <p:cNvPr id="236" name="Google Shape;236;g3fb6cfb3d73_0_14:notes"/>
+          <p:cNvSpPr/>
+          <p:nvPr>
+            <p:ph idx="2" type="sldImg"/>
+          </p:nvPr>
+        </p:nvSpPr>
+        <p:spPr>
+          <a:xfrm>
+            <a:off x="381300" y="685800"/>
+            <a:ext cx="6096000" cy="3429000"/>
+          </a:xfrm>
+          <a:custGeom>
+            <a:rect b="b" l="l" r="r" t="t"/>
+            <a:pathLst>
+              <a:path extrusionOk="0" h="120000" w="120000">
+                <a:moveTo>
+                  <a:pt x="0" y="0"/>
+                </a:moveTo>
+                <a:lnTo>
+                  <a:pt x="120000" y="0"/>
+                </a:lnTo>
+                <a:lnTo>
+                  <a:pt x="120000" y="120000"/>
+                </a:lnTo>
+                <a:lnTo>
+                  <a:pt x="0" y="120000"/>
+                </a:lnTo>
+                <a:close/>
+              </a:path>
+            </a:pathLst>
+          </a:custGeom>
+        </p:spPr>
+      </p:sp>
+      <p:sp>
+        <p:nvSpPr>
+          <p:cNvPr id="237" name="Google Shape;237;g3fb6cfb3d73_0_14:notes"/>
+          <p:cNvSpPr txBox="1"/>
+          <p:nvPr>
+            <p:ph idx="1" type="body"/>
+          </p:nvPr>
+        </p:nvSpPr>
+        <p:spPr>
+          <a:xfrm>
+            <a:off x="685800" y="4343400"/>
+            <a:ext cx="5486400" cy="4114800"/>
+          </a:xfrm>
+          <a:prstGeom prst="rect">
+            <a:avLst/>
+          </a:prstGeom>
+        </p:spPr>
+        <p:txBody>
+          <a:bodyPr anchorCtr="0" anchor="t" bIns="91425" lIns="91425" spcFirstLastPara="1" rIns="91425" wrap="square" tIns="91425">
+            <a:noAutofit/>
+          </a:bodyPr>
+          <a:lstStyle/>
+          <a:p>
+            <a:pPr indent="0" lvl="0" marL="0" rtl="0" algn="l">
+              <a:spcBef>
+                <a:spcPts val="0"/>
+              </a:spcBef>
+              <a:spcAft>
+                <a:spcPts val="0"/>
+              </a:spcAft>
+              <a:buNone/>
+            </a:pPr>
+            <a:r>
+              <a:t/>
+            </a:r>
+            <a:endParaRPr/>
+          </a:p>
+        </p:txBody>
+      </p:sp>
+    </p:spTree>
+  </p:cSld>
+  <p:clrMapOvr>
+    <a:masterClrMapping/>
+  </p:clrMapOvr>
+</p:notes>
+</file>
+
+<file path=ppt/notesSlides/notesSlide24.xml><?xml version="1.0" encoding="utf-8"?>
+<p:notes xmlns:a="http://schemas.openxmlformats.org/drawingml/2006/main" xmlns:r="http://schemas.openxmlformats.org/officeDocument/2006/relationships" xmlns:mc="http://schemas.openxmlformats.org/markup-compatibility/2006" xmlns:mv="urn:schemas-microsoft-com:mac:vml" xmlns:p="http://schemas.openxmlformats.org/presentationml/2006/main" xmlns:c="http://schemas.openxmlformats.org/drawingml/2006/chart" xmlns:dgm="http://schemas.openxmlformats.org/drawingml/2006/diagram" xmlns:o="urn:schemas-microsoft-com:office:office" xmlns:v="urn:schemas-microsoft-com:vml" xmlns:pvml="urn:schemas-microsoft-com:office:powerpoint" xmlns:com="http://schemas.openxmlformats.org/drawingml/2006/compatibility" xmlns:p14="http://schemas.microsoft.com/office/powerpoint/2010/main" xmlns:p15="http://schemas.microsoft.com/office/powerpoint/2012/main" xmlns:ahyp="http://schemas.microsoft.com/office/drawing/2018/hyperlinkcolor" showMasterPhAnim="0" showMasterSp="0">
+  <p:cSld>
+    <p:spTree>
+      <p:nvGrpSpPr>
+        <p:cNvPr id="242" name="Shape 242"/>
+        <p:cNvGrpSpPr/>
+        <p:nvPr/>
+      </p:nvGrpSpPr>
+      <p:grpSpPr>
+        <a:xfrm>
+          <a:off x="0" y="0"/>
+          <a:ext cx="0" cy="0"/>
+          <a:chOff x="0" y="0"/>
+          <a:chExt cx="0" cy="0"/>
+        </a:xfrm>
+      </p:grpSpPr>
+      <p:sp>
+        <p:nvSpPr>
+          <p:cNvPr id="243" name="Google Shape;243;g3fb6cfb3d73_0_20:notes"/>
+          <p:cNvSpPr/>
+          <p:nvPr>
+            <p:ph idx="2" type="sldImg"/>
+          </p:nvPr>
+        </p:nvSpPr>
+        <p:spPr>
+          <a:xfrm>
+            <a:off x="381300" y="685800"/>
+            <a:ext cx="6096000" cy="3429000"/>
+          </a:xfrm>
+          <a:custGeom>
+            <a:rect b="b" l="l" r="r" t="t"/>
+            <a:pathLst>
+              <a:path extrusionOk="0" h="120000" w="120000">
+                <a:moveTo>
+                  <a:pt x="0" y="0"/>
+                </a:moveTo>
+                <a:lnTo>
+                  <a:pt x="120000" y="0"/>
+                </a:lnTo>
+                <a:lnTo>
+                  <a:pt x="120000" y="120000"/>
+                </a:lnTo>
+                <a:lnTo>
+                  <a:pt x="0" y="120000"/>
+                </a:lnTo>
+                <a:close/>
+              </a:path>
+            </a:pathLst>
+          </a:custGeom>
+        </p:spPr>
+      </p:sp>
+      <p:sp>
+        <p:nvSpPr>
+          <p:cNvPr id="244" name="Google Shape;244;g3fb6cfb3d73_0_20:notes"/>
+          <p:cNvSpPr txBox="1"/>
+          <p:nvPr>
+            <p:ph idx="1" type="body"/>
+          </p:nvPr>
+        </p:nvSpPr>
+        <p:spPr>
+          <a:xfrm>
+            <a:off x="685800" y="4343400"/>
+            <a:ext cx="5486400" cy="4114800"/>
+          </a:xfrm>
+          <a:prstGeom prst="rect">
+            <a:avLst/>
+          </a:prstGeom>
+        </p:spPr>
+        <p:txBody>
+          <a:bodyPr anchorCtr="0" anchor="t" bIns="91425" lIns="91425" spcFirstLastPara="1" rIns="91425" wrap="square" tIns="91425">
+            <a:noAutofit/>
+          </a:bodyPr>
+          <a:lstStyle/>
+          <a:p>
+            <a:pPr indent="0" lvl="0" marL="0" rtl="0" algn="l">
+              <a:spcBef>
+                <a:spcPts val="0"/>
+              </a:spcBef>
+              <a:spcAft>
+                <a:spcPts val="0"/>
+              </a:spcAft>
+              <a:buNone/>
+            </a:pPr>
+            <a:r>
+              <a:t/>
+            </a:r>
+            <a:endParaRPr/>
+          </a:p>
+        </p:txBody>
+      </p:sp>
+    </p:spTree>
+  </p:cSld>
+  <p:clrMapOvr>
+    <a:masterClrMapping/>
+  </p:clrMapOvr>
+</p:notes>
+</file>
+
+<file path=ppt/notesSlides/notesSlide25.xml><?xml version="1.0" encoding="utf-8"?>
+<p:notes xmlns:a="http://schemas.openxmlformats.org/drawingml/2006/main" xmlns:r="http://schemas.openxmlformats.org/officeDocument/2006/relationships" xmlns:mc="http://schemas.openxmlformats.org/markup-compatibility/2006" xmlns:mv="urn:schemas-microsoft-com:mac:vml" xmlns:p="http://schemas.openxmlformats.org/presentationml/2006/main" xmlns:c="http://schemas.openxmlformats.org/drawingml/2006/chart" xmlns:dgm="http://schemas.openxmlformats.org/drawingml/2006/diagram" xmlns:o="urn:schemas-microsoft-com:office:office" xmlns:v="urn:schemas-microsoft-com:vml" xmlns:pvml="urn:schemas-microsoft-com:office:powerpoint" xmlns:com="http://schemas.openxmlformats.org/drawingml/2006/compatibility" xmlns:p14="http://schemas.microsoft.com/office/powerpoint/2010/main" xmlns:p15="http://schemas.microsoft.com/office/powerpoint/2012/main" xmlns:ahyp="http://schemas.microsoft.com/office/drawing/2018/hyperlinkcolor" showMasterPhAnim="0" showMasterSp="0">
+  <p:cSld>
+    <p:spTree>
+      <p:nvGrpSpPr>
+        <p:cNvPr id="249" name="Shape 249"/>
+        <p:cNvGrpSpPr/>
+        <p:nvPr/>
+      </p:nvGrpSpPr>
+      <p:grpSpPr>
+        <a:xfrm>
+          <a:off x="0" y="0"/>
+          <a:ext cx="0" cy="0"/>
+          <a:chOff x="0" y="0"/>
+          <a:chExt cx="0" cy="0"/>
+        </a:xfrm>
+      </p:grpSpPr>
+      <p:sp>
+        <p:nvSpPr>
+          <p:cNvPr id="250" name="Google Shape;250;g3fb6cfb3d73_0_55:notes"/>
+          <p:cNvSpPr/>
+          <p:nvPr>
+            <p:ph idx="2" type="sldImg"/>
+          </p:nvPr>
+        </p:nvSpPr>
+        <p:spPr>
+          <a:xfrm>
+            <a:off x="381300" y="685800"/>
+            <a:ext cx="6096000" cy="3429000"/>
+          </a:xfrm>
+          <a:custGeom>
+            <a:rect b="b" l="l" r="r" t="t"/>
+            <a:pathLst>
+              <a:path extrusionOk="0" h="120000" w="120000">
+                <a:moveTo>
+                  <a:pt x="0" y="0"/>
+                </a:moveTo>
+                <a:lnTo>
+                  <a:pt x="120000" y="0"/>
+                </a:lnTo>
+                <a:lnTo>
+                  <a:pt x="120000" y="120000"/>
+                </a:lnTo>
+                <a:lnTo>
+                  <a:pt x="0" y="120000"/>
+                </a:lnTo>
+                <a:close/>
+              </a:path>
+            </a:pathLst>
+          </a:custGeom>
+        </p:spPr>
+      </p:sp>
+      <p:sp>
+        <p:nvSpPr>
+          <p:cNvPr id="251" name="Google Shape;251;g3fb6cfb3d73_0_55:notes"/>
           <p:cNvSpPr txBox="1"/>
           <p:nvPr>
             <p:ph idx="1" type="body"/>
@@ -8905,9 +10205,623 @@
             </a:pPr>
             <a:r>
               <a:rPr lang="en-GB" sz="1600"/>
-              <a:t>OpenMP has the highest speed up, as OpenMPI has to gather and sort, which our OpenMP implementation does not need to do. </a:t>
+              <a:t>OpenMP has the highest speed up, as Open MPI has to gather and sort, which our OpenMP implementation does not need to do. </a:t>
             </a:r>
             <a:endParaRPr sz="1600"/>
+          </a:p>
+        </p:txBody>
+      </p:sp>
+    </p:spTree>
+  </p:cSld>
+  <p:clrMapOvr>
+    <a:masterClrMapping/>
+  </p:clrMapOvr>
+</p:sld>
+</file>
+
+<file path=ppt/slides/slide13.xml><?xml version="1.0" encoding="utf-8"?>
+<p:sld xmlns:a="http://schemas.openxmlformats.org/drawingml/2006/main" xmlns:r="http://schemas.openxmlformats.org/officeDocument/2006/relationships" xmlns:mc="http://schemas.openxmlformats.org/markup-compatibility/2006" xmlns:mv="urn:schemas-microsoft-com:mac:vml" xmlns:p="http://schemas.openxmlformats.org/presentationml/2006/main" xmlns:c="http://schemas.openxmlformats.org/drawingml/2006/chart" xmlns:dgm="http://schemas.openxmlformats.org/drawingml/2006/diagram" xmlns:o="urn:schemas-microsoft-com:office:office" xmlns:v="urn:schemas-microsoft-com:vml" xmlns:pvml="urn:schemas-microsoft-com:office:powerpoint" xmlns:com="http://schemas.openxmlformats.org/drawingml/2006/compatibility" xmlns:p14="http://schemas.microsoft.com/office/powerpoint/2010/main" xmlns:p15="http://schemas.microsoft.com/office/powerpoint/2012/main" xmlns:ahyp="http://schemas.microsoft.com/office/drawing/2018/hyperlinkcolor">
+  <p:cSld>
+    <p:spTree>
+      <p:nvGrpSpPr>
+        <p:cNvPr id="164" name="Shape 164"/>
+        <p:cNvGrpSpPr/>
+        <p:nvPr/>
+      </p:nvGrpSpPr>
+      <p:grpSpPr>
+        <a:xfrm>
+          <a:off x="0" y="0"/>
+          <a:ext cx="0" cy="0"/>
+          <a:chOff x="0" y="0"/>
+          <a:chExt cx="0" cy="0"/>
+        </a:xfrm>
+      </p:grpSpPr>
+      <p:sp>
+        <p:nvSpPr>
+          <p:cNvPr id="165" name="Google Shape;165;p25"/>
+          <p:cNvSpPr txBox="1"/>
+          <p:nvPr>
+            <p:ph type="title"/>
+          </p:nvPr>
+        </p:nvSpPr>
+        <p:spPr>
+          <a:xfrm>
+            <a:off x="598100" y="2152347"/>
+            <a:ext cx="8222100" cy="838800"/>
+          </a:xfrm>
+          <a:prstGeom prst="rect">
+            <a:avLst/>
+          </a:prstGeom>
+        </p:spPr>
+        <p:txBody>
+          <a:bodyPr anchorCtr="0" anchor="ctr" bIns="91425" lIns="91425" spcFirstLastPara="1" rIns="91425" wrap="square" tIns="91425">
+            <a:noAutofit/>
+          </a:bodyPr>
+          <a:lstStyle/>
+          <a:p>
+            <a:pPr indent="0" lvl="0" marL="0" rtl="0" algn="l">
+              <a:spcBef>
+                <a:spcPts val="0"/>
+              </a:spcBef>
+              <a:spcAft>
+                <a:spcPts val="0"/>
+              </a:spcAft>
+              <a:buSzPts val="990"/>
+              <a:buNone/>
+            </a:pPr>
+            <a:r>
+              <a:rPr lang="en-GB" sz="3180"/>
+              <a:t>Task 2 – Prime Search using hybrid OpenMP and Message Passing Interface (Open MPI)</a:t>
+            </a:r>
+            <a:endParaRPr sz="3180"/>
+          </a:p>
+        </p:txBody>
+      </p:sp>
+    </p:spTree>
+  </p:cSld>
+  <p:clrMapOvr>
+    <a:masterClrMapping/>
+  </p:clrMapOvr>
+</p:sld>
+</file>
+
+<file path=ppt/slides/slide14.xml><?xml version="1.0" encoding="utf-8"?>
+<p:sld xmlns:a="http://schemas.openxmlformats.org/drawingml/2006/main" xmlns:r="http://schemas.openxmlformats.org/officeDocument/2006/relationships" xmlns:mc="http://schemas.openxmlformats.org/markup-compatibility/2006" xmlns:mv="urn:schemas-microsoft-com:mac:vml" xmlns:p="http://schemas.openxmlformats.org/presentationml/2006/main" xmlns:c="http://schemas.openxmlformats.org/drawingml/2006/chart" xmlns:dgm="http://schemas.openxmlformats.org/drawingml/2006/diagram" xmlns:o="urn:schemas-microsoft-com:office:office" xmlns:v="urn:schemas-microsoft-com:vml" xmlns:pvml="urn:schemas-microsoft-com:office:powerpoint" xmlns:com="http://schemas.openxmlformats.org/drawingml/2006/compatibility" xmlns:p14="http://schemas.microsoft.com/office/powerpoint/2010/main" xmlns:p15="http://schemas.microsoft.com/office/powerpoint/2012/main" xmlns:ahyp="http://schemas.microsoft.com/office/drawing/2018/hyperlinkcolor">
+  <p:cSld>
+    <p:spTree>
+      <p:nvGrpSpPr>
+        <p:cNvPr id="169" name="Shape 169"/>
+        <p:cNvGrpSpPr/>
+        <p:nvPr/>
+      </p:nvGrpSpPr>
+      <p:grpSpPr>
+        <a:xfrm>
+          <a:off x="0" y="0"/>
+          <a:ext cx="0" cy="0"/>
+          <a:chOff x="0" y="0"/>
+          <a:chExt cx="0" cy="0"/>
+        </a:xfrm>
+      </p:grpSpPr>
+      <p:sp>
+        <p:nvSpPr>
+          <p:cNvPr id="170" name="Google Shape;170;p26"/>
+          <p:cNvSpPr txBox="1"/>
+          <p:nvPr>
+            <p:ph type="title"/>
+          </p:nvPr>
+        </p:nvSpPr>
+        <p:spPr>
+          <a:xfrm>
+            <a:off x="311700" y="410000"/>
+            <a:ext cx="8520600" cy="607800"/>
+          </a:xfrm>
+          <a:prstGeom prst="rect">
+            <a:avLst/>
+          </a:prstGeom>
+        </p:spPr>
+        <p:txBody>
+          <a:bodyPr anchorCtr="0" anchor="t" bIns="91425" lIns="91425" spcFirstLastPara="1" rIns="91425" wrap="square" tIns="91425">
+            <a:normAutofit fontScale="90000"/>
+          </a:bodyPr>
+          <a:lstStyle/>
+          <a:p>
+            <a:pPr indent="0" lvl="0" marL="0" rtl="0" algn="l">
+              <a:spcBef>
+                <a:spcPts val="0"/>
+              </a:spcBef>
+              <a:spcAft>
+                <a:spcPts val="0"/>
+              </a:spcAft>
+              <a:buNone/>
+            </a:pPr>
+            <a:r>
+              <a:rPr lang="en-GB"/>
+              <a:t>Hybrid approach (OpenMP + MPI)</a:t>
+            </a:r>
+            <a:endParaRPr/>
+          </a:p>
+        </p:txBody>
+      </p:sp>
+      <p:sp>
+        <p:nvSpPr>
+          <p:cNvPr id="171" name="Google Shape;171;p26"/>
+          <p:cNvSpPr txBox="1"/>
+          <p:nvPr>
+            <p:ph idx="1" type="body"/>
+          </p:nvPr>
+        </p:nvSpPr>
+        <p:spPr>
+          <a:xfrm>
+            <a:off x="311700" y="1229875"/>
+            <a:ext cx="8520600" cy="3339000"/>
+          </a:xfrm>
+          <a:prstGeom prst="rect">
+            <a:avLst/>
+          </a:prstGeom>
+        </p:spPr>
+        <p:txBody>
+          <a:bodyPr anchorCtr="0" anchor="t" bIns="91425" lIns="91425" spcFirstLastPara="1" rIns="91425" wrap="square" tIns="91425">
+            <a:normAutofit/>
+          </a:bodyPr>
+          <a:lstStyle/>
+          <a:p>
+            <a:pPr indent="0" lvl="0" marL="0" rtl="0" algn="l">
+              <a:spcBef>
+                <a:spcPts val="0"/>
+              </a:spcBef>
+              <a:spcAft>
+                <a:spcPts val="0"/>
+              </a:spcAft>
+              <a:buNone/>
+            </a:pPr>
+            <a:r>
+              <a:rPr lang="en-GB"/>
+              <a:t>Range [0, n) -&gt; (processes x threads x 8) slices</a:t>
+            </a:r>
+            <a:endParaRPr/>
+          </a:p>
+          <a:p>
+            <a:pPr indent="0" lvl="0" marL="0" rtl="0" algn="l">
+              <a:spcBef>
+                <a:spcPts val="1200"/>
+              </a:spcBef>
+              <a:spcAft>
+                <a:spcPts val="0"/>
+              </a:spcAft>
+              <a:buNone/>
+            </a:pPr>
+            <a:r>
+              <a:rPr lang="en-GB"/>
+              <a:t>Work is divided into </a:t>
+            </a:r>
+            <a:r>
+              <a:rPr lang="en-GB"/>
+              <a:t>processes x threads x 8 slices, and each thread will get 8 slices on average, and each process will get threads OpenMP threads.</a:t>
+            </a:r>
+            <a:endParaRPr/>
+          </a:p>
+          <a:p>
+            <a:pPr indent="0" lvl="0" marL="0" rtl="0" algn="l">
+              <a:spcBef>
+                <a:spcPts val="1200"/>
+              </a:spcBef>
+              <a:spcAft>
+                <a:spcPts val="1200"/>
+              </a:spcAft>
+              <a:buNone/>
+            </a:pPr>
+            <a:r>
+              <a:rPr lang="en-GB"/>
+              <a:t>Communication between processes (MPI) using MPI_Bcast and MPI_Gather/MPI_Gatherv, but within a process (OpenMP), there is communication, the work is dynamically scheduled (like in Lab 1).</a:t>
+            </a:r>
+            <a:endParaRPr/>
+          </a:p>
+        </p:txBody>
+      </p:sp>
+    </p:spTree>
+  </p:cSld>
+  <p:clrMapOvr>
+    <a:masterClrMapping/>
+  </p:clrMapOvr>
+</p:sld>
+</file>
+
+<file path=ppt/slides/slide15.xml><?xml version="1.0" encoding="utf-8"?>
+<p:sld xmlns:a="http://schemas.openxmlformats.org/drawingml/2006/main" xmlns:r="http://schemas.openxmlformats.org/officeDocument/2006/relationships" xmlns:mc="http://schemas.openxmlformats.org/markup-compatibility/2006" xmlns:mv="urn:schemas-microsoft-com:mac:vml" xmlns:p="http://schemas.openxmlformats.org/presentationml/2006/main" xmlns:c="http://schemas.openxmlformats.org/drawingml/2006/chart" xmlns:dgm="http://schemas.openxmlformats.org/drawingml/2006/diagram" xmlns:o="urn:schemas-microsoft-com:office:office" xmlns:v="urn:schemas-microsoft-com:vml" xmlns:pvml="urn:schemas-microsoft-com:office:powerpoint" xmlns:com="http://schemas.openxmlformats.org/drawingml/2006/compatibility" xmlns:p14="http://schemas.microsoft.com/office/powerpoint/2010/main" xmlns:p15="http://schemas.microsoft.com/office/powerpoint/2012/main" xmlns:ahyp="http://schemas.microsoft.com/office/drawing/2018/hyperlinkcolor">
+  <p:cSld>
+    <p:spTree>
+      <p:nvGrpSpPr>
+        <p:cNvPr id="175" name="Shape 175"/>
+        <p:cNvGrpSpPr/>
+        <p:nvPr/>
+      </p:nvGrpSpPr>
+      <p:grpSpPr>
+        <a:xfrm>
+          <a:off x="0" y="0"/>
+          <a:ext cx="0" cy="0"/>
+          <a:chOff x="0" y="0"/>
+          <a:chExt cx="0" cy="0"/>
+        </a:xfrm>
+      </p:grpSpPr>
+      <p:pic>
+        <p:nvPicPr>
+          <p:cNvPr id="176" name="Google Shape;176;p27"/>
+          <p:cNvPicPr preferRelativeResize="0"/>
+          <p:nvPr/>
+        </p:nvPicPr>
+        <p:blipFill>
+          <a:blip r:embed="rId3">
+            <a:alphaModFix/>
+          </a:blip>
+          <a:stretch>
+            <a:fillRect/>
+          </a:stretch>
+        </p:blipFill>
+        <p:spPr>
+          <a:xfrm>
+            <a:off x="868000" y="90550"/>
+            <a:ext cx="7282601" cy="4838699"/>
+          </a:xfrm>
+          <a:prstGeom prst="rect">
+            <a:avLst/>
+          </a:prstGeom>
+          <a:noFill/>
+          <a:ln>
+            <a:noFill/>
+          </a:ln>
+        </p:spPr>
+      </p:pic>
+    </p:spTree>
+  </p:cSld>
+  <p:clrMapOvr>
+    <a:masterClrMapping/>
+  </p:clrMapOvr>
+</p:sld>
+</file>
+
+<file path=ppt/slides/slide16.xml><?xml version="1.0" encoding="utf-8"?>
+<p:sld xmlns:a="http://schemas.openxmlformats.org/drawingml/2006/main" xmlns:r="http://schemas.openxmlformats.org/officeDocument/2006/relationships" xmlns:mc="http://schemas.openxmlformats.org/markup-compatibility/2006" xmlns:mv="urn:schemas-microsoft-com:mac:vml" xmlns:p="http://schemas.openxmlformats.org/presentationml/2006/main" xmlns:c="http://schemas.openxmlformats.org/drawingml/2006/chart" xmlns:dgm="http://schemas.openxmlformats.org/drawingml/2006/diagram" xmlns:o="urn:schemas-microsoft-com:office:office" xmlns:v="urn:schemas-microsoft-com:vml" xmlns:pvml="urn:schemas-microsoft-com:office:powerpoint" xmlns:com="http://schemas.openxmlformats.org/drawingml/2006/compatibility" xmlns:p14="http://schemas.microsoft.com/office/powerpoint/2010/main" xmlns:p15="http://schemas.microsoft.com/office/powerpoint/2012/main" xmlns:ahyp="http://schemas.microsoft.com/office/drawing/2018/hyperlinkcolor">
+  <p:cSld>
+    <p:spTree>
+      <p:nvGrpSpPr>
+        <p:cNvPr id="180" name="Shape 180"/>
+        <p:cNvGrpSpPr/>
+        <p:nvPr/>
+      </p:nvGrpSpPr>
+      <p:grpSpPr>
+        <a:xfrm>
+          <a:off x="0" y="0"/>
+          <a:ext cx="0" cy="0"/>
+          <a:chOff x="0" y="0"/>
+          <a:chExt cx="0" cy="0"/>
+        </a:xfrm>
+      </p:grpSpPr>
+      <p:pic>
+        <p:nvPicPr>
+          <p:cNvPr id="181" name="Google Shape;181;p28"/>
+          <p:cNvPicPr preferRelativeResize="0"/>
+          <p:nvPr/>
+        </p:nvPicPr>
+        <p:blipFill>
+          <a:blip r:embed="rId3">
+            <a:alphaModFix/>
+          </a:blip>
+          <a:stretch>
+            <a:fillRect/>
+          </a:stretch>
+        </p:blipFill>
+        <p:spPr>
+          <a:xfrm>
+            <a:off x="152400" y="152400"/>
+            <a:ext cx="8839204" cy="4838256"/>
+          </a:xfrm>
+          <a:prstGeom prst="rect">
+            <a:avLst/>
+          </a:prstGeom>
+          <a:noFill/>
+          <a:ln>
+            <a:noFill/>
+          </a:ln>
+        </p:spPr>
+      </p:pic>
+    </p:spTree>
+  </p:cSld>
+  <p:clrMapOvr>
+    <a:masterClrMapping/>
+  </p:clrMapOvr>
+</p:sld>
+</file>
+
+<file path=ppt/slides/slide17.xml><?xml version="1.0" encoding="utf-8"?>
+<p:sld xmlns:a="http://schemas.openxmlformats.org/drawingml/2006/main" xmlns:r="http://schemas.openxmlformats.org/officeDocument/2006/relationships" xmlns:mc="http://schemas.openxmlformats.org/markup-compatibility/2006" xmlns:mv="urn:schemas-microsoft-com:mac:vml" xmlns:p="http://schemas.openxmlformats.org/presentationml/2006/main" xmlns:c="http://schemas.openxmlformats.org/drawingml/2006/chart" xmlns:dgm="http://schemas.openxmlformats.org/drawingml/2006/diagram" xmlns:o="urn:schemas-microsoft-com:office:office" xmlns:v="urn:schemas-microsoft-com:vml" xmlns:pvml="urn:schemas-microsoft-com:office:powerpoint" xmlns:com="http://schemas.openxmlformats.org/drawingml/2006/compatibility" xmlns:p14="http://schemas.microsoft.com/office/powerpoint/2010/main" xmlns:p15="http://schemas.microsoft.com/office/powerpoint/2012/main" xmlns:ahyp="http://schemas.microsoft.com/office/drawing/2018/hyperlinkcolor">
+  <p:cSld>
+    <p:spTree>
+      <p:nvGrpSpPr>
+        <p:cNvPr id="185" name="Shape 185"/>
+        <p:cNvGrpSpPr/>
+        <p:nvPr/>
+      </p:nvGrpSpPr>
+      <p:grpSpPr>
+        <a:xfrm>
+          <a:off x="0" y="0"/>
+          <a:ext cx="0" cy="0"/>
+          <a:chOff x="0" y="0"/>
+          <a:chExt cx="0" cy="0"/>
+        </a:xfrm>
+      </p:grpSpPr>
+      <p:sp>
+        <p:nvSpPr>
+          <p:cNvPr id="186" name="Google Shape;186;p29"/>
+          <p:cNvSpPr txBox="1"/>
+          <p:nvPr>
+            <p:ph type="title"/>
+          </p:nvPr>
+        </p:nvSpPr>
+        <p:spPr>
+          <a:xfrm>
+            <a:off x="311700" y="410000"/>
+            <a:ext cx="8520600" cy="607800"/>
+          </a:xfrm>
+          <a:prstGeom prst="rect">
+            <a:avLst/>
+          </a:prstGeom>
+        </p:spPr>
+        <p:txBody>
+          <a:bodyPr anchorCtr="0" anchor="t" bIns="91425" lIns="91425" spcFirstLastPara="1" rIns="91425" wrap="square" tIns="91425">
+            <a:normAutofit fontScale="90000"/>
+          </a:bodyPr>
+          <a:lstStyle/>
+          <a:p>
+            <a:pPr indent="0" lvl="0" marL="0" rtl="0" algn="l">
+              <a:spcBef>
+                <a:spcPts val="0"/>
+              </a:spcBef>
+              <a:spcAft>
+                <a:spcPts val="0"/>
+              </a:spcAft>
+              <a:buNone/>
+            </a:pPr>
+            <a:r>
+              <a:rPr lang="en-GB"/>
+              <a:t>What is the speed-up? Is it reasonable?</a:t>
+            </a:r>
+            <a:endParaRPr/>
+          </a:p>
+        </p:txBody>
+      </p:sp>
+      <p:sp>
+        <p:nvSpPr>
+          <p:cNvPr id="187" name="Google Shape;187;p29"/>
+          <p:cNvSpPr txBox="1"/>
+          <p:nvPr>
+            <p:ph idx="1" type="body"/>
+          </p:nvPr>
+        </p:nvSpPr>
+        <p:spPr>
+          <a:xfrm>
+            <a:off x="311700" y="1229875"/>
+            <a:ext cx="8520600" cy="3339000"/>
+          </a:xfrm>
+          <a:prstGeom prst="rect">
+            <a:avLst/>
+          </a:prstGeom>
+        </p:spPr>
+        <p:txBody>
+          <a:bodyPr anchorCtr="0" anchor="t" bIns="91425" lIns="91425" spcFirstLastPara="1" rIns="91425" wrap="square" tIns="91425">
+            <a:normAutofit/>
+          </a:bodyPr>
+          <a:lstStyle/>
+          <a:p>
+            <a:pPr indent="0" lvl="0" marL="0" rtl="0" algn="l">
+              <a:spcBef>
+                <a:spcPts val="0"/>
+              </a:spcBef>
+              <a:spcAft>
+                <a:spcPts val="1200"/>
+              </a:spcAft>
+              <a:buNone/>
+            </a:pPr>
+            <a:r>
+              <a:rPr lang="en-GB"/>
+              <a:t> On CAAS at n = 4×10⁷, the hybrid reached 11.09× on 16 workers (4 processes × 4 threads) and 15.74× on 32 workers (8×4) across two nodes, against a serial baseline of 14.56 s, an efficiency of 69% and 49% respectively. Efficiency falling as workers increase is expected: the gather and the root-side sort and file write do not parallelise, so they occupy a growing share of a shrinking runtime.</a:t>
+            </a:r>
+            <a:endParaRPr/>
+          </a:p>
+        </p:txBody>
+      </p:sp>
+    </p:spTree>
+  </p:cSld>
+  <p:clrMapOvr>
+    <a:masterClrMapping/>
+  </p:clrMapOvr>
+</p:sld>
+</file>
+
+<file path=ppt/slides/slide18.xml><?xml version="1.0" encoding="utf-8"?>
+<p:sld xmlns:a="http://schemas.openxmlformats.org/drawingml/2006/main" xmlns:r="http://schemas.openxmlformats.org/officeDocument/2006/relationships" xmlns:mc="http://schemas.openxmlformats.org/markup-compatibility/2006" xmlns:mv="urn:schemas-microsoft-com:mac:vml" xmlns:p="http://schemas.openxmlformats.org/presentationml/2006/main" xmlns:c="http://schemas.openxmlformats.org/drawingml/2006/chart" xmlns:dgm="http://schemas.openxmlformats.org/drawingml/2006/diagram" xmlns:o="urn:schemas-microsoft-com:office:office" xmlns:v="urn:schemas-microsoft-com:vml" xmlns:pvml="urn:schemas-microsoft-com:office:powerpoint" xmlns:com="http://schemas.openxmlformats.org/drawingml/2006/compatibility" xmlns:p14="http://schemas.microsoft.com/office/powerpoint/2010/main" xmlns:p15="http://schemas.microsoft.com/office/powerpoint/2012/main" xmlns:ahyp="http://schemas.microsoft.com/office/drawing/2018/hyperlinkcolor">
+  <p:cSld>
+    <p:spTree>
+      <p:nvGrpSpPr>
+        <p:cNvPr id="191" name="Shape 191"/>
+        <p:cNvGrpSpPr/>
+        <p:nvPr/>
+      </p:nvGrpSpPr>
+      <p:grpSpPr>
+        <a:xfrm>
+          <a:off x="0" y="0"/>
+          <a:ext cx="0" cy="0"/>
+          <a:chOff x="0" y="0"/>
+          <a:chExt cx="0" cy="0"/>
+        </a:xfrm>
+      </p:grpSpPr>
+      <p:sp>
+        <p:nvSpPr>
+          <p:cNvPr id="192" name="Google Shape;192;p30"/>
+          <p:cNvSpPr txBox="1"/>
+          <p:nvPr>
+            <p:ph type="title"/>
+          </p:nvPr>
+        </p:nvSpPr>
+        <p:spPr>
+          <a:xfrm>
+            <a:off x="311700" y="410000"/>
+            <a:ext cx="8520600" cy="607800"/>
+          </a:xfrm>
+          <a:prstGeom prst="rect">
+            <a:avLst/>
+          </a:prstGeom>
+        </p:spPr>
+        <p:txBody>
+          <a:bodyPr anchorCtr="0" anchor="t" bIns="91425" lIns="91425" spcFirstLastPara="1" rIns="91425" wrap="square" tIns="91425">
+            <a:noAutofit/>
+          </a:bodyPr>
+          <a:lstStyle/>
+          <a:p>
+            <a:pPr indent="0" lvl="0" marL="0" rtl="0" algn="l">
+              <a:spcBef>
+                <a:spcPts val="0"/>
+              </a:spcBef>
+              <a:spcAft>
+                <a:spcPts val="0"/>
+              </a:spcAft>
+              <a:buSzPts val="990"/>
+              <a:buNone/>
+            </a:pPr>
+            <a:r>
+              <a:rPr lang="en-GB" sz="2200"/>
+              <a:t>How would the speed-up change when you increase &amp; decrease threads, processes, and n?</a:t>
+            </a:r>
+            <a:endParaRPr sz="2200"/>
+          </a:p>
+          <a:p>
+            <a:pPr indent="0" lvl="0" marL="0" rtl="0" algn="l">
+              <a:spcBef>
+                <a:spcPts val="0"/>
+              </a:spcBef>
+              <a:spcAft>
+                <a:spcPts val="0"/>
+              </a:spcAft>
+              <a:buSzPts val="990"/>
+              <a:buNone/>
+            </a:pPr>
+            <a:r>
+              <a:t/>
+            </a:r>
+            <a:endParaRPr sz="2200"/>
+          </a:p>
+        </p:txBody>
+      </p:sp>
+      <p:sp>
+        <p:nvSpPr>
+          <p:cNvPr id="193" name="Google Shape;193;p30"/>
+          <p:cNvSpPr txBox="1"/>
+          <p:nvPr>
+            <p:ph idx="1" type="body"/>
+          </p:nvPr>
+        </p:nvSpPr>
+        <p:spPr>
+          <a:xfrm>
+            <a:off x="311700" y="1229875"/>
+            <a:ext cx="8520600" cy="3339000"/>
+          </a:xfrm>
+          <a:prstGeom prst="rect">
+            <a:avLst/>
+          </a:prstGeom>
+        </p:spPr>
+        <p:txBody>
+          <a:bodyPr anchorCtr="0" anchor="t" bIns="91425" lIns="91425" spcFirstLastPara="1" rIns="91425" wrap="square" tIns="91425">
+            <a:normAutofit/>
+          </a:bodyPr>
+          <a:lstStyle/>
+          <a:p>
+            <a:pPr indent="0" lvl="0" marL="0" rtl="0" algn="l">
+              <a:spcBef>
+                <a:spcPts val="0"/>
+              </a:spcBef>
+              <a:spcAft>
+                <a:spcPts val="1200"/>
+              </a:spcAft>
+              <a:buNone/>
+            </a:pPr>
+            <a:r>
+              <a:rPr lang="en-GB"/>
+              <a:t>Increasing either threads or processes raises speedup roughly in proportion to total workers until the core count is reached. At matched worker counts the split is nearly irrelevant below 16 workers: 1×8, 2×4, 4×2 and 8×1 differ by under 2%, but above that, thread-heavy splits win: 4×4 (1.31 s) beats 8×2 (1.75 s), because MPI's gather cost grows with the number of ranks while </a:t>
+            </a:r>
+            <a:r>
+              <a:rPr lang="en-GB"/>
+              <a:t>OpenMP's</a:t>
+            </a:r>
+            <a:r>
+              <a:rPr lang="en-GB"/>
+              <a:t> does not. Increasing n improves speedup, as the fixed communication and serial output costs shrink as a proportion of runtime.</a:t>
+            </a:r>
+            <a:endParaRPr/>
+          </a:p>
+        </p:txBody>
+      </p:sp>
+    </p:spTree>
+  </p:cSld>
+  <p:clrMapOvr>
+    <a:masterClrMapping/>
+  </p:clrMapOvr>
+</p:sld>
+</file>
+
+<file path=ppt/slides/slide19.xml><?xml version="1.0" encoding="utf-8"?>
+<p:sld xmlns:a="http://schemas.openxmlformats.org/drawingml/2006/main" xmlns:r="http://schemas.openxmlformats.org/officeDocument/2006/relationships" xmlns:mc="http://schemas.openxmlformats.org/markup-compatibility/2006" xmlns:mv="urn:schemas-microsoft-com:mac:vml" xmlns:p="http://schemas.openxmlformats.org/presentationml/2006/main" xmlns:c="http://schemas.openxmlformats.org/drawingml/2006/chart" xmlns:dgm="http://schemas.openxmlformats.org/drawingml/2006/diagram" xmlns:o="urn:schemas-microsoft-com:office:office" xmlns:v="urn:schemas-microsoft-com:vml" xmlns:pvml="urn:schemas-microsoft-com:office:powerpoint" xmlns:com="http://schemas.openxmlformats.org/drawingml/2006/compatibility" xmlns:p14="http://schemas.microsoft.com/office/powerpoint/2010/main" xmlns:p15="http://schemas.microsoft.com/office/powerpoint/2012/main" xmlns:ahyp="http://schemas.microsoft.com/office/drawing/2018/hyperlinkcolor">
+  <p:cSld>
+    <p:spTree>
+      <p:nvGrpSpPr>
+        <p:cNvPr id="197" name="Shape 197"/>
+        <p:cNvGrpSpPr/>
+        <p:nvPr/>
+      </p:nvGrpSpPr>
+      <p:grpSpPr>
+        <a:xfrm>
+          <a:off x="0" y="0"/>
+          <a:ext cx="0" cy="0"/>
+          <a:chOff x="0" y="0"/>
+          <a:chExt cx="0" cy="0"/>
+        </a:xfrm>
+      </p:grpSpPr>
+      <p:sp>
+        <p:nvSpPr>
+          <p:cNvPr id="198" name="Google Shape;198;p31"/>
+          <p:cNvSpPr txBox="1"/>
+          <p:nvPr>
+            <p:ph type="title"/>
+          </p:nvPr>
+        </p:nvSpPr>
+        <p:spPr>
+          <a:xfrm>
+            <a:off x="598100" y="2152347"/>
+            <a:ext cx="8222100" cy="838800"/>
+          </a:xfrm>
+          <a:prstGeom prst="rect">
+            <a:avLst/>
+          </a:prstGeom>
+        </p:spPr>
+        <p:txBody>
+          <a:bodyPr anchorCtr="0" anchor="ctr" bIns="91425" lIns="91425" spcFirstLastPara="1" rIns="91425" wrap="square" tIns="91425">
+            <a:noAutofit/>
+          </a:bodyPr>
+          <a:lstStyle/>
+          <a:p>
+            <a:pPr indent="0" lvl="0" marL="0" rtl="0" algn="l">
+              <a:spcBef>
+                <a:spcPts val="0"/>
+              </a:spcBef>
+              <a:spcAft>
+                <a:spcPts val="0"/>
+              </a:spcAft>
+              <a:buSzPts val="990"/>
+              <a:buNone/>
+            </a:pPr>
+            <a:r>
+              <a:rPr lang="en-GB" sz="3180"/>
+              <a:t>Task 3 – Performance evaluation with Amdahl’s Law</a:t>
+            </a:r>
+            <a:endParaRPr sz="3180"/>
           </a:p>
         </p:txBody>
       </p:sp>
@@ -8985,6 +10899,2790 @@
 </p:sld>
 </file>
 
+<file path=ppt/slides/slide20.xml><?xml version="1.0" encoding="utf-8"?>
+<p:sld xmlns:a="http://schemas.openxmlformats.org/drawingml/2006/main" xmlns:r="http://schemas.openxmlformats.org/officeDocument/2006/relationships" xmlns:mc="http://schemas.openxmlformats.org/markup-compatibility/2006" xmlns:mv="urn:schemas-microsoft-com:mac:vml" xmlns:p="http://schemas.openxmlformats.org/presentationml/2006/main" xmlns:c="http://schemas.openxmlformats.org/drawingml/2006/chart" xmlns:dgm="http://schemas.openxmlformats.org/drawingml/2006/diagram" xmlns:o="urn:schemas-microsoft-com:office:office" xmlns:v="urn:schemas-microsoft-com:vml" xmlns:pvml="urn:schemas-microsoft-com:office:powerpoint" xmlns:com="http://schemas.openxmlformats.org/drawingml/2006/compatibility" xmlns:p14="http://schemas.microsoft.com/office/powerpoint/2010/main" xmlns:p15="http://schemas.microsoft.com/office/powerpoint/2012/main" xmlns:ahyp="http://schemas.microsoft.com/office/drawing/2018/hyperlinkcolor">
+  <p:cSld>
+    <p:spTree>
+      <p:nvGrpSpPr>
+        <p:cNvPr id="202" name="Shape 202"/>
+        <p:cNvGrpSpPr/>
+        <p:nvPr/>
+      </p:nvGrpSpPr>
+      <p:grpSpPr>
+        <a:xfrm>
+          <a:off x="0" y="0"/>
+          <a:ext cx="0" cy="0"/>
+          <a:chOff x="0" y="0"/>
+          <a:chExt cx="0" cy="0"/>
+        </a:xfrm>
+      </p:grpSpPr>
+      <p:sp>
+        <p:nvSpPr>
+          <p:cNvPr id="203" name="Google Shape;203;p32"/>
+          <p:cNvSpPr txBox="1"/>
+          <p:nvPr>
+            <p:ph type="title"/>
+          </p:nvPr>
+        </p:nvSpPr>
+        <p:spPr>
+          <a:xfrm>
+            <a:off x="311700" y="410000"/>
+            <a:ext cx="8520600" cy="607800"/>
+          </a:xfrm>
+          <a:prstGeom prst="rect">
+            <a:avLst/>
+          </a:prstGeom>
+        </p:spPr>
+        <p:txBody>
+          <a:bodyPr anchorCtr="0" anchor="t" bIns="91425" lIns="91425" spcFirstLastPara="1" rIns="91425" wrap="square" tIns="91425">
+            <a:normAutofit fontScale="90000"/>
+          </a:bodyPr>
+          <a:lstStyle/>
+          <a:p>
+            <a:pPr indent="0" lvl="0" marL="0" rtl="0" algn="l">
+              <a:spcBef>
+                <a:spcPts val="0"/>
+              </a:spcBef>
+              <a:spcAft>
+                <a:spcPts val="0"/>
+              </a:spcAft>
+              <a:buNone/>
+            </a:pPr>
+            <a:r>
+              <a:rPr lang="en-GB"/>
+              <a:t>Task 3: Method &amp; Calculations</a:t>
+            </a:r>
+            <a:endParaRPr/>
+          </a:p>
+        </p:txBody>
+      </p:sp>
+      <p:sp>
+        <p:nvSpPr>
+          <p:cNvPr id="204" name="Google Shape;204;p32"/>
+          <p:cNvSpPr txBox="1"/>
+          <p:nvPr>
+            <p:ph idx="1" type="body"/>
+          </p:nvPr>
+        </p:nvSpPr>
+        <p:spPr>
+          <a:xfrm>
+            <a:off x="4572000" y="1210200"/>
+            <a:ext cx="4260300" cy="2723100"/>
+          </a:xfrm>
+          <a:prstGeom prst="rect">
+            <a:avLst/>
+          </a:prstGeom>
+        </p:spPr>
+        <p:txBody>
+          <a:bodyPr anchorCtr="0" anchor="t" bIns="91425" lIns="91425" spcFirstLastPara="1" rIns="91425" wrap="square" tIns="91425">
+            <a:noAutofit/>
+          </a:bodyPr>
+          <a:lstStyle/>
+          <a:p>
+            <a:pPr indent="0" lvl="0" marL="0" rtl="0" algn="l">
+              <a:spcBef>
+                <a:spcPts val="0"/>
+              </a:spcBef>
+              <a:spcAft>
+                <a:spcPts val="0"/>
+              </a:spcAft>
+              <a:buNone/>
+            </a:pPr>
+            <a:r>
+              <a:rPr b="1" lang="en-GB" sz="1400">
+                <a:solidFill>
+                  <a:srgbClr val="000000"/>
+                </a:solidFill>
+                <a:latin typeface="Arial"/>
+                <a:ea typeface="Arial"/>
+                <a:cs typeface="Arial"/>
+                <a:sym typeface="Arial"/>
+              </a:rPr>
+              <a:t>Experimental method</a:t>
+            </a:r>
+            <a:endParaRPr b="1" sz="1400">
+              <a:solidFill>
+                <a:srgbClr val="000000"/>
+              </a:solidFill>
+              <a:latin typeface="Arial"/>
+              <a:ea typeface="Arial"/>
+              <a:cs typeface="Arial"/>
+              <a:sym typeface="Arial"/>
+            </a:endParaRPr>
+          </a:p>
+          <a:p>
+            <a:pPr indent="0" lvl="0" marL="0" rtl="0" algn="l">
+              <a:spcBef>
+                <a:spcPts val="1000"/>
+              </a:spcBef>
+              <a:spcAft>
+                <a:spcPts val="0"/>
+              </a:spcAft>
+              <a:buNone/>
+            </a:pPr>
+            <a:r>
+              <a:rPr b="1" lang="en-GB" sz="1200">
+                <a:solidFill>
+                  <a:srgbClr val="000000"/>
+                </a:solidFill>
+                <a:latin typeface="Arial"/>
+                <a:ea typeface="Arial"/>
+                <a:cs typeface="Arial"/>
+                <a:sym typeface="Arial"/>
+              </a:rPr>
+              <a:t>Measured wall-clock time for:</a:t>
+            </a:r>
+            <a:endParaRPr b="1" sz="1200">
+              <a:solidFill>
+                <a:srgbClr val="000000"/>
+              </a:solidFill>
+              <a:latin typeface="Arial"/>
+              <a:ea typeface="Arial"/>
+              <a:cs typeface="Arial"/>
+              <a:sym typeface="Arial"/>
+            </a:endParaRPr>
+          </a:p>
+          <a:p>
+            <a:pPr indent="-304800" lvl="0" marL="457200" rtl="0" algn="l">
+              <a:spcBef>
+                <a:spcPts val="0"/>
+              </a:spcBef>
+              <a:spcAft>
+                <a:spcPts val="0"/>
+              </a:spcAft>
+              <a:buClr>
+                <a:srgbClr val="000000"/>
+              </a:buClr>
+              <a:buSzPts val="1200"/>
+              <a:buFont typeface="Arial"/>
+              <a:buChar char="●"/>
+            </a:pPr>
+            <a:r>
+              <a:rPr lang="en-GB" sz="1200">
+                <a:solidFill>
+                  <a:srgbClr val="000000"/>
+                </a:solidFill>
+                <a:latin typeface="Arial"/>
+                <a:ea typeface="Arial"/>
+                <a:cs typeface="Arial"/>
+                <a:sym typeface="Arial"/>
+              </a:rPr>
+              <a:t>Serial Week 4 implementation</a:t>
+            </a:r>
+            <a:endParaRPr sz="1200">
+              <a:solidFill>
+                <a:srgbClr val="000000"/>
+              </a:solidFill>
+              <a:latin typeface="Arial"/>
+              <a:ea typeface="Arial"/>
+              <a:cs typeface="Arial"/>
+              <a:sym typeface="Arial"/>
+            </a:endParaRPr>
+          </a:p>
+          <a:p>
+            <a:pPr indent="-304800" lvl="0" marL="457200" rtl="0" algn="l">
+              <a:spcBef>
+                <a:spcPts val="0"/>
+              </a:spcBef>
+              <a:spcAft>
+                <a:spcPts val="0"/>
+              </a:spcAft>
+              <a:buClr>
+                <a:srgbClr val="000000"/>
+              </a:buClr>
+              <a:buSzPts val="1200"/>
+              <a:buFont typeface="Arial"/>
+              <a:buChar char="●"/>
+            </a:pPr>
+            <a:r>
+              <a:rPr lang="en-GB" sz="1200">
+                <a:solidFill>
+                  <a:srgbClr val="000000"/>
+                </a:solidFill>
+                <a:latin typeface="Arial"/>
+                <a:ea typeface="Arial"/>
+                <a:cs typeface="Arial"/>
+                <a:sym typeface="Arial"/>
+              </a:rPr>
+              <a:t>Task 1: MPI parallel implementation</a:t>
+            </a:r>
+            <a:endParaRPr sz="1200">
+              <a:solidFill>
+                <a:srgbClr val="000000"/>
+              </a:solidFill>
+              <a:latin typeface="Arial"/>
+              <a:ea typeface="Arial"/>
+              <a:cs typeface="Arial"/>
+              <a:sym typeface="Arial"/>
+            </a:endParaRPr>
+          </a:p>
+          <a:p>
+            <a:pPr indent="-304800" lvl="0" marL="457200" rtl="0" algn="l">
+              <a:spcBef>
+                <a:spcPts val="0"/>
+              </a:spcBef>
+              <a:spcAft>
+                <a:spcPts val="0"/>
+              </a:spcAft>
+              <a:buClr>
+                <a:srgbClr val="000000"/>
+              </a:buClr>
+              <a:buSzPts val="1200"/>
+              <a:buFont typeface="Arial"/>
+              <a:buChar char="●"/>
+            </a:pPr>
+            <a:r>
+              <a:rPr lang="en-GB" sz="1200">
+                <a:solidFill>
+                  <a:srgbClr val="000000"/>
+                </a:solidFill>
+                <a:latin typeface="Arial"/>
+                <a:ea typeface="Arial"/>
+                <a:cs typeface="Arial"/>
+                <a:sym typeface="Arial"/>
+              </a:rPr>
+              <a:t>Task 2: Hybrid MPI + OpenMP implementation</a:t>
+            </a:r>
+            <a:endParaRPr sz="1200">
+              <a:solidFill>
+                <a:srgbClr val="000000"/>
+              </a:solidFill>
+              <a:latin typeface="Arial"/>
+              <a:ea typeface="Arial"/>
+              <a:cs typeface="Arial"/>
+              <a:sym typeface="Arial"/>
+            </a:endParaRPr>
+          </a:p>
+          <a:p>
+            <a:pPr indent="0" lvl="0" marL="0" rtl="0" algn="l">
+              <a:spcBef>
+                <a:spcPts val="1000"/>
+              </a:spcBef>
+              <a:spcAft>
+                <a:spcPts val="0"/>
+              </a:spcAft>
+              <a:buNone/>
+            </a:pPr>
+            <a:r>
+              <a:rPr b="1" lang="en-GB" sz="1200">
+                <a:solidFill>
+                  <a:srgbClr val="000000"/>
+                </a:solidFill>
+                <a:latin typeface="Arial"/>
+                <a:ea typeface="Arial"/>
+                <a:cs typeface="Arial"/>
+                <a:sym typeface="Arial"/>
+              </a:rPr>
+              <a:t>Experiments varied:</a:t>
+            </a:r>
+            <a:endParaRPr b="1" sz="1200">
+              <a:solidFill>
+                <a:srgbClr val="000000"/>
+              </a:solidFill>
+              <a:latin typeface="Arial"/>
+              <a:ea typeface="Arial"/>
+              <a:cs typeface="Arial"/>
+              <a:sym typeface="Arial"/>
+            </a:endParaRPr>
+          </a:p>
+          <a:p>
+            <a:pPr indent="-304800" lvl="0" marL="457200" rtl="0" algn="l">
+              <a:spcBef>
+                <a:spcPts val="0"/>
+              </a:spcBef>
+              <a:spcAft>
+                <a:spcPts val="0"/>
+              </a:spcAft>
+              <a:buClr>
+                <a:srgbClr val="000000"/>
+              </a:buClr>
+              <a:buSzPts val="1200"/>
+              <a:buFont typeface="Arial"/>
+              <a:buChar char="●"/>
+            </a:pPr>
+            <a:r>
+              <a:rPr lang="en-GB" sz="1200">
+                <a:solidFill>
+                  <a:srgbClr val="000000"/>
+                </a:solidFill>
+                <a:latin typeface="Arial"/>
+                <a:ea typeface="Arial"/>
+                <a:cs typeface="Arial"/>
+                <a:sym typeface="Arial"/>
+              </a:rPr>
+              <a:t>Problem size: </a:t>
+            </a:r>
+            <a:r>
+              <a:rPr b="1" lang="en-GB" sz="1200">
+                <a:solidFill>
+                  <a:srgbClr val="000000"/>
+                </a:solidFill>
+                <a:latin typeface="Arial"/>
+                <a:ea typeface="Arial"/>
+                <a:cs typeface="Arial"/>
+                <a:sym typeface="Arial"/>
+              </a:rPr>
+              <a:t>n = 10M </a:t>
+            </a:r>
+            <a:r>
+              <a:rPr lang="en-GB" sz="1200">
+                <a:solidFill>
+                  <a:srgbClr val="000000"/>
+                </a:solidFill>
+                <a:latin typeface="Arial"/>
+                <a:ea typeface="Arial"/>
+                <a:cs typeface="Arial"/>
+                <a:sym typeface="Arial"/>
+              </a:rPr>
+              <a:t>and</a:t>
+            </a:r>
+            <a:r>
+              <a:rPr b="1" lang="en-GB" sz="1200">
+                <a:solidFill>
+                  <a:srgbClr val="000000"/>
+                </a:solidFill>
+                <a:latin typeface="Arial"/>
+                <a:ea typeface="Arial"/>
+                <a:cs typeface="Arial"/>
+                <a:sym typeface="Arial"/>
+              </a:rPr>
+              <a:t> 50M</a:t>
+            </a:r>
+            <a:r>
+              <a:rPr lang="en-GB" sz="1200">
+                <a:solidFill>
+                  <a:srgbClr val="000000"/>
+                </a:solidFill>
+                <a:latin typeface="Arial"/>
+                <a:ea typeface="Arial"/>
+                <a:cs typeface="Arial"/>
+                <a:sym typeface="Arial"/>
+              </a:rPr>
+              <a:t> shown in results</a:t>
+            </a:r>
+            <a:endParaRPr sz="1200">
+              <a:solidFill>
+                <a:srgbClr val="000000"/>
+              </a:solidFill>
+              <a:latin typeface="Arial"/>
+              <a:ea typeface="Arial"/>
+              <a:cs typeface="Arial"/>
+              <a:sym typeface="Arial"/>
+            </a:endParaRPr>
+          </a:p>
+          <a:p>
+            <a:pPr indent="-304800" lvl="0" marL="457200" rtl="0" algn="l">
+              <a:spcBef>
+                <a:spcPts val="0"/>
+              </a:spcBef>
+              <a:spcAft>
+                <a:spcPts val="0"/>
+              </a:spcAft>
+              <a:buClr>
+                <a:srgbClr val="000000"/>
+              </a:buClr>
+              <a:buSzPts val="1200"/>
+              <a:buFont typeface="Arial"/>
+              <a:buChar char="●"/>
+            </a:pPr>
+            <a:r>
+              <a:rPr lang="en-GB" sz="1200">
+                <a:solidFill>
+                  <a:srgbClr val="000000"/>
+                </a:solidFill>
+                <a:latin typeface="Arial"/>
+                <a:ea typeface="Arial"/>
+                <a:cs typeface="Arial"/>
+                <a:sym typeface="Arial"/>
+              </a:rPr>
+              <a:t>MPI processes: </a:t>
+            </a:r>
+            <a:r>
+              <a:rPr b="1" lang="en-GB" sz="1200">
+                <a:solidFill>
+                  <a:srgbClr val="000000"/>
+                </a:solidFill>
+                <a:latin typeface="Arial"/>
+                <a:ea typeface="Arial"/>
+                <a:cs typeface="Arial"/>
+                <a:sym typeface="Arial"/>
+              </a:rPr>
+              <a:t>1, 2, 4, 8, 16</a:t>
+            </a:r>
+            <a:endParaRPr b="1" sz="1200">
+              <a:solidFill>
+                <a:srgbClr val="000000"/>
+              </a:solidFill>
+              <a:latin typeface="Arial"/>
+              <a:ea typeface="Arial"/>
+              <a:cs typeface="Arial"/>
+              <a:sym typeface="Arial"/>
+            </a:endParaRPr>
+          </a:p>
+          <a:p>
+            <a:pPr indent="-304800" lvl="0" marL="457200" rtl="0" algn="l">
+              <a:spcBef>
+                <a:spcPts val="0"/>
+              </a:spcBef>
+              <a:spcAft>
+                <a:spcPts val="0"/>
+              </a:spcAft>
+              <a:buClr>
+                <a:srgbClr val="000000"/>
+              </a:buClr>
+              <a:buSzPts val="1200"/>
+              <a:buFont typeface="Arial"/>
+              <a:buChar char="●"/>
+            </a:pPr>
+            <a:r>
+              <a:rPr lang="en-GB" sz="1200">
+                <a:solidFill>
+                  <a:srgbClr val="000000"/>
+                </a:solidFill>
+                <a:latin typeface="Arial"/>
+                <a:ea typeface="Arial"/>
+                <a:cs typeface="Arial"/>
+                <a:sym typeface="Arial"/>
+              </a:rPr>
+              <a:t>OpenMP threads: </a:t>
+            </a:r>
+            <a:r>
+              <a:rPr b="1" lang="en-GB" sz="1200">
+                <a:solidFill>
+                  <a:srgbClr val="000000"/>
+                </a:solidFill>
+                <a:latin typeface="Arial"/>
+                <a:ea typeface="Arial"/>
+                <a:cs typeface="Arial"/>
+                <a:sym typeface="Arial"/>
+              </a:rPr>
+              <a:t>1, 2, 4, 8, 16</a:t>
+            </a:r>
+            <a:endParaRPr b="1" sz="1200">
+              <a:solidFill>
+                <a:srgbClr val="000000"/>
+              </a:solidFill>
+              <a:latin typeface="Arial"/>
+              <a:ea typeface="Arial"/>
+              <a:cs typeface="Arial"/>
+              <a:sym typeface="Arial"/>
+            </a:endParaRPr>
+          </a:p>
+          <a:p>
+            <a:pPr indent="-304800" lvl="0" marL="457200" rtl="0" algn="l">
+              <a:spcBef>
+                <a:spcPts val="0"/>
+              </a:spcBef>
+              <a:spcAft>
+                <a:spcPts val="0"/>
+              </a:spcAft>
+              <a:buClr>
+                <a:srgbClr val="000000"/>
+              </a:buClr>
+              <a:buSzPts val="1200"/>
+              <a:buFont typeface="Arial"/>
+              <a:buChar char="●"/>
+            </a:pPr>
+            <a:r>
+              <a:rPr lang="en-GB" sz="1200">
+                <a:solidFill>
+                  <a:srgbClr val="000000"/>
+                </a:solidFill>
+                <a:latin typeface="Arial"/>
+                <a:ea typeface="Arial"/>
+                <a:cs typeface="Arial"/>
+                <a:sym typeface="Arial"/>
+              </a:rPr>
+              <a:t>3 runs per configuration, using the average</a:t>
+            </a:r>
+            <a:endParaRPr sz="1200">
+              <a:solidFill>
+                <a:srgbClr val="000000"/>
+              </a:solidFill>
+              <a:latin typeface="Arial"/>
+              <a:ea typeface="Arial"/>
+              <a:cs typeface="Arial"/>
+              <a:sym typeface="Arial"/>
+            </a:endParaRPr>
+          </a:p>
+          <a:p>
+            <a:pPr indent="0" lvl="0" marL="0" rtl="0" algn="l">
+              <a:spcBef>
+                <a:spcPts val="1000"/>
+              </a:spcBef>
+              <a:spcAft>
+                <a:spcPts val="0"/>
+              </a:spcAft>
+              <a:buNone/>
+            </a:pPr>
+            <a:r>
+              <a:rPr b="1" lang="en-GB" sz="1200">
+                <a:solidFill>
+                  <a:srgbClr val="000000"/>
+                </a:solidFill>
+                <a:latin typeface="Arial"/>
+                <a:ea typeface="Arial"/>
+                <a:cs typeface="Arial"/>
+                <a:sym typeface="Arial"/>
+              </a:rPr>
+              <a:t>Hardware:</a:t>
+            </a:r>
+            <a:r>
+              <a:rPr lang="en-GB" sz="1200">
+                <a:solidFill>
+                  <a:srgbClr val="000000"/>
+                </a:solidFill>
+                <a:latin typeface="Arial"/>
+                <a:ea typeface="Arial"/>
+                <a:cs typeface="Arial"/>
+                <a:sym typeface="Arial"/>
+              </a:rPr>
+              <a:t> 16 CPU cores</a:t>
+            </a:r>
+            <a:endParaRPr b="1" sz="1200">
+              <a:solidFill>
+                <a:srgbClr val="000000"/>
+              </a:solidFill>
+              <a:latin typeface="Arial"/>
+              <a:ea typeface="Arial"/>
+              <a:cs typeface="Arial"/>
+              <a:sym typeface="Arial"/>
+            </a:endParaRPr>
+          </a:p>
+        </p:txBody>
+      </p:sp>
+      <p:sp>
+        <p:nvSpPr>
+          <p:cNvPr id="205" name="Google Shape;205;p32"/>
+          <p:cNvSpPr txBox="1"/>
+          <p:nvPr>
+            <p:ph idx="1" type="body"/>
+          </p:nvPr>
+        </p:nvSpPr>
+        <p:spPr>
+          <a:xfrm>
+            <a:off x="311700" y="1210200"/>
+            <a:ext cx="4260300" cy="3339000"/>
+          </a:xfrm>
+          <a:prstGeom prst="rect">
+            <a:avLst/>
+          </a:prstGeom>
+        </p:spPr>
+        <p:txBody>
+          <a:bodyPr anchorCtr="0" anchor="t" bIns="91425" lIns="91425" spcFirstLastPara="1" rIns="91425" wrap="square" tIns="91425">
+            <a:normAutofit/>
+          </a:bodyPr>
+          <a:lstStyle/>
+          <a:p>
+            <a:pPr indent="0" lvl="0" marL="0" rtl="0" algn="l">
+              <a:spcBef>
+                <a:spcPts val="0"/>
+              </a:spcBef>
+              <a:spcAft>
+                <a:spcPts val="0"/>
+              </a:spcAft>
+              <a:buNone/>
+            </a:pPr>
+            <a:r>
+              <a:rPr b="1" lang="en-GB" sz="1400">
+                <a:solidFill>
+                  <a:srgbClr val="000000"/>
+                </a:solidFill>
+                <a:latin typeface="Arial"/>
+                <a:ea typeface="Arial"/>
+                <a:cs typeface="Arial"/>
+                <a:sym typeface="Arial"/>
+              </a:rPr>
+              <a:t>Speedup calculations</a:t>
+            </a:r>
+            <a:endParaRPr b="1" sz="1400">
+              <a:solidFill>
+                <a:srgbClr val="000000"/>
+              </a:solidFill>
+              <a:latin typeface="Arial"/>
+              <a:ea typeface="Arial"/>
+              <a:cs typeface="Arial"/>
+              <a:sym typeface="Arial"/>
+            </a:endParaRPr>
+          </a:p>
+          <a:p>
+            <a:pPr indent="0" lvl="0" marL="0" rtl="0" algn="l">
+              <a:spcBef>
+                <a:spcPts val="1000"/>
+              </a:spcBef>
+              <a:spcAft>
+                <a:spcPts val="0"/>
+              </a:spcAft>
+              <a:buNone/>
+            </a:pPr>
+            <a:r>
+              <a:rPr b="1" lang="en-GB" sz="1200">
+                <a:solidFill>
+                  <a:srgbClr val="000000"/>
+                </a:solidFill>
+                <a:latin typeface="Arial"/>
+                <a:ea typeface="Arial"/>
+                <a:cs typeface="Arial"/>
+                <a:sym typeface="Arial"/>
+              </a:rPr>
+              <a:t>Empirical:</a:t>
+            </a:r>
+            <a:endParaRPr b="1" sz="1200">
+              <a:solidFill>
+                <a:srgbClr val="000000"/>
+              </a:solidFill>
+              <a:latin typeface="Arial"/>
+              <a:ea typeface="Arial"/>
+              <a:cs typeface="Arial"/>
+              <a:sym typeface="Arial"/>
+            </a:endParaRPr>
+          </a:p>
+          <a:p>
+            <a:pPr indent="0" lvl="0" marL="0" rtl="0" algn="l">
+              <a:spcBef>
+                <a:spcPts val="0"/>
+              </a:spcBef>
+              <a:spcAft>
+                <a:spcPts val="0"/>
+              </a:spcAft>
+              <a:buNone/>
+            </a:pPr>
+            <a:r>
+              <a:t/>
+            </a:r>
+            <a:endParaRPr b="1" sz="1200">
+              <a:solidFill>
+                <a:srgbClr val="000000"/>
+              </a:solidFill>
+              <a:latin typeface="Arial"/>
+              <a:ea typeface="Arial"/>
+              <a:cs typeface="Arial"/>
+              <a:sym typeface="Arial"/>
+            </a:endParaRPr>
+          </a:p>
+          <a:p>
+            <a:pPr indent="0" lvl="0" marL="0" rtl="0" algn="l">
+              <a:spcBef>
+                <a:spcPts val="0"/>
+              </a:spcBef>
+              <a:spcAft>
+                <a:spcPts val="0"/>
+              </a:spcAft>
+              <a:buNone/>
+            </a:pPr>
+            <a:r>
+              <a:t/>
+            </a:r>
+            <a:endParaRPr b="1" sz="1200">
+              <a:solidFill>
+                <a:srgbClr val="000000"/>
+              </a:solidFill>
+              <a:latin typeface="Arial"/>
+              <a:ea typeface="Arial"/>
+              <a:cs typeface="Arial"/>
+              <a:sym typeface="Arial"/>
+            </a:endParaRPr>
+          </a:p>
+          <a:p>
+            <a:pPr indent="0" lvl="0" marL="0" rtl="0" algn="l">
+              <a:spcBef>
+                <a:spcPts val="0"/>
+              </a:spcBef>
+              <a:spcAft>
+                <a:spcPts val="0"/>
+              </a:spcAft>
+              <a:buNone/>
+            </a:pPr>
+            <a:r>
+              <a:t/>
+            </a:r>
+            <a:endParaRPr b="1" sz="1200">
+              <a:solidFill>
+                <a:srgbClr val="000000"/>
+              </a:solidFill>
+              <a:latin typeface="Arial"/>
+              <a:ea typeface="Arial"/>
+              <a:cs typeface="Arial"/>
+              <a:sym typeface="Arial"/>
+            </a:endParaRPr>
+          </a:p>
+          <a:p>
+            <a:pPr indent="0" lvl="0" marL="0" rtl="0" algn="l">
+              <a:spcBef>
+                <a:spcPts val="0"/>
+              </a:spcBef>
+              <a:spcAft>
+                <a:spcPts val="0"/>
+              </a:spcAft>
+              <a:buNone/>
+            </a:pPr>
+            <a:r>
+              <a:rPr b="1" lang="en-GB" sz="1200">
+                <a:solidFill>
+                  <a:srgbClr val="000000"/>
+                </a:solidFill>
+                <a:latin typeface="Arial"/>
+                <a:ea typeface="Arial"/>
+                <a:cs typeface="Arial"/>
+                <a:sym typeface="Arial"/>
+              </a:rPr>
+              <a:t>Amdahl:</a:t>
+            </a:r>
+            <a:endParaRPr b="1" sz="1200">
+              <a:solidFill>
+                <a:srgbClr val="000000"/>
+              </a:solidFill>
+              <a:latin typeface="Arial"/>
+              <a:ea typeface="Arial"/>
+              <a:cs typeface="Arial"/>
+              <a:sym typeface="Arial"/>
+            </a:endParaRPr>
+          </a:p>
+        </p:txBody>
+      </p:sp>
+      <p:sp>
+        <p:nvSpPr>
+          <p:cNvPr id="206" name="Google Shape;206;p32"/>
+          <p:cNvSpPr txBox="1"/>
+          <p:nvPr/>
+        </p:nvSpPr>
+        <p:spPr>
+          <a:xfrm>
+            <a:off x="582275" y="4347400"/>
+            <a:ext cx="3237600" cy="523200"/>
+          </a:xfrm>
+          <a:prstGeom prst="rect">
+            <a:avLst/>
+          </a:prstGeom>
+          <a:noFill/>
+          <a:ln>
+            <a:noFill/>
+          </a:ln>
+        </p:spPr>
+        <p:txBody>
+          <a:bodyPr anchorCtr="0" anchor="t" bIns="91425" lIns="91425" spcFirstLastPara="1" rIns="91425" wrap="square" tIns="91425">
+            <a:spAutoFit/>
+          </a:bodyPr>
+          <a:lstStyle/>
+          <a:p>
+            <a:pPr indent="0" lvl="0" marL="0" rtl="0" algn="l">
+              <a:spcBef>
+                <a:spcPts val="0"/>
+              </a:spcBef>
+              <a:spcAft>
+                <a:spcPts val="0"/>
+              </a:spcAft>
+              <a:buNone/>
+            </a:pPr>
+            <a:r>
+              <a:rPr lang="en-GB" sz="1100"/>
+              <a:t>P = MPI processes (Task 1)</a:t>
+            </a:r>
+            <a:endParaRPr sz="1100"/>
+          </a:p>
+          <a:p>
+            <a:pPr indent="0" lvl="0" marL="0" rtl="0" algn="l">
+              <a:spcBef>
+                <a:spcPts val="0"/>
+              </a:spcBef>
+              <a:spcAft>
+                <a:spcPts val="0"/>
+              </a:spcAft>
+              <a:buNone/>
+            </a:pPr>
+            <a:r>
+              <a:rPr lang="en-GB" sz="1100"/>
+              <a:t>P = MPI processes × OpenMP threads (Task 2)</a:t>
+            </a:r>
+            <a:endParaRPr sz="1100"/>
+          </a:p>
+        </p:txBody>
+      </p:sp>
+      <p:grpSp>
+        <p:nvGrpSpPr>
+          <p:cNvPr id="207" name="Google Shape;207;p32"/>
+          <p:cNvGrpSpPr/>
+          <p:nvPr/>
+        </p:nvGrpSpPr>
+        <p:grpSpPr>
+          <a:xfrm>
+            <a:off x="582276" y="1686206"/>
+            <a:ext cx="3439415" cy="2613958"/>
+            <a:chOff x="4842576" y="1705881"/>
+            <a:chExt cx="3439415" cy="2613958"/>
+          </a:xfrm>
+        </p:grpSpPr>
+        <p:sp>
+          <p:nvSpPr>
+            <p:cNvPr id="208" name="Google Shape;208;p32"/>
+            <p:cNvSpPr txBox="1"/>
+            <p:nvPr/>
+          </p:nvSpPr>
+          <p:spPr>
+            <a:xfrm>
+              <a:off x="4842577" y="1909556"/>
+              <a:ext cx="1155600" cy="431100"/>
+            </a:xfrm>
+            <a:prstGeom prst="rect">
+              <a:avLst/>
+            </a:prstGeom>
+            <a:noFill/>
+            <a:ln>
+              <a:noFill/>
+            </a:ln>
+          </p:spPr>
+          <p:txBody>
+            <a:bodyPr anchorCtr="0" anchor="t" bIns="91425" lIns="91425" spcFirstLastPara="1" rIns="91425" wrap="square" tIns="91425">
+              <a:spAutoFit/>
+            </a:bodyPr>
+            <a:lstStyle/>
+            <a:p>
+              <a:pPr indent="0" lvl="0" marL="0" rtl="0" algn="l">
+                <a:spcBef>
+                  <a:spcPts val="0"/>
+                </a:spcBef>
+                <a:spcAft>
+                  <a:spcPts val="0"/>
+                </a:spcAft>
+                <a:buNone/>
+              </a:pPr>
+              <a:r>
+                <a:rPr lang="en-GB" sz="1600">
+                  <a:solidFill>
+                    <a:schemeClr val="dk2"/>
+                  </a:solidFill>
+                  <a:latin typeface="Roboto"/>
+                  <a:ea typeface="Roboto"/>
+                  <a:cs typeface="Roboto"/>
+                  <a:sym typeface="Roboto"/>
+                </a:rPr>
+                <a:t>S</a:t>
+              </a:r>
+              <a:r>
+                <a:rPr baseline="-25000" lang="en-GB" sz="1600">
+                  <a:solidFill>
+                    <a:schemeClr val="dk2"/>
+                  </a:solidFill>
+                  <a:latin typeface="Roboto"/>
+                  <a:ea typeface="Roboto"/>
+                  <a:cs typeface="Roboto"/>
+                  <a:sym typeface="Roboto"/>
+                </a:rPr>
+                <a:t>empirical</a:t>
+              </a:r>
+              <a:r>
+                <a:rPr lang="en-GB" sz="1600">
+                  <a:solidFill>
+                    <a:schemeClr val="dk2"/>
+                  </a:solidFill>
+                  <a:latin typeface="Roboto"/>
+                  <a:ea typeface="Roboto"/>
+                  <a:cs typeface="Roboto"/>
+                  <a:sym typeface="Roboto"/>
+                </a:rPr>
+                <a:t> = </a:t>
+              </a:r>
+              <a:endParaRPr sz="1600">
+                <a:solidFill>
+                  <a:schemeClr val="dk2"/>
+                </a:solidFill>
+                <a:latin typeface="Roboto"/>
+                <a:ea typeface="Roboto"/>
+                <a:cs typeface="Roboto"/>
+                <a:sym typeface="Roboto"/>
+              </a:endParaRPr>
+            </a:p>
+          </p:txBody>
+        </p:sp>
+        <p:sp>
+          <p:nvSpPr>
+            <p:cNvPr id="209" name="Google Shape;209;p32"/>
+            <p:cNvSpPr txBox="1"/>
+            <p:nvPr/>
+          </p:nvSpPr>
+          <p:spPr>
+            <a:xfrm>
+              <a:off x="5856352" y="2109501"/>
+              <a:ext cx="872100" cy="431100"/>
+            </a:xfrm>
+            <a:prstGeom prst="rect">
+              <a:avLst/>
+            </a:prstGeom>
+            <a:noFill/>
+            <a:ln>
+              <a:noFill/>
+            </a:ln>
+          </p:spPr>
+          <p:txBody>
+            <a:bodyPr anchorCtr="0" anchor="t" bIns="91425" lIns="91425" spcFirstLastPara="1" rIns="91425" wrap="square" tIns="91425">
+              <a:spAutoFit/>
+            </a:bodyPr>
+            <a:lstStyle/>
+            <a:p>
+              <a:pPr indent="0" lvl="0" marL="0" rtl="0" algn="l">
+                <a:spcBef>
+                  <a:spcPts val="0"/>
+                </a:spcBef>
+                <a:spcAft>
+                  <a:spcPts val="0"/>
+                </a:spcAft>
+                <a:buNone/>
+              </a:pPr>
+              <a:r>
+                <a:rPr lang="en-GB" sz="1600">
+                  <a:solidFill>
+                    <a:schemeClr val="dk2"/>
+                  </a:solidFill>
+                  <a:latin typeface="Roboto"/>
+                  <a:ea typeface="Roboto"/>
+                  <a:cs typeface="Roboto"/>
+                  <a:sym typeface="Roboto"/>
+                </a:rPr>
+                <a:t>T</a:t>
+              </a:r>
+              <a:r>
+                <a:rPr baseline="-25000" lang="en-GB" sz="1600">
+                  <a:solidFill>
+                    <a:schemeClr val="dk2"/>
+                  </a:solidFill>
+                  <a:latin typeface="Roboto"/>
+                  <a:ea typeface="Roboto"/>
+                  <a:cs typeface="Roboto"/>
+                  <a:sym typeface="Roboto"/>
+                </a:rPr>
+                <a:t>parallel</a:t>
+              </a:r>
+              <a:endParaRPr baseline="-25000" sz="1600">
+                <a:solidFill>
+                  <a:schemeClr val="dk2"/>
+                </a:solidFill>
+                <a:latin typeface="Roboto"/>
+                <a:ea typeface="Roboto"/>
+                <a:cs typeface="Roboto"/>
+                <a:sym typeface="Roboto"/>
+              </a:endParaRPr>
+            </a:p>
+          </p:txBody>
+        </p:sp>
+        <p:sp>
+          <p:nvSpPr>
+            <p:cNvPr id="210" name="Google Shape;210;p32"/>
+            <p:cNvSpPr txBox="1"/>
+            <p:nvPr/>
+          </p:nvSpPr>
+          <p:spPr>
+            <a:xfrm>
+              <a:off x="5856352" y="1705881"/>
+              <a:ext cx="872100" cy="431100"/>
+            </a:xfrm>
+            <a:prstGeom prst="rect">
+              <a:avLst/>
+            </a:prstGeom>
+            <a:noFill/>
+            <a:ln>
+              <a:noFill/>
+            </a:ln>
+          </p:spPr>
+          <p:txBody>
+            <a:bodyPr anchorCtr="0" anchor="t" bIns="91425" lIns="91425" spcFirstLastPara="1" rIns="91425" wrap="square" tIns="91425">
+              <a:spAutoFit/>
+            </a:bodyPr>
+            <a:lstStyle/>
+            <a:p>
+              <a:pPr indent="0" lvl="0" marL="0" rtl="0" algn="l">
+                <a:spcBef>
+                  <a:spcPts val="0"/>
+                </a:spcBef>
+                <a:spcAft>
+                  <a:spcPts val="0"/>
+                </a:spcAft>
+                <a:buNone/>
+              </a:pPr>
+              <a:r>
+                <a:rPr lang="en-GB" sz="1600">
+                  <a:solidFill>
+                    <a:schemeClr val="dk2"/>
+                  </a:solidFill>
+                  <a:latin typeface="Roboto"/>
+                  <a:ea typeface="Roboto"/>
+                  <a:cs typeface="Roboto"/>
+                  <a:sym typeface="Roboto"/>
+                </a:rPr>
+                <a:t>T</a:t>
+              </a:r>
+              <a:r>
+                <a:rPr baseline="-25000" lang="en-GB" sz="1600">
+                  <a:solidFill>
+                    <a:schemeClr val="dk2"/>
+                  </a:solidFill>
+                  <a:latin typeface="Roboto"/>
+                  <a:ea typeface="Roboto"/>
+                  <a:cs typeface="Roboto"/>
+                  <a:sym typeface="Roboto"/>
+                </a:rPr>
+                <a:t>serial</a:t>
+              </a:r>
+              <a:endParaRPr baseline="-25000" sz="1600">
+                <a:solidFill>
+                  <a:schemeClr val="dk2"/>
+                </a:solidFill>
+                <a:latin typeface="Roboto"/>
+                <a:ea typeface="Roboto"/>
+                <a:cs typeface="Roboto"/>
+                <a:sym typeface="Roboto"/>
+              </a:endParaRPr>
+            </a:p>
+          </p:txBody>
+        </p:sp>
+        <p:cxnSp>
+          <p:nvCxnSpPr>
+            <p:cNvPr id="211" name="Google Shape;211;p32"/>
+            <p:cNvCxnSpPr/>
+            <p:nvPr/>
+          </p:nvCxnSpPr>
+          <p:spPr>
+            <a:xfrm>
+              <a:off x="5849152" y="2156203"/>
+              <a:ext cx="682800" cy="0"/>
+            </a:xfrm>
+            <a:prstGeom prst="straightConnector1">
+              <a:avLst/>
+            </a:prstGeom>
+            <a:noFill/>
+            <a:ln cap="flat" cmpd="sng" w="28575">
+              <a:solidFill>
+                <a:schemeClr val="dk2"/>
+              </a:solidFill>
+              <a:prstDash val="solid"/>
+              <a:round/>
+              <a:headEnd len="med" w="med" type="none"/>
+              <a:tailEnd len="med" w="med" type="none"/>
+            </a:ln>
+          </p:spPr>
+        </p:cxnSp>
+        <p:sp>
+          <p:nvSpPr>
+            <p:cNvPr id="212" name="Google Shape;212;p32"/>
+            <p:cNvSpPr txBox="1"/>
+            <p:nvPr/>
+          </p:nvSpPr>
+          <p:spPr>
+            <a:xfrm>
+              <a:off x="4842576" y="2844085"/>
+              <a:ext cx="522600" cy="431100"/>
+            </a:xfrm>
+            <a:prstGeom prst="rect">
+              <a:avLst/>
+            </a:prstGeom>
+            <a:noFill/>
+            <a:ln>
+              <a:noFill/>
+            </a:ln>
+          </p:spPr>
+          <p:txBody>
+            <a:bodyPr anchorCtr="0" anchor="t" bIns="91425" lIns="91425" spcFirstLastPara="1" rIns="91425" wrap="square" tIns="91425">
+              <a:spAutoFit/>
+            </a:bodyPr>
+            <a:lstStyle/>
+            <a:p>
+              <a:pPr indent="0" lvl="0" marL="0" rtl="0" algn="l">
+                <a:spcBef>
+                  <a:spcPts val="0"/>
+                </a:spcBef>
+                <a:spcAft>
+                  <a:spcPts val="0"/>
+                </a:spcAft>
+                <a:buNone/>
+              </a:pPr>
+              <a:r>
+                <a:rPr lang="en-GB" sz="1600">
+                  <a:solidFill>
+                    <a:schemeClr val="dk2"/>
+                  </a:solidFill>
+                  <a:latin typeface="Roboto"/>
+                  <a:ea typeface="Roboto"/>
+                  <a:cs typeface="Roboto"/>
+                  <a:sym typeface="Roboto"/>
+                </a:rPr>
+                <a:t>s</a:t>
+              </a:r>
+              <a:r>
+                <a:rPr lang="en-GB" sz="1600">
+                  <a:solidFill>
+                    <a:schemeClr val="dk2"/>
+                  </a:solidFill>
+                  <a:latin typeface="Roboto"/>
+                  <a:ea typeface="Roboto"/>
+                  <a:cs typeface="Roboto"/>
+                  <a:sym typeface="Roboto"/>
+                </a:rPr>
+                <a:t> = </a:t>
+              </a:r>
+              <a:endParaRPr sz="1600">
+                <a:solidFill>
+                  <a:schemeClr val="dk2"/>
+                </a:solidFill>
+                <a:latin typeface="Roboto"/>
+                <a:ea typeface="Roboto"/>
+                <a:cs typeface="Roboto"/>
+                <a:sym typeface="Roboto"/>
+              </a:endParaRPr>
+            </a:p>
+          </p:txBody>
+        </p:sp>
+        <p:sp>
+          <p:nvSpPr>
+            <p:cNvPr id="213" name="Google Shape;213;p32"/>
+            <p:cNvSpPr txBox="1"/>
+            <p:nvPr/>
+          </p:nvSpPr>
+          <p:spPr>
+            <a:xfrm>
+              <a:off x="5877368" y="3054044"/>
+              <a:ext cx="872100" cy="431100"/>
+            </a:xfrm>
+            <a:prstGeom prst="rect">
+              <a:avLst/>
+            </a:prstGeom>
+            <a:noFill/>
+            <a:ln>
+              <a:noFill/>
+            </a:ln>
+          </p:spPr>
+          <p:txBody>
+            <a:bodyPr anchorCtr="0" anchor="t" bIns="91425" lIns="91425" spcFirstLastPara="1" rIns="91425" wrap="square" tIns="91425">
+              <a:spAutoFit/>
+            </a:bodyPr>
+            <a:lstStyle/>
+            <a:p>
+              <a:pPr indent="0" lvl="0" marL="0" rtl="0" algn="ctr">
+                <a:spcBef>
+                  <a:spcPts val="0"/>
+                </a:spcBef>
+                <a:spcAft>
+                  <a:spcPts val="0"/>
+                </a:spcAft>
+                <a:buNone/>
+              </a:pPr>
+              <a:r>
+                <a:rPr lang="en-GB" sz="1600">
+                  <a:solidFill>
+                    <a:schemeClr val="dk2"/>
+                  </a:solidFill>
+                  <a:latin typeface="Roboto"/>
+                  <a:ea typeface="Roboto"/>
+                  <a:cs typeface="Roboto"/>
+                  <a:sym typeface="Roboto"/>
+                </a:rPr>
+                <a:t>T</a:t>
+              </a:r>
+              <a:r>
+                <a:rPr baseline="-25000" lang="en-GB" sz="1600">
+                  <a:solidFill>
+                    <a:schemeClr val="dk2"/>
+                  </a:solidFill>
+                  <a:latin typeface="Roboto"/>
+                  <a:ea typeface="Roboto"/>
+                  <a:cs typeface="Roboto"/>
+                  <a:sym typeface="Roboto"/>
+                </a:rPr>
+                <a:t>total</a:t>
+              </a:r>
+              <a:endParaRPr baseline="-25000" sz="1600">
+                <a:solidFill>
+                  <a:schemeClr val="dk2"/>
+                </a:solidFill>
+                <a:latin typeface="Roboto"/>
+                <a:ea typeface="Roboto"/>
+                <a:cs typeface="Roboto"/>
+                <a:sym typeface="Roboto"/>
+              </a:endParaRPr>
+            </a:p>
+          </p:txBody>
+        </p:sp>
+        <p:sp>
+          <p:nvSpPr>
+            <p:cNvPr id="214" name="Google Shape;214;p32"/>
+            <p:cNvSpPr txBox="1"/>
+            <p:nvPr/>
+          </p:nvSpPr>
+          <p:spPr>
+            <a:xfrm>
+              <a:off x="5351923" y="2640400"/>
+              <a:ext cx="1726500" cy="431100"/>
+            </a:xfrm>
+            <a:prstGeom prst="rect">
+              <a:avLst/>
+            </a:prstGeom>
+            <a:noFill/>
+            <a:ln>
+              <a:noFill/>
+            </a:ln>
+          </p:spPr>
+          <p:txBody>
+            <a:bodyPr anchorCtr="0" anchor="t" bIns="91425" lIns="91425" spcFirstLastPara="1" rIns="91425" wrap="square" tIns="91425">
+              <a:spAutoFit/>
+            </a:bodyPr>
+            <a:lstStyle/>
+            <a:p>
+              <a:pPr indent="0" lvl="0" marL="0" rtl="0" algn="l">
+                <a:spcBef>
+                  <a:spcPts val="0"/>
+                </a:spcBef>
+                <a:spcAft>
+                  <a:spcPts val="0"/>
+                </a:spcAft>
+                <a:buNone/>
+              </a:pPr>
+              <a:r>
+                <a:rPr lang="en-GB" sz="1600">
+                  <a:solidFill>
+                    <a:schemeClr val="dk2"/>
+                  </a:solidFill>
+                  <a:latin typeface="Roboto"/>
+                  <a:ea typeface="Roboto"/>
+                  <a:cs typeface="Roboto"/>
+                  <a:sym typeface="Roboto"/>
+                </a:rPr>
+                <a:t>T</a:t>
+              </a:r>
+              <a:r>
+                <a:rPr baseline="-25000" lang="en-GB" sz="1600">
+                  <a:solidFill>
+                    <a:schemeClr val="dk2"/>
+                  </a:solidFill>
+                  <a:latin typeface="Roboto"/>
+                  <a:ea typeface="Roboto"/>
+                  <a:cs typeface="Roboto"/>
+                  <a:sym typeface="Roboto"/>
+                </a:rPr>
+                <a:t>communication </a:t>
+              </a:r>
+              <a:r>
+                <a:rPr lang="en-GB" sz="1600">
+                  <a:solidFill>
+                    <a:schemeClr val="dk2"/>
+                  </a:solidFill>
+                  <a:latin typeface="Roboto"/>
+                  <a:ea typeface="Roboto"/>
+                  <a:cs typeface="Roboto"/>
+                  <a:sym typeface="Roboto"/>
+                </a:rPr>
+                <a:t>+ T</a:t>
+              </a:r>
+              <a:r>
+                <a:rPr baseline="-25000" lang="en-GB" sz="1600">
+                  <a:solidFill>
+                    <a:schemeClr val="dk2"/>
+                  </a:solidFill>
+                  <a:latin typeface="Roboto"/>
+                  <a:ea typeface="Roboto"/>
+                  <a:cs typeface="Roboto"/>
+                  <a:sym typeface="Roboto"/>
+                </a:rPr>
+                <a:t>post</a:t>
+              </a:r>
+              <a:endParaRPr baseline="-25000" sz="1600">
+                <a:solidFill>
+                  <a:schemeClr val="dk2"/>
+                </a:solidFill>
+                <a:latin typeface="Roboto"/>
+                <a:ea typeface="Roboto"/>
+                <a:cs typeface="Roboto"/>
+                <a:sym typeface="Roboto"/>
+              </a:endParaRPr>
+            </a:p>
+          </p:txBody>
+        </p:sp>
+        <p:cxnSp>
+          <p:nvCxnSpPr>
+            <p:cNvPr id="215" name="Google Shape;215;p32"/>
+            <p:cNvCxnSpPr/>
+            <p:nvPr/>
+          </p:nvCxnSpPr>
+          <p:spPr>
+            <a:xfrm>
+              <a:off x="5344718" y="3090739"/>
+              <a:ext cx="1679400" cy="0"/>
+            </a:xfrm>
+            <a:prstGeom prst="straightConnector1">
+              <a:avLst/>
+            </a:prstGeom>
+            <a:noFill/>
+            <a:ln cap="flat" cmpd="sng" w="28575">
+              <a:solidFill>
+                <a:schemeClr val="dk2"/>
+              </a:solidFill>
+              <a:prstDash val="solid"/>
+              <a:round/>
+              <a:headEnd len="med" w="med" type="none"/>
+              <a:tailEnd len="med" w="med" type="none"/>
+            </a:ln>
+          </p:spPr>
+        </p:cxnSp>
+        <p:sp>
+          <p:nvSpPr>
+            <p:cNvPr id="216" name="Google Shape;216;p32"/>
+            <p:cNvSpPr txBox="1"/>
+            <p:nvPr/>
+          </p:nvSpPr>
+          <p:spPr>
+            <a:xfrm>
+              <a:off x="7348991" y="2862675"/>
+              <a:ext cx="933000" cy="400200"/>
+            </a:xfrm>
+            <a:prstGeom prst="rect">
+              <a:avLst/>
+            </a:prstGeom>
+            <a:noFill/>
+            <a:ln>
+              <a:noFill/>
+            </a:ln>
+          </p:spPr>
+          <p:txBody>
+            <a:bodyPr anchorCtr="0" anchor="t" bIns="91425" lIns="91425" spcFirstLastPara="1" rIns="91425" wrap="square" tIns="91425">
+              <a:spAutoFit/>
+            </a:bodyPr>
+            <a:lstStyle/>
+            <a:p>
+              <a:pPr indent="0" lvl="0" marL="0" rtl="0" algn="l">
+                <a:spcBef>
+                  <a:spcPts val="0"/>
+                </a:spcBef>
+                <a:spcAft>
+                  <a:spcPts val="0"/>
+                </a:spcAft>
+                <a:buNone/>
+              </a:pPr>
+              <a:r>
+                <a:rPr lang="en-GB"/>
+                <a:t>p</a:t>
+              </a:r>
+              <a:r>
+                <a:rPr lang="en-GB"/>
+                <a:t> = 1 − s</a:t>
+              </a:r>
+              <a:endParaRPr/>
+            </a:p>
+          </p:txBody>
+        </p:sp>
+        <p:sp>
+          <p:nvSpPr>
+            <p:cNvPr id="217" name="Google Shape;217;p32"/>
+            <p:cNvSpPr txBox="1"/>
+            <p:nvPr/>
+          </p:nvSpPr>
+          <p:spPr>
+            <a:xfrm>
+              <a:off x="4842577" y="3688831"/>
+              <a:ext cx="1155600" cy="431100"/>
+            </a:xfrm>
+            <a:prstGeom prst="rect">
+              <a:avLst/>
+            </a:prstGeom>
+            <a:noFill/>
+            <a:ln>
+              <a:noFill/>
+            </a:ln>
+          </p:spPr>
+          <p:txBody>
+            <a:bodyPr anchorCtr="0" anchor="t" bIns="91425" lIns="91425" spcFirstLastPara="1" rIns="91425" wrap="square" tIns="91425">
+              <a:spAutoFit/>
+            </a:bodyPr>
+            <a:lstStyle/>
+            <a:p>
+              <a:pPr indent="0" lvl="0" marL="0" rtl="0" algn="l">
+                <a:spcBef>
+                  <a:spcPts val="0"/>
+                </a:spcBef>
+                <a:spcAft>
+                  <a:spcPts val="0"/>
+                </a:spcAft>
+                <a:buNone/>
+              </a:pPr>
+              <a:r>
+                <a:rPr lang="en-GB" sz="1600">
+                  <a:solidFill>
+                    <a:schemeClr val="dk2"/>
+                  </a:solidFill>
+                  <a:latin typeface="Roboto"/>
+                  <a:ea typeface="Roboto"/>
+                  <a:cs typeface="Roboto"/>
+                  <a:sym typeface="Roboto"/>
+                </a:rPr>
+                <a:t>S</a:t>
+              </a:r>
+              <a:r>
+                <a:rPr baseline="-25000" lang="en-GB" sz="1600">
+                  <a:solidFill>
+                    <a:schemeClr val="dk2"/>
+                  </a:solidFill>
+                  <a:latin typeface="Roboto"/>
+                  <a:ea typeface="Roboto"/>
+                  <a:cs typeface="Roboto"/>
+                  <a:sym typeface="Roboto"/>
+                </a:rPr>
+                <a:t>theoretical</a:t>
+              </a:r>
+              <a:r>
+                <a:rPr lang="en-GB" sz="1600">
+                  <a:solidFill>
+                    <a:schemeClr val="dk2"/>
+                  </a:solidFill>
+                  <a:latin typeface="Roboto"/>
+                  <a:ea typeface="Roboto"/>
+                  <a:cs typeface="Roboto"/>
+                  <a:sym typeface="Roboto"/>
+                </a:rPr>
+                <a:t> = </a:t>
+              </a:r>
+              <a:endParaRPr sz="1600">
+                <a:solidFill>
+                  <a:schemeClr val="dk2"/>
+                </a:solidFill>
+                <a:latin typeface="Roboto"/>
+                <a:ea typeface="Roboto"/>
+                <a:cs typeface="Roboto"/>
+                <a:sym typeface="Roboto"/>
+              </a:endParaRPr>
+            </a:p>
+          </p:txBody>
+        </p:sp>
+        <p:sp>
+          <p:nvSpPr>
+            <p:cNvPr id="218" name="Google Shape;218;p32"/>
+            <p:cNvSpPr txBox="1"/>
+            <p:nvPr/>
+          </p:nvSpPr>
+          <p:spPr>
+            <a:xfrm>
+              <a:off x="5761702" y="3888739"/>
+              <a:ext cx="872100" cy="431100"/>
+            </a:xfrm>
+            <a:prstGeom prst="rect">
+              <a:avLst/>
+            </a:prstGeom>
+            <a:noFill/>
+            <a:ln>
+              <a:noFill/>
+            </a:ln>
+          </p:spPr>
+          <p:txBody>
+            <a:bodyPr anchorCtr="0" anchor="t" bIns="91425" lIns="91425" spcFirstLastPara="1" rIns="91425" wrap="square" tIns="91425">
+              <a:spAutoFit/>
+            </a:bodyPr>
+            <a:lstStyle/>
+            <a:p>
+              <a:pPr indent="0" lvl="0" marL="0" rtl="0" algn="ctr">
+                <a:spcBef>
+                  <a:spcPts val="0"/>
+                </a:spcBef>
+                <a:spcAft>
+                  <a:spcPts val="0"/>
+                </a:spcAft>
+                <a:buNone/>
+              </a:pPr>
+              <a:r>
+                <a:rPr lang="en-GB" sz="1600">
+                  <a:solidFill>
+                    <a:schemeClr val="dk2"/>
+                  </a:solidFill>
+                  <a:latin typeface="Roboto"/>
+                  <a:ea typeface="Roboto"/>
+                  <a:cs typeface="Roboto"/>
+                  <a:sym typeface="Roboto"/>
+                </a:rPr>
+                <a:t>s + p/P</a:t>
+              </a:r>
+              <a:endParaRPr baseline="-25000" sz="1600">
+                <a:solidFill>
+                  <a:schemeClr val="dk2"/>
+                </a:solidFill>
+                <a:latin typeface="Roboto"/>
+                <a:ea typeface="Roboto"/>
+                <a:cs typeface="Roboto"/>
+                <a:sym typeface="Roboto"/>
+              </a:endParaRPr>
+            </a:p>
+          </p:txBody>
+        </p:sp>
+        <p:sp>
+          <p:nvSpPr>
+            <p:cNvPr id="219" name="Google Shape;219;p32"/>
+            <p:cNvSpPr txBox="1"/>
+            <p:nvPr/>
+          </p:nvSpPr>
+          <p:spPr>
+            <a:xfrm>
+              <a:off x="5856350" y="3485150"/>
+              <a:ext cx="682800" cy="431100"/>
+            </a:xfrm>
+            <a:prstGeom prst="rect">
+              <a:avLst/>
+            </a:prstGeom>
+            <a:noFill/>
+            <a:ln>
+              <a:noFill/>
+            </a:ln>
+          </p:spPr>
+          <p:txBody>
+            <a:bodyPr anchorCtr="0" anchor="t" bIns="91425" lIns="91425" spcFirstLastPara="1" rIns="91425" wrap="square" tIns="91425">
+              <a:spAutoFit/>
+            </a:bodyPr>
+            <a:lstStyle/>
+            <a:p>
+              <a:pPr indent="0" lvl="0" marL="0" rtl="0" algn="ctr">
+                <a:spcBef>
+                  <a:spcPts val="0"/>
+                </a:spcBef>
+                <a:spcAft>
+                  <a:spcPts val="0"/>
+                </a:spcAft>
+                <a:buNone/>
+              </a:pPr>
+              <a:r>
+                <a:rPr lang="en-GB" sz="1600">
+                  <a:solidFill>
+                    <a:schemeClr val="dk2"/>
+                  </a:solidFill>
+                  <a:latin typeface="Roboto"/>
+                  <a:ea typeface="Roboto"/>
+                  <a:cs typeface="Roboto"/>
+                  <a:sym typeface="Roboto"/>
+                </a:rPr>
+                <a:t>1</a:t>
+              </a:r>
+              <a:endParaRPr baseline="-25000" sz="1600">
+                <a:solidFill>
+                  <a:schemeClr val="dk2"/>
+                </a:solidFill>
+                <a:latin typeface="Roboto"/>
+                <a:ea typeface="Roboto"/>
+                <a:cs typeface="Roboto"/>
+                <a:sym typeface="Roboto"/>
+              </a:endParaRPr>
+            </a:p>
+          </p:txBody>
+        </p:sp>
+        <p:cxnSp>
+          <p:nvCxnSpPr>
+            <p:cNvPr id="220" name="Google Shape;220;p32"/>
+            <p:cNvCxnSpPr/>
+            <p:nvPr/>
+          </p:nvCxnSpPr>
+          <p:spPr>
+            <a:xfrm>
+              <a:off x="5849152" y="3935478"/>
+              <a:ext cx="682800" cy="0"/>
+            </a:xfrm>
+            <a:prstGeom prst="straightConnector1">
+              <a:avLst/>
+            </a:prstGeom>
+            <a:noFill/>
+            <a:ln cap="flat" cmpd="sng" w="28575">
+              <a:solidFill>
+                <a:schemeClr val="dk2"/>
+              </a:solidFill>
+              <a:prstDash val="solid"/>
+              <a:round/>
+              <a:headEnd len="med" w="med" type="none"/>
+              <a:tailEnd len="med" w="med" type="none"/>
+            </a:ln>
+          </p:spPr>
+        </p:cxnSp>
+      </p:grpSp>
+    </p:spTree>
+  </p:cSld>
+  <p:clrMapOvr>
+    <a:masterClrMapping/>
+  </p:clrMapOvr>
+</p:sld>
+</file>
+
+<file path=ppt/slides/slide21.xml><?xml version="1.0" encoding="utf-8"?>
+<p:sld xmlns:a="http://schemas.openxmlformats.org/drawingml/2006/main" xmlns:r="http://schemas.openxmlformats.org/officeDocument/2006/relationships" xmlns:mc="http://schemas.openxmlformats.org/markup-compatibility/2006" xmlns:mv="urn:schemas-microsoft-com:mac:vml" xmlns:p="http://schemas.openxmlformats.org/presentationml/2006/main" xmlns:c="http://schemas.openxmlformats.org/drawingml/2006/chart" xmlns:dgm="http://schemas.openxmlformats.org/drawingml/2006/diagram" xmlns:o="urn:schemas-microsoft-com:office:office" xmlns:v="urn:schemas-microsoft-com:vml" xmlns:pvml="urn:schemas-microsoft-com:office:powerpoint" xmlns:com="http://schemas.openxmlformats.org/drawingml/2006/compatibility" xmlns:p14="http://schemas.microsoft.com/office/powerpoint/2010/main" xmlns:p15="http://schemas.microsoft.com/office/powerpoint/2012/main" xmlns:ahyp="http://schemas.microsoft.com/office/drawing/2018/hyperlinkcolor">
+  <p:cSld>
+    <p:spTree>
+      <p:nvGrpSpPr>
+        <p:cNvPr id="224" name="Shape 224"/>
+        <p:cNvGrpSpPr/>
+        <p:nvPr/>
+      </p:nvGrpSpPr>
+      <p:grpSpPr>
+        <a:xfrm>
+          <a:off x="0" y="0"/>
+          <a:ext cx="0" cy="0"/>
+          <a:chOff x="0" y="0"/>
+          <a:chExt cx="0" cy="0"/>
+        </a:xfrm>
+      </p:grpSpPr>
+      <p:sp>
+        <p:nvSpPr>
+          <p:cNvPr id="225" name="Google Shape;225;p33"/>
+          <p:cNvSpPr txBox="1"/>
+          <p:nvPr/>
+        </p:nvSpPr>
+        <p:spPr>
+          <a:xfrm>
+            <a:off x="55029" y="4074579"/>
+            <a:ext cx="6877200" cy="738900"/>
+          </a:xfrm>
+          <a:prstGeom prst="rect">
+            <a:avLst/>
+          </a:prstGeom>
+          <a:noFill/>
+          <a:ln>
+            <a:noFill/>
+          </a:ln>
+        </p:spPr>
+        <p:txBody>
+          <a:bodyPr anchorCtr="0" anchor="t" bIns="91425" lIns="91425" spcFirstLastPara="1" rIns="91425" wrap="square" tIns="91425">
+            <a:spAutoFit/>
+          </a:bodyPr>
+          <a:lstStyle/>
+          <a:p>
+            <a:pPr indent="0" lvl="0" marL="0" rtl="0" algn="l">
+              <a:spcBef>
+                <a:spcPts val="0"/>
+              </a:spcBef>
+              <a:spcAft>
+                <a:spcPts val="0"/>
+              </a:spcAft>
+              <a:buNone/>
+            </a:pPr>
+            <a:r>
+              <a:rPr b="1" lang="en-GB" sz="1200"/>
+              <a:t>Experimental environment:</a:t>
+            </a:r>
+            <a:r>
+              <a:rPr lang="en-GB" sz="1200"/>
+              <a:t> Linux Docker environment with an Intel Core i9-9880H @ 2.30 GHz, 16 available CPU cores, Open MPI 4.1.2, and GCC compilation with -O2 optimisation.</a:t>
+            </a:r>
+            <a:endParaRPr sz="1200"/>
+          </a:p>
+          <a:p>
+            <a:pPr indent="0" lvl="0" marL="0" rtl="0" algn="l">
+              <a:spcBef>
+                <a:spcPts val="0"/>
+              </a:spcBef>
+              <a:spcAft>
+                <a:spcPts val="0"/>
+              </a:spcAft>
+              <a:buNone/>
+            </a:pPr>
+            <a:r>
+              <a:rPr lang="en-GB" sz="1200"/>
+              <a:t>3 runs per configuration.</a:t>
+            </a:r>
+            <a:endParaRPr sz="1200"/>
+          </a:p>
+        </p:txBody>
+      </p:sp>
+      <p:pic>
+        <p:nvPicPr>
+          <p:cNvPr id="226" name="Google Shape;226;p33"/>
+          <p:cNvPicPr preferRelativeResize="0"/>
+          <p:nvPr/>
+        </p:nvPicPr>
+        <p:blipFill>
+          <a:blip r:embed="rId3">
+            <a:alphaModFix/>
+          </a:blip>
+          <a:stretch>
+            <a:fillRect/>
+          </a:stretch>
+        </p:blipFill>
+        <p:spPr>
+          <a:xfrm>
+            <a:off x="55029" y="55029"/>
+            <a:ext cx="6877050" cy="4019550"/>
+          </a:xfrm>
+          <a:prstGeom prst="rect">
+            <a:avLst/>
+          </a:prstGeom>
+          <a:noFill/>
+          <a:ln>
+            <a:noFill/>
+          </a:ln>
+        </p:spPr>
+      </p:pic>
+      <p:sp>
+        <p:nvSpPr>
+          <p:cNvPr id="227" name="Google Shape;227;p33"/>
+          <p:cNvSpPr txBox="1"/>
+          <p:nvPr/>
+        </p:nvSpPr>
+        <p:spPr>
+          <a:xfrm>
+            <a:off x="6883199" y="55025"/>
+            <a:ext cx="2205900" cy="3458100"/>
+          </a:xfrm>
+          <a:prstGeom prst="rect">
+            <a:avLst/>
+          </a:prstGeom>
+          <a:noFill/>
+          <a:ln>
+            <a:noFill/>
+          </a:ln>
+        </p:spPr>
+        <p:txBody>
+          <a:bodyPr anchorCtr="0" anchor="t" bIns="91425" lIns="91425" spcFirstLastPara="1" rIns="91425" wrap="square" tIns="91425">
+            <a:spAutoFit/>
+          </a:bodyPr>
+          <a:lstStyle/>
+          <a:p>
+            <a:pPr indent="0" lvl="0" marL="0" rtl="0" algn="l">
+              <a:spcBef>
+                <a:spcPts val="0"/>
+              </a:spcBef>
+              <a:spcAft>
+                <a:spcPts val="0"/>
+              </a:spcAft>
+              <a:buNone/>
+            </a:pPr>
+            <a:r>
+              <a:rPr lang="en-GB"/>
+              <a:t>- Empirical speedup increased from </a:t>
+            </a:r>
+            <a:r>
+              <a:rPr b="1" lang="en-GB"/>
+              <a:t>1.59× </a:t>
+            </a:r>
+            <a:r>
+              <a:rPr lang="en-GB"/>
+              <a:t>to</a:t>
+            </a:r>
+            <a:r>
+              <a:rPr b="1" lang="en-GB"/>
+              <a:t> 7.39×</a:t>
+            </a:r>
+            <a:r>
+              <a:rPr lang="en-GB"/>
+              <a:t> up to 8 processes.</a:t>
+            </a:r>
+            <a:endParaRPr/>
+          </a:p>
+          <a:p>
+            <a:pPr indent="0" lvl="0" marL="0" rtl="0" algn="l">
+              <a:spcBef>
+                <a:spcPts val="1000"/>
+              </a:spcBef>
+              <a:spcAft>
+                <a:spcPts val="0"/>
+              </a:spcAft>
+              <a:buNone/>
+            </a:pPr>
+            <a:r>
+              <a:rPr lang="en-GB"/>
+              <a:t>- At </a:t>
+            </a:r>
+            <a:r>
+              <a:rPr lang="en-GB"/>
+              <a:t>16 processes</a:t>
+            </a:r>
+            <a:r>
+              <a:rPr lang="en-GB"/>
+              <a:t>, empirical speedup slightly decreased to </a:t>
+            </a:r>
+            <a:r>
+              <a:rPr b="1" lang="en-GB"/>
+              <a:t>7.39×</a:t>
+            </a:r>
+            <a:r>
+              <a:rPr lang="en-GB"/>
+              <a:t>, despite theoretical speedup increasing to </a:t>
+            </a:r>
+            <a:r>
+              <a:rPr b="1" lang="en-GB"/>
+              <a:t>10.52×</a:t>
+            </a:r>
+            <a:r>
+              <a:rPr lang="en-GB"/>
+              <a:t>.</a:t>
+            </a:r>
+            <a:endParaRPr/>
+          </a:p>
+          <a:p>
+            <a:pPr indent="0" lvl="0" marL="0" rtl="0" algn="l">
+              <a:spcBef>
+                <a:spcPts val="1000"/>
+              </a:spcBef>
+              <a:spcAft>
+                <a:spcPts val="1000"/>
+              </a:spcAft>
+              <a:buNone/>
+            </a:pPr>
+            <a:r>
+              <a:rPr lang="en-GB"/>
+              <a:t>- The gap at higher process counts indicates the effect of communication and parallelisation overheads.</a:t>
+            </a:r>
+            <a:endParaRPr/>
+          </a:p>
+        </p:txBody>
+      </p:sp>
+    </p:spTree>
+  </p:cSld>
+  <p:clrMapOvr>
+    <a:masterClrMapping/>
+  </p:clrMapOvr>
+</p:sld>
+</file>
+
+<file path=ppt/slides/slide22.xml><?xml version="1.0" encoding="utf-8"?>
+<p:sld xmlns:a="http://schemas.openxmlformats.org/drawingml/2006/main" xmlns:r="http://schemas.openxmlformats.org/officeDocument/2006/relationships" xmlns:mc="http://schemas.openxmlformats.org/markup-compatibility/2006" xmlns:mv="urn:schemas-microsoft-com:mac:vml" xmlns:p="http://schemas.openxmlformats.org/presentationml/2006/main" xmlns:c="http://schemas.openxmlformats.org/drawingml/2006/chart" xmlns:dgm="http://schemas.openxmlformats.org/drawingml/2006/diagram" xmlns:o="urn:schemas-microsoft-com:office:office" xmlns:v="urn:schemas-microsoft-com:vml" xmlns:pvml="urn:schemas-microsoft-com:office:powerpoint" xmlns:com="http://schemas.openxmlformats.org/drawingml/2006/compatibility" xmlns:p14="http://schemas.microsoft.com/office/powerpoint/2010/main" xmlns:p15="http://schemas.microsoft.com/office/powerpoint/2012/main" xmlns:ahyp="http://schemas.microsoft.com/office/drawing/2018/hyperlinkcolor">
+  <p:cSld>
+    <p:spTree>
+      <p:nvGrpSpPr>
+        <p:cNvPr id="231" name="Shape 231"/>
+        <p:cNvGrpSpPr/>
+        <p:nvPr/>
+      </p:nvGrpSpPr>
+      <p:grpSpPr>
+        <a:xfrm>
+          <a:off x="0" y="0"/>
+          <a:ext cx="0" cy="0"/>
+          <a:chOff x="0" y="0"/>
+          <a:chExt cx="0" cy="0"/>
+        </a:xfrm>
+      </p:grpSpPr>
+      <p:sp>
+        <p:nvSpPr>
+          <p:cNvPr id="232" name="Google Shape;232;p34"/>
+          <p:cNvSpPr txBox="1"/>
+          <p:nvPr/>
+        </p:nvSpPr>
+        <p:spPr>
+          <a:xfrm>
+            <a:off x="55029" y="4115879"/>
+            <a:ext cx="6786900" cy="738900"/>
+          </a:xfrm>
+          <a:prstGeom prst="rect">
+            <a:avLst/>
+          </a:prstGeom>
+          <a:noFill/>
+          <a:ln>
+            <a:noFill/>
+          </a:ln>
+        </p:spPr>
+        <p:txBody>
+          <a:bodyPr anchorCtr="0" anchor="t" bIns="91425" lIns="91425" spcFirstLastPara="1" rIns="91425" wrap="square" tIns="91425">
+            <a:spAutoFit/>
+          </a:bodyPr>
+          <a:lstStyle/>
+          <a:p>
+            <a:pPr indent="0" lvl="0" marL="0" rtl="0" algn="l">
+              <a:spcBef>
+                <a:spcPts val="0"/>
+              </a:spcBef>
+              <a:spcAft>
+                <a:spcPts val="0"/>
+              </a:spcAft>
+              <a:buNone/>
+            </a:pPr>
+            <a:r>
+              <a:rPr b="1" lang="en-GB" sz="1200"/>
+              <a:t>Experimental environment:</a:t>
+            </a:r>
+            <a:r>
+              <a:rPr lang="en-GB" sz="1200"/>
+              <a:t> Linux Docker environment with an Intel Core i9-9880H @ 2.30 GHz, 16 available CPU cores, Open MPI 4.1.2, and GCC compilation with -O2 optimisation. </a:t>
+            </a:r>
+            <a:endParaRPr sz="1200"/>
+          </a:p>
+          <a:p>
+            <a:pPr indent="0" lvl="0" marL="0" rtl="0" algn="l">
+              <a:spcBef>
+                <a:spcPts val="0"/>
+              </a:spcBef>
+              <a:spcAft>
+                <a:spcPts val="0"/>
+              </a:spcAft>
+              <a:buNone/>
+            </a:pPr>
+            <a:r>
+              <a:rPr lang="en-GB" sz="1200"/>
+              <a:t>3 runs per configuration.</a:t>
+            </a:r>
+            <a:endParaRPr sz="1200"/>
+          </a:p>
+        </p:txBody>
+      </p:sp>
+      <p:pic>
+        <p:nvPicPr>
+          <p:cNvPr id="233" name="Google Shape;233;p34"/>
+          <p:cNvPicPr preferRelativeResize="0"/>
+          <p:nvPr/>
+        </p:nvPicPr>
+        <p:blipFill>
+          <a:blip r:embed="rId3">
+            <a:alphaModFix/>
+          </a:blip>
+          <a:stretch>
+            <a:fillRect/>
+          </a:stretch>
+        </p:blipFill>
+        <p:spPr>
+          <a:xfrm>
+            <a:off x="55029" y="55029"/>
+            <a:ext cx="6786883" cy="4060850"/>
+          </a:xfrm>
+          <a:prstGeom prst="rect">
+            <a:avLst/>
+          </a:prstGeom>
+          <a:noFill/>
+          <a:ln>
+            <a:noFill/>
+          </a:ln>
+        </p:spPr>
+      </p:pic>
+      <p:sp>
+        <p:nvSpPr>
+          <p:cNvPr id="234" name="Google Shape;234;p34"/>
+          <p:cNvSpPr txBox="1"/>
+          <p:nvPr/>
+        </p:nvSpPr>
+        <p:spPr>
+          <a:xfrm>
+            <a:off x="6883199" y="55025"/>
+            <a:ext cx="2205900" cy="3801900"/>
+          </a:xfrm>
+          <a:prstGeom prst="rect">
+            <a:avLst/>
+          </a:prstGeom>
+          <a:noFill/>
+          <a:ln>
+            <a:noFill/>
+          </a:ln>
+        </p:spPr>
+        <p:txBody>
+          <a:bodyPr anchorCtr="0" anchor="t" bIns="91425" lIns="91425" spcFirstLastPara="1" rIns="91425" wrap="square" tIns="91425">
+            <a:spAutoFit/>
+          </a:bodyPr>
+          <a:lstStyle/>
+          <a:p>
+            <a:pPr indent="0" lvl="0" marL="0" rtl="0" algn="l">
+              <a:spcBef>
+                <a:spcPts val="0"/>
+              </a:spcBef>
+              <a:spcAft>
+                <a:spcPts val="0"/>
+              </a:spcAft>
+              <a:buNone/>
+            </a:pPr>
+            <a:r>
+              <a:rPr lang="en-GB"/>
+              <a:t>- </a:t>
+            </a:r>
+            <a:r>
+              <a:rPr lang="en-GB"/>
+              <a:t>Empirical speedup increased from </a:t>
+            </a:r>
+            <a:r>
+              <a:rPr b="1" lang="en-GB"/>
+              <a:t>1.06× </a:t>
+            </a:r>
+            <a:r>
+              <a:rPr lang="en-GB"/>
+              <a:t>to</a:t>
+            </a:r>
+            <a:r>
+              <a:rPr b="1" lang="en-GB"/>
+              <a:t> 6.96×</a:t>
+            </a:r>
+            <a:r>
+              <a:rPr lang="en-GB"/>
+              <a:t> as processes increased to 16.</a:t>
+            </a:r>
+            <a:endParaRPr/>
+          </a:p>
+          <a:p>
+            <a:pPr indent="0" lvl="0" marL="0" rtl="0" algn="l">
+              <a:spcBef>
+                <a:spcPts val="1000"/>
+              </a:spcBef>
+              <a:spcAft>
+                <a:spcPts val="0"/>
+              </a:spcAft>
+              <a:buNone/>
+            </a:pPr>
+            <a:r>
+              <a:rPr lang="en-GB"/>
+              <a:t>- Theoretical speedup increased from </a:t>
+            </a:r>
+            <a:r>
+              <a:rPr b="1" lang="en-GB"/>
+              <a:t>1.00× </a:t>
+            </a:r>
+            <a:r>
+              <a:rPr lang="en-GB"/>
+              <a:t>to</a:t>
+            </a:r>
+            <a:r>
+              <a:rPr b="1" lang="en-GB"/>
+              <a:t> 12.63×</a:t>
+            </a:r>
+            <a:r>
+              <a:rPr lang="en-GB"/>
+              <a:t>.</a:t>
+            </a:r>
+            <a:endParaRPr/>
+          </a:p>
+          <a:p>
+            <a:pPr indent="0" lvl="0" marL="0" marR="0" rtl="0" algn="l">
+              <a:lnSpc>
+                <a:spcPct val="100000"/>
+              </a:lnSpc>
+              <a:spcBef>
+                <a:spcPts val="1000"/>
+              </a:spcBef>
+              <a:spcAft>
+                <a:spcPts val="0"/>
+              </a:spcAft>
+              <a:buNone/>
+            </a:pPr>
+            <a:r>
+              <a:rPr lang="en-GB"/>
+              <a:t>- Gap between empirical and theoretical speedup became larger as no. of processes increased.</a:t>
+            </a:r>
+            <a:endParaRPr/>
+          </a:p>
+          <a:p>
+            <a:pPr indent="0" lvl="0" marL="0" marR="0" rtl="0" algn="l">
+              <a:lnSpc>
+                <a:spcPct val="100000"/>
+              </a:lnSpc>
+              <a:spcBef>
+                <a:spcPts val="1000"/>
+              </a:spcBef>
+              <a:spcAft>
+                <a:spcPts val="1000"/>
+              </a:spcAft>
+              <a:buNone/>
+            </a:pPr>
+            <a:r>
+              <a:rPr lang="en-GB"/>
+              <a:t>- Larger workload → better scaling, but overhead still limits real speedup.</a:t>
+            </a:r>
+            <a:endParaRPr/>
+          </a:p>
+        </p:txBody>
+      </p:sp>
+    </p:spTree>
+  </p:cSld>
+  <p:clrMapOvr>
+    <a:masterClrMapping/>
+  </p:clrMapOvr>
+</p:sld>
+</file>
+
+<file path=ppt/slides/slide23.xml><?xml version="1.0" encoding="utf-8"?>
+<p:sld xmlns:a="http://schemas.openxmlformats.org/drawingml/2006/main" xmlns:r="http://schemas.openxmlformats.org/officeDocument/2006/relationships" xmlns:mc="http://schemas.openxmlformats.org/markup-compatibility/2006" xmlns:mv="urn:schemas-microsoft-com:mac:vml" xmlns:p="http://schemas.openxmlformats.org/presentationml/2006/main" xmlns:c="http://schemas.openxmlformats.org/drawingml/2006/chart" xmlns:dgm="http://schemas.openxmlformats.org/drawingml/2006/diagram" xmlns:o="urn:schemas-microsoft-com:office:office" xmlns:v="urn:schemas-microsoft-com:vml" xmlns:pvml="urn:schemas-microsoft-com:office:powerpoint" xmlns:com="http://schemas.openxmlformats.org/drawingml/2006/compatibility" xmlns:p14="http://schemas.microsoft.com/office/powerpoint/2010/main" xmlns:p15="http://schemas.microsoft.com/office/powerpoint/2012/main" xmlns:ahyp="http://schemas.microsoft.com/office/drawing/2018/hyperlinkcolor">
+  <p:cSld>
+    <p:spTree>
+      <p:nvGrpSpPr>
+        <p:cNvPr id="238" name="Shape 238"/>
+        <p:cNvGrpSpPr/>
+        <p:nvPr/>
+      </p:nvGrpSpPr>
+      <p:grpSpPr>
+        <a:xfrm>
+          <a:off x="0" y="0"/>
+          <a:ext cx="0" cy="0"/>
+          <a:chOff x="0" y="0"/>
+          <a:chExt cx="0" cy="0"/>
+        </a:xfrm>
+      </p:grpSpPr>
+      <p:sp>
+        <p:nvSpPr>
+          <p:cNvPr id="239" name="Google Shape;239;p35"/>
+          <p:cNvSpPr txBox="1"/>
+          <p:nvPr/>
+        </p:nvSpPr>
+        <p:spPr>
+          <a:xfrm>
+            <a:off x="55029" y="4115879"/>
+            <a:ext cx="6774300" cy="738900"/>
+          </a:xfrm>
+          <a:prstGeom prst="rect">
+            <a:avLst/>
+          </a:prstGeom>
+          <a:noFill/>
+          <a:ln>
+            <a:noFill/>
+          </a:ln>
+        </p:spPr>
+        <p:txBody>
+          <a:bodyPr anchorCtr="0" anchor="t" bIns="91425" lIns="91425" spcFirstLastPara="1" rIns="91425" wrap="square" tIns="91425">
+            <a:spAutoFit/>
+          </a:bodyPr>
+          <a:lstStyle/>
+          <a:p>
+            <a:pPr indent="0" lvl="0" marL="0" rtl="0" algn="l">
+              <a:spcBef>
+                <a:spcPts val="0"/>
+              </a:spcBef>
+              <a:spcAft>
+                <a:spcPts val="0"/>
+              </a:spcAft>
+              <a:buNone/>
+            </a:pPr>
+            <a:r>
+              <a:rPr b="1" lang="en-GB" sz="1200"/>
+              <a:t>Experimental environment:</a:t>
+            </a:r>
+            <a:r>
+              <a:rPr lang="en-GB" sz="1200"/>
+              <a:t> Linux Docker environment with an Intel Core i9-9880H @ 2.30 GHz, 16 available CPU cores, Open MPI 4.1.2, and GCC compilation with -O2 optimisation.</a:t>
+            </a:r>
+            <a:endParaRPr sz="1200"/>
+          </a:p>
+          <a:p>
+            <a:pPr indent="0" lvl="0" marL="0" rtl="0" algn="l">
+              <a:spcBef>
+                <a:spcPts val="0"/>
+              </a:spcBef>
+              <a:spcAft>
+                <a:spcPts val="0"/>
+              </a:spcAft>
+              <a:buNone/>
+            </a:pPr>
+            <a:r>
+              <a:rPr lang="en-GB" sz="1200"/>
+              <a:t>3 runs per configuration.</a:t>
+            </a:r>
+            <a:endParaRPr sz="1200"/>
+          </a:p>
+        </p:txBody>
+      </p:sp>
+      <p:pic>
+        <p:nvPicPr>
+          <p:cNvPr id="240" name="Google Shape;240;p35"/>
+          <p:cNvPicPr preferRelativeResize="0"/>
+          <p:nvPr/>
+        </p:nvPicPr>
+        <p:blipFill>
+          <a:blip r:embed="rId3">
+            <a:alphaModFix/>
+          </a:blip>
+          <a:stretch>
+            <a:fillRect/>
+          </a:stretch>
+        </p:blipFill>
+        <p:spPr>
+          <a:xfrm>
+            <a:off x="55029" y="55029"/>
+            <a:ext cx="6774321" cy="4060850"/>
+          </a:xfrm>
+          <a:prstGeom prst="rect">
+            <a:avLst/>
+          </a:prstGeom>
+          <a:noFill/>
+          <a:ln>
+            <a:noFill/>
+          </a:ln>
+        </p:spPr>
+      </p:pic>
+      <p:sp>
+        <p:nvSpPr>
+          <p:cNvPr id="241" name="Google Shape;241;p35"/>
+          <p:cNvSpPr txBox="1"/>
+          <p:nvPr/>
+        </p:nvSpPr>
+        <p:spPr>
+          <a:xfrm>
+            <a:off x="6883199" y="55025"/>
+            <a:ext cx="2205900" cy="3673500"/>
+          </a:xfrm>
+          <a:prstGeom prst="rect">
+            <a:avLst/>
+          </a:prstGeom>
+          <a:noFill/>
+          <a:ln>
+            <a:noFill/>
+          </a:ln>
+        </p:spPr>
+        <p:txBody>
+          <a:bodyPr anchorCtr="0" anchor="t" bIns="91425" lIns="91425" spcFirstLastPara="1" rIns="91425" wrap="square" tIns="91425">
+            <a:spAutoFit/>
+          </a:bodyPr>
+          <a:lstStyle/>
+          <a:p>
+            <a:pPr indent="0" lvl="0" marL="0" rtl="0" algn="l">
+              <a:spcBef>
+                <a:spcPts val="0"/>
+              </a:spcBef>
+              <a:spcAft>
+                <a:spcPts val="0"/>
+              </a:spcAft>
+              <a:buNone/>
+            </a:pPr>
+            <a:r>
+              <a:rPr lang="en-GB"/>
+              <a:t>- </a:t>
+            </a:r>
+            <a:r>
+              <a:rPr lang="en-GB"/>
+              <a:t>Increasing OpenMP threads generally improved empirical speedup for a fixed MPI process count.</a:t>
+            </a:r>
+            <a:endParaRPr/>
+          </a:p>
+          <a:p>
+            <a:pPr indent="0" lvl="0" marL="0" rtl="0" algn="l">
+              <a:spcBef>
+                <a:spcPts val="1000"/>
+              </a:spcBef>
+              <a:spcAft>
+                <a:spcPts val="0"/>
+              </a:spcAft>
+              <a:buNone/>
+            </a:pPr>
+            <a:r>
+              <a:rPr lang="en-GB"/>
+              <a:t>- Configurations with the same number of total workers have the same theoretical Amdahl speedup.</a:t>
+            </a:r>
+            <a:endParaRPr/>
+          </a:p>
+          <a:p>
+            <a:pPr indent="0" lvl="0" marL="0" rtl="0" algn="l">
+              <a:spcBef>
+                <a:spcPts val="1000"/>
+              </a:spcBef>
+              <a:spcAft>
+                <a:spcPts val="1000"/>
+              </a:spcAft>
+              <a:buNone/>
+            </a:pPr>
+            <a:r>
+              <a:rPr lang="en-GB"/>
+              <a:t>- At higher worker counts, empirical speedup increasingly diverged from the theoretical prediction.</a:t>
+            </a:r>
+            <a:endParaRPr/>
+          </a:p>
+        </p:txBody>
+      </p:sp>
+    </p:spTree>
+  </p:cSld>
+  <p:clrMapOvr>
+    <a:masterClrMapping/>
+  </p:clrMapOvr>
+</p:sld>
+</file>
+
+<file path=ppt/slides/slide24.xml><?xml version="1.0" encoding="utf-8"?>
+<p:sld xmlns:a="http://schemas.openxmlformats.org/drawingml/2006/main" xmlns:r="http://schemas.openxmlformats.org/officeDocument/2006/relationships" xmlns:mc="http://schemas.openxmlformats.org/markup-compatibility/2006" xmlns:mv="urn:schemas-microsoft-com:mac:vml" xmlns:p="http://schemas.openxmlformats.org/presentationml/2006/main" xmlns:c="http://schemas.openxmlformats.org/drawingml/2006/chart" xmlns:dgm="http://schemas.openxmlformats.org/drawingml/2006/diagram" xmlns:o="urn:schemas-microsoft-com:office:office" xmlns:v="urn:schemas-microsoft-com:vml" xmlns:pvml="urn:schemas-microsoft-com:office:powerpoint" xmlns:com="http://schemas.openxmlformats.org/drawingml/2006/compatibility" xmlns:p14="http://schemas.microsoft.com/office/powerpoint/2010/main" xmlns:p15="http://schemas.microsoft.com/office/powerpoint/2012/main" xmlns:ahyp="http://schemas.microsoft.com/office/drawing/2018/hyperlinkcolor">
+  <p:cSld>
+    <p:spTree>
+      <p:nvGrpSpPr>
+        <p:cNvPr id="245" name="Shape 245"/>
+        <p:cNvGrpSpPr/>
+        <p:nvPr/>
+      </p:nvGrpSpPr>
+      <p:grpSpPr>
+        <a:xfrm>
+          <a:off x="0" y="0"/>
+          <a:ext cx="0" cy="0"/>
+          <a:chOff x="0" y="0"/>
+          <a:chExt cx="0" cy="0"/>
+        </a:xfrm>
+      </p:grpSpPr>
+      <p:sp>
+        <p:nvSpPr>
+          <p:cNvPr id="246" name="Google Shape;246;p36"/>
+          <p:cNvSpPr txBox="1"/>
+          <p:nvPr/>
+        </p:nvSpPr>
+        <p:spPr>
+          <a:xfrm>
+            <a:off x="45858" y="4106708"/>
+            <a:ext cx="6543900" cy="738900"/>
+          </a:xfrm>
+          <a:prstGeom prst="rect">
+            <a:avLst/>
+          </a:prstGeom>
+          <a:noFill/>
+          <a:ln>
+            <a:noFill/>
+          </a:ln>
+        </p:spPr>
+        <p:txBody>
+          <a:bodyPr anchorCtr="0" anchor="t" bIns="91425" lIns="91425" spcFirstLastPara="1" rIns="91425" wrap="square" tIns="91425">
+            <a:spAutoFit/>
+          </a:bodyPr>
+          <a:lstStyle/>
+          <a:p>
+            <a:pPr indent="0" lvl="0" marL="0" rtl="0" algn="l">
+              <a:spcBef>
+                <a:spcPts val="0"/>
+              </a:spcBef>
+              <a:spcAft>
+                <a:spcPts val="0"/>
+              </a:spcAft>
+              <a:buNone/>
+            </a:pPr>
+            <a:r>
+              <a:rPr b="1" lang="en-GB" sz="1200"/>
+              <a:t>Experimental environment:</a:t>
+            </a:r>
+            <a:r>
+              <a:rPr lang="en-GB" sz="1200"/>
+              <a:t> Linux Docker environment with an Intel Core i9-9880H @ 2.30 GHz, 16 available CPU cores, Open MPI 4.1.2, and GCC compilation with -O2 optimisation.</a:t>
+            </a:r>
+            <a:endParaRPr sz="1200"/>
+          </a:p>
+          <a:p>
+            <a:pPr indent="0" lvl="0" marL="0" rtl="0" algn="l">
+              <a:spcBef>
+                <a:spcPts val="0"/>
+              </a:spcBef>
+              <a:spcAft>
+                <a:spcPts val="0"/>
+              </a:spcAft>
+              <a:buNone/>
+            </a:pPr>
+            <a:r>
+              <a:rPr lang="en-GB" sz="1200"/>
+              <a:t>3 runs per configuration.</a:t>
+            </a:r>
+            <a:endParaRPr sz="1200"/>
+          </a:p>
+        </p:txBody>
+      </p:sp>
+      <p:pic>
+        <p:nvPicPr>
+          <p:cNvPr id="247" name="Google Shape;247;p36"/>
+          <p:cNvPicPr preferRelativeResize="0"/>
+          <p:nvPr/>
+        </p:nvPicPr>
+        <p:blipFill>
+          <a:blip r:embed="rId3">
+            <a:alphaModFix/>
+          </a:blip>
+          <a:stretch>
+            <a:fillRect/>
+          </a:stretch>
+        </p:blipFill>
+        <p:spPr>
+          <a:xfrm>
+            <a:off x="45865" y="45851"/>
+            <a:ext cx="6837338" cy="4060850"/>
+          </a:xfrm>
+          <a:prstGeom prst="rect">
+            <a:avLst/>
+          </a:prstGeom>
+          <a:noFill/>
+          <a:ln>
+            <a:noFill/>
+          </a:ln>
+        </p:spPr>
+      </p:pic>
+      <p:sp>
+        <p:nvSpPr>
+          <p:cNvPr id="248" name="Google Shape;248;p36"/>
+          <p:cNvSpPr txBox="1"/>
+          <p:nvPr/>
+        </p:nvSpPr>
+        <p:spPr>
+          <a:xfrm>
+            <a:off x="6883199" y="55025"/>
+            <a:ext cx="2205900" cy="3458100"/>
+          </a:xfrm>
+          <a:prstGeom prst="rect">
+            <a:avLst/>
+          </a:prstGeom>
+          <a:noFill/>
+          <a:ln>
+            <a:noFill/>
+          </a:ln>
+        </p:spPr>
+        <p:txBody>
+          <a:bodyPr anchorCtr="0" anchor="t" bIns="91425" lIns="91425" spcFirstLastPara="1" rIns="91425" wrap="square" tIns="91425">
+            <a:spAutoFit/>
+          </a:bodyPr>
+          <a:lstStyle/>
+          <a:p>
+            <a:pPr indent="0" lvl="0" marL="0" rtl="0" algn="l">
+              <a:spcBef>
+                <a:spcPts val="0"/>
+              </a:spcBef>
+              <a:spcAft>
+                <a:spcPts val="0"/>
+              </a:spcAft>
+              <a:buNone/>
+            </a:pPr>
+            <a:r>
+              <a:rPr lang="en-GB"/>
+              <a:t>- </a:t>
+            </a:r>
+            <a:r>
+              <a:rPr lang="en-GB"/>
+              <a:t>Empirical speedup increased with additional workers, but at a slower rate than theoretical speedup.</a:t>
+            </a:r>
+            <a:endParaRPr/>
+          </a:p>
+          <a:p>
+            <a:pPr indent="0" lvl="0" marL="0" rtl="0" algn="l">
+              <a:spcBef>
+                <a:spcPts val="1000"/>
+              </a:spcBef>
+              <a:spcAft>
+                <a:spcPts val="0"/>
+              </a:spcAft>
+              <a:buNone/>
+            </a:pPr>
+            <a:r>
+              <a:rPr lang="en-GB"/>
+              <a:t>- Theoretical speedup reached </a:t>
+            </a:r>
+            <a:r>
+              <a:rPr b="1" lang="en-GB"/>
+              <a:t>12.63×</a:t>
+            </a:r>
+            <a:r>
+              <a:rPr lang="en-GB"/>
+              <a:t> at 16 workers, while the best empirical speedup was </a:t>
+            </a:r>
+            <a:r>
+              <a:rPr b="1" lang="en-GB"/>
+              <a:t>8.49×</a:t>
+            </a:r>
+            <a:r>
+              <a:rPr lang="en-GB"/>
+              <a:t>.</a:t>
+            </a:r>
+            <a:endParaRPr/>
+          </a:p>
+          <a:p>
+            <a:pPr indent="0" lvl="0" marL="0" rtl="0" algn="l">
+              <a:spcBef>
+                <a:spcPts val="1000"/>
+              </a:spcBef>
+              <a:spcAft>
+                <a:spcPts val="1000"/>
+              </a:spcAft>
+              <a:buNone/>
+            </a:pPr>
+            <a:r>
+              <a:rPr lang="en-GB"/>
+              <a:t>- For 16 workers, </a:t>
+            </a:r>
+            <a:r>
+              <a:rPr b="1" lang="en-GB"/>
+              <a:t>1×16 </a:t>
+            </a:r>
+            <a:r>
+              <a:rPr lang="en-GB"/>
+              <a:t>achieved</a:t>
+            </a:r>
+            <a:r>
+              <a:rPr b="1" lang="en-GB"/>
+              <a:t> 8.49×</a:t>
+            </a:r>
+            <a:r>
+              <a:rPr lang="en-GB"/>
+              <a:t>, compared with </a:t>
+            </a:r>
+            <a:r>
+              <a:rPr b="1" lang="en-GB"/>
+              <a:t>16×1 </a:t>
+            </a:r>
+            <a:r>
+              <a:rPr lang="en-GB"/>
+              <a:t>at</a:t>
+            </a:r>
+            <a:r>
+              <a:rPr b="1" lang="en-GB"/>
+              <a:t> 5.09×</a:t>
+            </a:r>
+            <a:r>
+              <a:rPr lang="en-GB"/>
+              <a:t>.</a:t>
+            </a:r>
+            <a:endParaRPr/>
+          </a:p>
+        </p:txBody>
+      </p:sp>
+    </p:spTree>
+  </p:cSld>
+  <p:clrMapOvr>
+    <a:masterClrMapping/>
+  </p:clrMapOvr>
+</p:sld>
+</file>
+
+<file path=ppt/slides/slide25.xml><?xml version="1.0" encoding="utf-8"?>
+<p:sld xmlns:a="http://schemas.openxmlformats.org/drawingml/2006/main" xmlns:r="http://schemas.openxmlformats.org/officeDocument/2006/relationships" xmlns:mc="http://schemas.openxmlformats.org/markup-compatibility/2006" xmlns:mv="urn:schemas-microsoft-com:mac:vml" xmlns:p="http://schemas.openxmlformats.org/presentationml/2006/main" xmlns:c="http://schemas.openxmlformats.org/drawingml/2006/chart" xmlns:dgm="http://schemas.openxmlformats.org/drawingml/2006/diagram" xmlns:o="urn:schemas-microsoft-com:office:office" xmlns:v="urn:schemas-microsoft-com:vml" xmlns:pvml="urn:schemas-microsoft-com:office:powerpoint" xmlns:com="http://schemas.openxmlformats.org/drawingml/2006/compatibility" xmlns:p14="http://schemas.microsoft.com/office/powerpoint/2010/main" xmlns:p15="http://schemas.microsoft.com/office/powerpoint/2012/main" xmlns:ahyp="http://schemas.microsoft.com/office/drawing/2018/hyperlinkcolor">
+  <p:cSld>
+    <p:spTree>
+      <p:nvGrpSpPr>
+        <p:cNvPr id="252" name="Shape 252"/>
+        <p:cNvGrpSpPr/>
+        <p:nvPr/>
+      </p:nvGrpSpPr>
+      <p:grpSpPr>
+        <a:xfrm>
+          <a:off x="0" y="0"/>
+          <a:ext cx="0" cy="0"/>
+          <a:chOff x="0" y="0"/>
+          <a:chExt cx="0" cy="0"/>
+        </a:xfrm>
+      </p:grpSpPr>
+      <p:sp>
+        <p:nvSpPr>
+          <p:cNvPr id="253" name="Google Shape;253;p37"/>
+          <p:cNvSpPr txBox="1"/>
+          <p:nvPr>
+            <p:ph type="title"/>
+          </p:nvPr>
+        </p:nvSpPr>
+        <p:spPr>
+          <a:xfrm>
+            <a:off x="311700" y="410000"/>
+            <a:ext cx="8520600" cy="607800"/>
+          </a:xfrm>
+          <a:prstGeom prst="rect">
+            <a:avLst/>
+          </a:prstGeom>
+        </p:spPr>
+        <p:txBody>
+          <a:bodyPr anchorCtr="0" anchor="t" bIns="91425" lIns="91425" spcFirstLastPara="1" rIns="91425" wrap="square" tIns="91425">
+            <a:normAutofit fontScale="90000"/>
+          </a:bodyPr>
+          <a:lstStyle/>
+          <a:p>
+            <a:pPr indent="0" lvl="0" marL="0" rtl="0" algn="l">
+              <a:spcBef>
+                <a:spcPts val="0"/>
+              </a:spcBef>
+              <a:spcAft>
+                <a:spcPts val="0"/>
+              </a:spcAft>
+              <a:buNone/>
+            </a:pPr>
+            <a:r>
+              <a:rPr lang="en-GB"/>
+              <a:t>Interesting Observations</a:t>
+            </a:r>
+            <a:endParaRPr/>
+          </a:p>
+        </p:txBody>
+      </p:sp>
+      <p:sp>
+        <p:nvSpPr>
+          <p:cNvPr id="254" name="Google Shape;254;p37"/>
+          <p:cNvSpPr txBox="1"/>
+          <p:nvPr>
+            <p:ph idx="1" type="body"/>
+          </p:nvPr>
+        </p:nvSpPr>
+        <p:spPr>
+          <a:xfrm>
+            <a:off x="311700" y="1184017"/>
+            <a:ext cx="8520600" cy="3339000"/>
+          </a:xfrm>
+          <a:prstGeom prst="rect">
+            <a:avLst/>
+          </a:prstGeom>
+        </p:spPr>
+        <p:txBody>
+          <a:bodyPr anchorCtr="0" anchor="t" bIns="91425" lIns="91425" spcFirstLastPara="1" rIns="91425" wrap="square" tIns="91425">
+            <a:noAutofit/>
+          </a:bodyPr>
+          <a:lstStyle/>
+          <a:p>
+            <a:pPr indent="-342900" lvl="0" marL="457200" rtl="0" algn="l">
+              <a:spcBef>
+                <a:spcPts val="0"/>
+              </a:spcBef>
+              <a:spcAft>
+                <a:spcPts val="0"/>
+              </a:spcAft>
+              <a:buClr>
+                <a:srgbClr val="000000"/>
+              </a:buClr>
+              <a:buSzPts val="1800"/>
+              <a:buFont typeface="Arial"/>
+              <a:buChar char="●"/>
+            </a:pPr>
+            <a:r>
+              <a:rPr lang="en-GB">
+                <a:solidFill>
+                  <a:srgbClr val="000000"/>
+                </a:solidFill>
+                <a:latin typeface="Arial"/>
+                <a:ea typeface="Arial"/>
+                <a:cs typeface="Arial"/>
+                <a:sym typeface="Arial"/>
+              </a:rPr>
+              <a:t>More workers do not guarantee proportional speedup.</a:t>
+            </a:r>
+            <a:endParaRPr>
+              <a:solidFill>
+                <a:srgbClr val="000000"/>
+              </a:solidFill>
+              <a:latin typeface="Arial"/>
+              <a:ea typeface="Arial"/>
+              <a:cs typeface="Arial"/>
+              <a:sym typeface="Arial"/>
+            </a:endParaRPr>
+          </a:p>
+          <a:p>
+            <a:pPr indent="-342900" lvl="0" marL="457200" rtl="0" algn="l">
+              <a:spcBef>
+                <a:spcPts val="1000"/>
+              </a:spcBef>
+              <a:spcAft>
+                <a:spcPts val="0"/>
+              </a:spcAft>
+              <a:buClr>
+                <a:srgbClr val="000000"/>
+              </a:buClr>
+              <a:buSzPts val="1800"/>
+              <a:buFont typeface="Arial"/>
+              <a:buChar char="●"/>
+            </a:pPr>
+            <a:r>
+              <a:rPr lang="en-GB">
+                <a:solidFill>
+                  <a:srgbClr val="000000"/>
+                </a:solidFill>
+                <a:latin typeface="Arial"/>
+                <a:ea typeface="Arial"/>
+                <a:cs typeface="Arial"/>
+                <a:sym typeface="Arial"/>
+              </a:rPr>
+              <a:t>Amdahl's Law predicts an upper bound, not actual performance.</a:t>
+            </a:r>
+            <a:endParaRPr>
+              <a:solidFill>
+                <a:srgbClr val="000000"/>
+              </a:solidFill>
+              <a:latin typeface="Arial"/>
+              <a:ea typeface="Arial"/>
+              <a:cs typeface="Arial"/>
+              <a:sym typeface="Arial"/>
+            </a:endParaRPr>
+          </a:p>
+          <a:p>
+            <a:pPr indent="-342900" lvl="0" marL="457200" rtl="0" algn="l">
+              <a:spcBef>
+                <a:spcPts val="1000"/>
+              </a:spcBef>
+              <a:spcAft>
+                <a:spcPts val="0"/>
+              </a:spcAft>
+              <a:buClr>
+                <a:srgbClr val="000000"/>
+              </a:buClr>
+              <a:buSzPts val="1800"/>
+              <a:buFont typeface="Arial"/>
+              <a:buChar char="●"/>
+            </a:pPr>
+            <a:r>
+              <a:rPr lang="en-GB">
+                <a:solidFill>
+                  <a:srgbClr val="000000"/>
+                </a:solidFill>
+                <a:latin typeface="Arial"/>
+                <a:ea typeface="Arial"/>
+                <a:cs typeface="Arial"/>
+                <a:sym typeface="Arial"/>
+              </a:rPr>
+              <a:t>Communication, synchronisation, scheduling and other overheads reduce empirical speedup.</a:t>
+            </a:r>
+            <a:endParaRPr>
+              <a:solidFill>
+                <a:srgbClr val="000000"/>
+              </a:solidFill>
+              <a:latin typeface="Arial"/>
+              <a:ea typeface="Arial"/>
+              <a:cs typeface="Arial"/>
+              <a:sym typeface="Arial"/>
+            </a:endParaRPr>
+          </a:p>
+          <a:p>
+            <a:pPr indent="-342900" lvl="0" marL="457200" rtl="0" algn="l">
+              <a:spcBef>
+                <a:spcPts val="1000"/>
+              </a:spcBef>
+              <a:spcAft>
+                <a:spcPts val="0"/>
+              </a:spcAft>
+              <a:buClr>
+                <a:srgbClr val="000000"/>
+              </a:buClr>
+              <a:buSzPts val="1800"/>
+              <a:buFont typeface="Arial"/>
+              <a:buChar char="●"/>
+            </a:pPr>
+            <a:r>
+              <a:rPr lang="en-GB">
+                <a:solidFill>
+                  <a:srgbClr val="000000"/>
+                </a:solidFill>
+                <a:latin typeface="Arial"/>
+                <a:ea typeface="Arial"/>
+                <a:cs typeface="Arial"/>
+                <a:sym typeface="Arial"/>
+              </a:rPr>
+              <a:t>MPI/OpenMP workload distribution affects performance even with the same total number of workers.</a:t>
+            </a:r>
+            <a:endParaRPr>
+              <a:solidFill>
+                <a:srgbClr val="000000"/>
+              </a:solidFill>
+              <a:latin typeface="Arial"/>
+              <a:ea typeface="Arial"/>
+              <a:cs typeface="Arial"/>
+              <a:sym typeface="Arial"/>
+            </a:endParaRPr>
+          </a:p>
+          <a:p>
+            <a:pPr indent="-342900" lvl="0" marL="457200" rtl="0" algn="l">
+              <a:spcBef>
+                <a:spcPts val="1000"/>
+              </a:spcBef>
+              <a:spcAft>
+                <a:spcPts val="1000"/>
+              </a:spcAft>
+              <a:buClr>
+                <a:srgbClr val="000000"/>
+              </a:buClr>
+              <a:buSzPts val="1800"/>
+              <a:buFont typeface="Arial"/>
+              <a:buChar char="●"/>
+            </a:pPr>
+            <a:r>
+              <a:rPr lang="en-GB">
+                <a:solidFill>
+                  <a:srgbClr val="000000"/>
+                </a:solidFill>
+                <a:latin typeface="Arial"/>
+                <a:ea typeface="Arial"/>
+                <a:cs typeface="Arial"/>
+                <a:sym typeface="Arial"/>
+              </a:rPr>
+              <a:t>Different machines can produce different empirical results due to hardware and system differences.</a:t>
+            </a:r>
+            <a:endParaRPr>
+              <a:solidFill>
+                <a:srgbClr val="000000"/>
+              </a:solidFill>
+              <a:latin typeface="Arial"/>
+              <a:ea typeface="Arial"/>
+              <a:cs typeface="Arial"/>
+              <a:sym typeface="Arial"/>
+            </a:endParaRPr>
+          </a:p>
+        </p:txBody>
+      </p:sp>
+    </p:spTree>
+  </p:cSld>
+  <p:clrMapOvr>
+    <a:masterClrMapping/>
+  </p:clrMapOvr>
+</p:sld>
+</file>
+
 <file path=ppt/slides/slide3.xml><?xml version="1.0" encoding="utf-8"?>
 <p:sld xmlns:a="http://schemas.openxmlformats.org/drawingml/2006/main" xmlns:r="http://schemas.openxmlformats.org/officeDocument/2006/relationships" xmlns:mc="http://schemas.openxmlformats.org/markup-compatibility/2006" xmlns:mv="urn:schemas-microsoft-com:mac:vml" xmlns:p="http://schemas.openxmlformats.org/presentationml/2006/main" xmlns:c="http://schemas.openxmlformats.org/drawingml/2006/chart" xmlns:dgm="http://schemas.openxmlformats.org/drawingml/2006/diagram" xmlns:o="urn:schemas-microsoft-com:office:office" xmlns:v="urn:schemas-microsoft-com:vml" xmlns:pvml="urn:schemas-microsoft-com:office:powerpoint" xmlns:com="http://schemas.openxmlformats.org/drawingml/2006/compatibility" xmlns:p14="http://schemas.microsoft.com/office/powerpoint/2010/main" xmlns:p15="http://schemas.microsoft.com/office/powerpoint/2012/main" xmlns:ahyp="http://schemas.microsoft.com/office/drawing/2018/hyperlinkcolor">
   <p:cSld>
@@ -9157,7 +13855,7 @@
             <a:tbl>
               <a:tblPr>
                 <a:noFill/>
-                <a:tableStyleId>{9B24586B-09AC-4940-B146-11C6ADCB7020}</a:tableStyleId>
+                <a:tableStyleId>{8D1B0170-831F-40A8-A691-63FB0E0BD69B}</a:tableStyleId>
               </a:tblPr>
               <a:tblGrid>
                 <a:gridCol w="1280650"/>
@@ -10028,7 +14726,7 @@
             </a:pPr>
             <a:r>
               <a:rPr lang="en-GB"/>
-              <a:t>This reduces the worst case difference of work done between two ranks from 2.24x to 1.12x</a:t>
+              <a:t>This reduces the worst case difference of work done between two ranks from 2.28x to 1.12x</a:t>
             </a:r>
             <a:endParaRPr/>
           </a:p>
@@ -10049,7 +14747,7 @@
             <a:tbl>
               <a:tblPr>
                 <a:noFill/>
-                <a:tableStyleId>{9B24586B-09AC-4940-B146-11C6ADCB7020}</a:tableStyleId>
+                <a:tableStyleId>{8D1B0170-831F-40A8-A691-63FB0E0BD69B}</a:tableStyleId>
               </a:tblPr>
               <a:tblGrid>
                 <a:gridCol w="1280650"/>
@@ -11233,18 +15931,18 @@
               <a:buNone/>
             </a:pPr>
             <a:r>
-              <a:rPr lang="en-GB" sz="1600"/>
-              <a:t>When processors used is within 1-4, the speedup is reasonable, staying within ⅔ efficiency, even if it does drop off as processors approaches 4. However, when the processors used is greater than 4, the speedup actually gets worse. This is </a:t>
+              <a:rPr lang="en-GB" sz="1400"/>
+              <a:t>When processors used is within 1-4, the speedup is reasonable, staying above  ⅔ efficiency, even if it does drop off as processors approaches 4. This drop off is most likely due to Amdahl’s law. However, when the processors used is greater than 4, the speedup actually gets worse. This is </a:t>
             </a:r>
             <a:r>
-              <a:rPr lang="en-GB" sz="1600"/>
+              <a:rPr lang="en-GB" sz="1400"/>
               <a:t>because</a:t>
             </a:r>
             <a:r>
-              <a:rPr lang="en-GB" sz="1600"/>
+              <a:rPr lang="en-GB" sz="1400"/>
               <a:t> we have to make use of the efficiency cores, which have a much lower clock speed and processing power than the super cores, and the communication and scheduling of these processors causes overhead.</a:t>
             </a:r>
-            <a:endParaRPr sz="1600"/>
+            <a:endParaRPr sz="1400"/>
           </a:p>
         </p:txBody>
       </p:sp>
@@ -11263,7 +15961,7 @@
             <a:tbl>
               <a:tblPr>
                 <a:noFill/>
-                <a:tableStyleId>{9B24586B-09AC-4940-B146-11C6ADCB7020}</a:tableStyleId>
+                <a:tableStyleId>{8D1B0170-831F-40A8-A691-63FB0E0BD69B}</a:tableStyleId>
               </a:tblPr>
               <a:tblGrid>
                 <a:gridCol w="1130400"/>
@@ -12208,7 +16906,7 @@
             </a:pPr>
             <a:r>
               <a:rPr lang="en-GB" sz="1600"/>
-              <a:t>When n is below 10^6, there is no speed up at all. This is because of the MPI overhead of having to schedule and run 4 processors at the same time. As n increases, the portion of work dedicated overhead, and actual prime computation flips, causing the speedup to gradually approach the theoretical limit of 4, as n gets higher.</a:t>
+              <a:t>When n is below 10^6, the implementation is slower than having only 1 processor. This is because of the MPI overhead of having to schedule and run 4 processors at the same time. As n increases, the portion of work dedicated overhead, and actual prime computation flips, causing the speedup to gradually approach the theoretical limit of 4 (as n-&gt;∞, as n gets higher.</a:t>
             </a:r>
             <a:endParaRPr sz="1600"/>
           </a:p>
@@ -12229,7 +16927,7 @@
             <a:tbl>
               <a:tblPr>
                 <a:noFill/>
-                <a:tableStyleId>{9B24586B-09AC-4940-B146-11C6ADCB7020}</a:tableStyleId>
+                <a:tableStyleId>{8D1B0170-831F-40A8-A691-63FB0E0BD69B}</a:tableStyleId>
               </a:tblPr>
               <a:tblGrid>
                 <a:gridCol w="904325"/>
@@ -13255,7 +17953,7 @@
             </a:pPr>
             <a:r>
               <a:rPr lang="en-GB"/>
-              <a:t>n=10,000,000</a:t>
+              <a:t>4 processors</a:t>
             </a:r>
             <a:endParaRPr/>
           </a:p>
@@ -13351,6 +18049,285 @@
 </file>
 
 <file path=ppt/theme/theme1.xml><?xml version="1.0" encoding="utf-8"?>
+<a:theme xmlns:a="http://schemas.openxmlformats.org/drawingml/2006/main" xmlns:r="http://schemas.openxmlformats.org/officeDocument/2006/relationships">
+  <a:themeElements>
+    <a:clrScheme name="Default">
+      <a:dk1>
+        <a:srgbClr val="000000"/>
+      </a:dk1>
+      <a:lt1>
+        <a:srgbClr val="FFFFFF"/>
+      </a:lt1>
+      <a:dk2>
+        <a:srgbClr val="158158"/>
+      </a:dk2>
+      <a:lt2>
+        <a:srgbClr val="F3F3F3"/>
+      </a:lt2>
+      <a:accent1>
+        <a:srgbClr val="058DC7"/>
+      </a:accent1>
+      <a:accent2>
+        <a:srgbClr val="50B432"/>
+      </a:accent2>
+      <a:accent3>
+        <a:srgbClr val="ED561B"/>
+      </a:accent3>
+      <a:accent4>
+        <a:srgbClr val="EDEF00"/>
+      </a:accent4>
+      <a:accent5>
+        <a:srgbClr val="24CBE5"/>
+      </a:accent5>
+      <a:accent6>
+        <a:srgbClr val="64E572"/>
+      </a:accent6>
+      <a:hlink>
+        <a:srgbClr val="2200CC"/>
+      </a:hlink>
+      <a:folHlink>
+        <a:srgbClr val="551A8B"/>
+      </a:folHlink>
+    </a:clrScheme>
+    <a:fontScheme name="Office">
+      <a:majorFont>
+        <a:latin typeface="Arial"/>
+        <a:ea typeface=""/>
+        <a:cs typeface=""/>
+        <a:font script="Jpan" typeface="ＭＳ Ｐゴシック"/>
+        <a:font script="Hang" typeface="맑은 고딕"/>
+        <a:font script="Hans" typeface="宋体"/>
+        <a:font script="Hant" typeface="新細明體"/>
+        <a:font script="Arab" typeface="Times New Roman"/>
+        <a:font script="Hebr" typeface="Times New Roman"/>
+        <a:font script="Thai" typeface="Angsana New"/>
+        <a:font script="Ethi" typeface="Nyala"/>
+        <a:font script="Beng" typeface="Vrinda"/>
+        <a:font script="Gujr" typeface="Shruti"/>
+        <a:font script="Khmr" typeface="MoolBoran"/>
+        <a:font script="Knda" typeface="Tunga"/>
+        <a:font script="Guru" typeface="Raavi"/>
+        <a:font script="Cans" typeface="Euphemia"/>
+        <a:font script="Cher" typeface="Plantagenet Cherokee"/>
+        <a:font script="Yiii" typeface="Microsoft Yi Baiti"/>
+        <a:font script="Tibt" typeface="Microsoft Himalaya"/>
+        <a:font script="Thaa" typeface="MV Boli"/>
+        <a:font script="Deva" typeface="Mangal"/>
+        <a:font script="Telu" typeface="Gautami"/>
+        <a:font script="Taml" typeface="Latha"/>
+        <a:font script="Syrc" typeface="Estrangelo Edessa"/>
+        <a:font script="Orya" typeface="Kalinga"/>
+        <a:font script="Mlym" typeface="Kartika"/>
+        <a:font script="Laoo" typeface="DokChampa"/>
+        <a:font script="Sinh" typeface="Iskoola Pota"/>
+        <a:font script="Mong" typeface="Mongolian Baiti"/>
+        <a:font script="Viet" typeface="Times New Roman"/>
+        <a:font script="Uigh" typeface="Microsoft Uighur"/>
+        <a:font script="Geor" typeface="Sylfaen"/>
+      </a:majorFont>
+      <a:minorFont>
+        <a:latin typeface="Arial"/>
+        <a:ea typeface=""/>
+        <a:cs typeface=""/>
+        <a:font script="Jpan" typeface="ＭＳ Ｐゴシック"/>
+        <a:font script="Hang" typeface="맑은 고딕"/>
+        <a:font script="Hans" typeface="宋体"/>
+        <a:font script="Hant" typeface="新細明體"/>
+        <a:font script="Arab" typeface="Arial"/>
+        <a:font script="Hebr" typeface="Arial"/>
+        <a:font script="Thai" typeface="Cordia New"/>
+        <a:font script="Ethi" typeface="Nyala"/>
+        <a:font script="Beng" typeface="Vrinda"/>
+        <a:font script="Gujr" typeface="Shruti"/>
+        <a:font script="Khmr" typeface="DaunPenh"/>
+        <a:font script="Knda" typeface="Tunga"/>
+        <a:font script="Guru" typeface="Raavi"/>
+        <a:font script="Cans" typeface="Euphemia"/>
+        <a:font script="Cher" typeface="Plantagenet Cherokee"/>
+        <a:font script="Yiii" typeface="Microsoft Yi Baiti"/>
+        <a:font script="Tibt" typeface="Microsoft Himalaya"/>
+        <a:font script="Thaa" typeface="MV Boli"/>
+        <a:font script="Deva" typeface="Mangal"/>
+        <a:font script="Telu" typeface="Gautami"/>
+        <a:font script="Taml" typeface="Latha"/>
+        <a:font script="Syrc" typeface="Estrangelo Edessa"/>
+        <a:font script="Orya" typeface="Kalinga"/>
+        <a:font script="Mlym" typeface="Kartika"/>
+        <a:font script="Laoo" typeface="DokChampa"/>
+        <a:font script="Sinh" typeface="Iskoola Pota"/>
+        <a:font script="Mong" typeface="Mongolian Baiti"/>
+        <a:font script="Viet" typeface="Arial"/>
+        <a:font script="Uigh" typeface="Microsoft Uighur"/>
+        <a:font script="Geor" typeface="Sylfaen"/>
+      </a:minorFont>
+    </a:fontScheme>
+    <a:fmtScheme name="Office">
+      <a:fillStyleLst>
+        <a:solidFill>
+          <a:schemeClr val="phClr"/>
+        </a:solidFill>
+        <a:gradFill rotWithShape="1">
+          <a:gsLst>
+            <a:gs pos="0">
+              <a:schemeClr val="phClr">
+                <a:tint val="50000"/>
+                <a:satMod val="300000"/>
+              </a:schemeClr>
+            </a:gs>
+            <a:gs pos="35000">
+              <a:schemeClr val="phClr">
+                <a:tint val="37000"/>
+                <a:satMod val="300000"/>
+              </a:schemeClr>
+            </a:gs>
+            <a:gs pos="100000">
+              <a:schemeClr val="phClr">
+                <a:tint val="15000"/>
+                <a:satMod val="350000"/>
+              </a:schemeClr>
+            </a:gs>
+          </a:gsLst>
+          <a:lin ang="16200000" scaled="1"/>
+        </a:gradFill>
+        <a:gradFill rotWithShape="1">
+          <a:gsLst>
+            <a:gs pos="0">
+              <a:schemeClr val="phClr">
+                <a:tint val="100000"/>
+                <a:shade val="100000"/>
+                <a:satMod val="130000"/>
+              </a:schemeClr>
+            </a:gs>
+            <a:gs pos="100000">
+              <a:schemeClr val="phClr">
+                <a:tint val="50000"/>
+                <a:shade val="100000"/>
+                <a:satMod val="350000"/>
+              </a:schemeClr>
+            </a:gs>
+          </a:gsLst>
+          <a:lin ang="16200000" scaled="0"/>
+        </a:gradFill>
+      </a:fillStyleLst>
+      <a:lnStyleLst>
+        <a:ln w="9525" cap="flat" cmpd="sng" algn="ctr">
+          <a:solidFill>
+            <a:schemeClr val="phClr">
+              <a:shade val="95000"/>
+              <a:satMod val="105000"/>
+            </a:schemeClr>
+          </a:solidFill>
+          <a:prstDash val="solid"/>
+        </a:ln>
+        <a:ln w="25400" cap="flat" cmpd="sng" algn="ctr">
+          <a:solidFill>
+            <a:schemeClr val="phClr"/>
+          </a:solidFill>
+          <a:prstDash val="solid"/>
+        </a:ln>
+        <a:ln w="38100" cap="flat" cmpd="sng" algn="ctr">
+          <a:solidFill>
+            <a:schemeClr val="phClr"/>
+          </a:solidFill>
+          <a:prstDash val="solid"/>
+        </a:ln>
+      </a:lnStyleLst>
+      <a:effectStyleLst>
+        <a:effectStyle>
+          <a:effectLst>
+            <a:outerShdw blurRad="40000" dist="20000" dir="5400000" rotWithShape="0">
+              <a:srgbClr val="000000">
+                <a:alpha val="38000"/>
+              </a:srgbClr>
+            </a:outerShdw>
+          </a:effectLst>
+        </a:effectStyle>
+        <a:effectStyle>
+          <a:effectLst>
+            <a:outerShdw blurRad="40000" dist="23000" dir="5400000" rotWithShape="0">
+              <a:srgbClr val="000000">
+                <a:alpha val="35000"/>
+              </a:srgbClr>
+            </a:outerShdw>
+          </a:effectLst>
+        </a:effectStyle>
+        <a:effectStyle>
+          <a:effectLst>
+            <a:outerShdw blurRad="40000" dist="23000" dir="5400000" rotWithShape="0">
+              <a:srgbClr val="000000">
+                <a:alpha val="35000"/>
+              </a:srgbClr>
+            </a:outerShdw>
+          </a:effectLst>
+          <a:scene3d>
+            <a:camera prst="orthographicFront">
+              <a:rot lat="0" lon="0" rev="0"/>
+            </a:camera>
+            <a:lightRig rig="threePt" dir="t">
+              <a:rot lat="0" lon="0" rev="1200000"/>
+            </a:lightRig>
+          </a:scene3d>
+          <a:sp3d>
+            <a:bevelT w="63500" h="25400"/>
+          </a:sp3d>
+        </a:effectStyle>
+      </a:effectStyleLst>
+      <a:bgFillStyleLst>
+        <a:solidFill>
+          <a:schemeClr val="phClr"/>
+        </a:solidFill>
+        <a:gradFill rotWithShape="1">
+          <a:gsLst>
+            <a:gs pos="0">
+              <a:schemeClr val="phClr">
+                <a:tint val="40000"/>
+                <a:satMod val="350000"/>
+              </a:schemeClr>
+            </a:gs>
+            <a:gs pos="40000">
+              <a:schemeClr val="phClr">
+                <a:tint val="45000"/>
+                <a:shade val="99000"/>
+                <a:satMod val="350000"/>
+              </a:schemeClr>
+            </a:gs>
+            <a:gs pos="100000">
+              <a:schemeClr val="phClr">
+                <a:shade val="20000"/>
+                <a:satMod val="255000"/>
+              </a:schemeClr>
+            </a:gs>
+          </a:gsLst>
+          <a:path path="circle">
+            <a:fillToRect l="50000" t="-80000" r="50000" b="180000"/>
+          </a:path>
+        </a:gradFill>
+        <a:gradFill rotWithShape="1">
+          <a:gsLst>
+            <a:gs pos="0">
+              <a:schemeClr val="phClr">
+                <a:tint val="80000"/>
+                <a:satMod val="300000"/>
+              </a:schemeClr>
+            </a:gs>
+            <a:gs pos="100000">
+              <a:schemeClr val="phClr">
+                <a:shade val="30000"/>
+                <a:satMod val="200000"/>
+              </a:schemeClr>
+            </a:gs>
+          </a:gsLst>
+          <a:path path="circle">
+            <a:fillToRect l="50000" t="50000" r="50000" b="50000"/>
+          </a:path>
+        </a:gradFill>
+      </a:bgFillStyleLst>
+    </a:fmtScheme>
+  </a:themeElements>
+</a:theme>
+</file>
+
+<file path=ppt/theme/theme2.xml><?xml version="1.0" encoding="utf-8"?>
 <a:theme xmlns:a="http://schemas.openxmlformats.org/drawingml/2006/main" xmlns:r="http://schemas.openxmlformats.org/officeDocument/2006/relationships" name="Geometric">
   <a:themeElements>
     <a:clrScheme name="Geometric">
@@ -13627,283 +18604,4 @@
     </a:fmtScheme>
   </a:themeElements>
 </a:theme>
-</file>
-
-<file path=ppt/theme/theme2.xml><?xml version="1.0" encoding="utf-8"?>
-<a:theme xmlns:a="http://schemas.openxmlformats.org/drawingml/2006/main" xmlns:r="http://schemas.openxmlformats.org/officeDocument/2006/relationships">
-  <a:themeElements>
-    <a:clrScheme name="Default">
-      <a:dk1>
-        <a:srgbClr val="000000"/>
-      </a:dk1>
-      <a:lt1>
-        <a:srgbClr val="FFFFFF"/>
-      </a:lt1>
-      <a:dk2>
-        <a:srgbClr val="158158"/>
-      </a:dk2>
-      <a:lt2>
-        <a:srgbClr val="F3F3F3"/>
-      </a:lt2>
-      <a:accent1>
-        <a:srgbClr val="058DC7"/>
-      </a:accent1>
-      <a:accent2>
-        <a:srgbClr val="50B432"/>
-      </a:accent2>
-      <a:accent3>
-        <a:srgbClr val="ED561B"/>
-      </a:accent3>
-      <a:accent4>
-        <a:srgbClr val="EDEF00"/>
-      </a:accent4>
-      <a:accent5>
-        <a:srgbClr val="24CBE5"/>
-      </a:accent5>
-      <a:accent6>
-        <a:srgbClr val="64E572"/>
-      </a:accent6>
-      <a:hlink>
-        <a:srgbClr val="2200CC"/>
-      </a:hlink>
-      <a:folHlink>
-        <a:srgbClr val="551A8B"/>
-      </a:folHlink>
-    </a:clrScheme>
-    <a:fontScheme name="Office">
-      <a:majorFont>
-        <a:latin typeface="Arial"/>
-        <a:ea typeface=""/>
-        <a:cs typeface=""/>
-        <a:font script="Jpan" typeface="ＭＳ Ｐゴシック"/>
-        <a:font script="Hang" typeface="맑은 고딕"/>
-        <a:font script="Hans" typeface="宋体"/>
-        <a:font script="Hant" typeface="新細明體"/>
-        <a:font script="Arab" typeface="Times New Roman"/>
-        <a:font script="Hebr" typeface="Times New Roman"/>
-        <a:font script="Thai" typeface="Angsana New"/>
-        <a:font script="Ethi" typeface="Nyala"/>
-        <a:font script="Beng" typeface="Vrinda"/>
-        <a:font script="Gujr" typeface="Shruti"/>
-        <a:font script="Khmr" typeface="MoolBoran"/>
-        <a:font script="Knda" typeface="Tunga"/>
-        <a:font script="Guru" typeface="Raavi"/>
-        <a:font script="Cans" typeface="Euphemia"/>
-        <a:font script="Cher" typeface="Plantagenet Cherokee"/>
-        <a:font script="Yiii" typeface="Microsoft Yi Baiti"/>
-        <a:font script="Tibt" typeface="Microsoft Himalaya"/>
-        <a:font script="Thaa" typeface="MV Boli"/>
-        <a:font script="Deva" typeface="Mangal"/>
-        <a:font script="Telu" typeface="Gautami"/>
-        <a:font script="Taml" typeface="Latha"/>
-        <a:font script="Syrc" typeface="Estrangelo Edessa"/>
-        <a:font script="Orya" typeface="Kalinga"/>
-        <a:font script="Mlym" typeface="Kartika"/>
-        <a:font script="Laoo" typeface="DokChampa"/>
-        <a:font script="Sinh" typeface="Iskoola Pota"/>
-        <a:font script="Mong" typeface="Mongolian Baiti"/>
-        <a:font script="Viet" typeface="Times New Roman"/>
-        <a:font script="Uigh" typeface="Microsoft Uighur"/>
-        <a:font script="Geor" typeface="Sylfaen"/>
-      </a:majorFont>
-      <a:minorFont>
-        <a:latin typeface="Arial"/>
-        <a:ea typeface=""/>
-        <a:cs typeface=""/>
-        <a:font script="Jpan" typeface="ＭＳ Ｐゴシック"/>
-        <a:font script="Hang" typeface="맑은 고딕"/>
-        <a:font script="Hans" typeface="宋体"/>
-        <a:font script="Hant" typeface="新細明體"/>
-        <a:font script="Arab" typeface="Arial"/>
-        <a:font script="Hebr" typeface="Arial"/>
-        <a:font script="Thai" typeface="Cordia New"/>
-        <a:font script="Ethi" typeface="Nyala"/>
-        <a:font script="Beng" typeface="Vrinda"/>
-        <a:font script="Gujr" typeface="Shruti"/>
-        <a:font script="Khmr" typeface="DaunPenh"/>
-        <a:font script="Knda" typeface="Tunga"/>
-        <a:font script="Guru" typeface="Raavi"/>
-        <a:font script="Cans" typeface="Euphemia"/>
-        <a:font script="Cher" typeface="Plantagenet Cherokee"/>
-        <a:font script="Yiii" typeface="Microsoft Yi Baiti"/>
-        <a:font script="Tibt" typeface="Microsoft Himalaya"/>
-        <a:font script="Thaa" typeface="MV Boli"/>
-        <a:font script="Deva" typeface="Mangal"/>
-        <a:font script="Telu" typeface="Gautami"/>
-        <a:font script="Taml" typeface="Latha"/>
-        <a:font script="Syrc" typeface="Estrangelo Edessa"/>
-        <a:font script="Orya" typeface="Kalinga"/>
-        <a:font script="Mlym" typeface="Kartika"/>
-        <a:font script="Laoo" typeface="DokChampa"/>
-        <a:font script="Sinh" typeface="Iskoola Pota"/>
-        <a:font script="Mong" typeface="Mongolian Baiti"/>
-        <a:font script="Viet" typeface="Arial"/>
-        <a:font script="Uigh" typeface="Microsoft Uighur"/>
-        <a:font script="Geor" typeface="Sylfaen"/>
-      </a:minorFont>
-    </a:fontScheme>
-    <a:fmtScheme name="Office">
-      <a:fillStyleLst>
-        <a:solidFill>
-          <a:schemeClr val="phClr"/>
-        </a:solidFill>
-        <a:gradFill rotWithShape="1">
-          <a:gsLst>
-            <a:gs pos="0">
-              <a:schemeClr val="phClr">
-                <a:tint val="50000"/>
-                <a:satMod val="300000"/>
-              </a:schemeClr>
-            </a:gs>
-            <a:gs pos="35000">
-              <a:schemeClr val="phClr">
-                <a:tint val="37000"/>
-                <a:satMod val="300000"/>
-              </a:schemeClr>
-            </a:gs>
-            <a:gs pos="100000">
-              <a:schemeClr val="phClr">
-                <a:tint val="15000"/>
-                <a:satMod val="350000"/>
-              </a:schemeClr>
-            </a:gs>
-          </a:gsLst>
-          <a:lin ang="16200000" scaled="1"/>
-        </a:gradFill>
-        <a:gradFill rotWithShape="1">
-          <a:gsLst>
-            <a:gs pos="0">
-              <a:schemeClr val="phClr">
-                <a:tint val="100000"/>
-                <a:shade val="100000"/>
-                <a:satMod val="130000"/>
-              </a:schemeClr>
-            </a:gs>
-            <a:gs pos="100000">
-              <a:schemeClr val="phClr">
-                <a:tint val="50000"/>
-                <a:shade val="100000"/>
-                <a:satMod val="350000"/>
-              </a:schemeClr>
-            </a:gs>
-          </a:gsLst>
-          <a:lin ang="16200000" scaled="0"/>
-        </a:gradFill>
-      </a:fillStyleLst>
-      <a:lnStyleLst>
-        <a:ln w="9525" cap="flat" cmpd="sng" algn="ctr">
-          <a:solidFill>
-            <a:schemeClr val="phClr">
-              <a:shade val="95000"/>
-              <a:satMod val="105000"/>
-            </a:schemeClr>
-          </a:solidFill>
-          <a:prstDash val="solid"/>
-        </a:ln>
-        <a:ln w="25400" cap="flat" cmpd="sng" algn="ctr">
-          <a:solidFill>
-            <a:schemeClr val="phClr"/>
-          </a:solidFill>
-          <a:prstDash val="solid"/>
-        </a:ln>
-        <a:ln w="38100" cap="flat" cmpd="sng" algn="ctr">
-          <a:solidFill>
-            <a:schemeClr val="phClr"/>
-          </a:solidFill>
-          <a:prstDash val="solid"/>
-        </a:ln>
-      </a:lnStyleLst>
-      <a:effectStyleLst>
-        <a:effectStyle>
-          <a:effectLst>
-            <a:outerShdw blurRad="40000" dist="20000" dir="5400000" rotWithShape="0">
-              <a:srgbClr val="000000">
-                <a:alpha val="38000"/>
-              </a:srgbClr>
-            </a:outerShdw>
-          </a:effectLst>
-        </a:effectStyle>
-        <a:effectStyle>
-          <a:effectLst>
-            <a:outerShdw blurRad="40000" dist="23000" dir="5400000" rotWithShape="0">
-              <a:srgbClr val="000000">
-                <a:alpha val="35000"/>
-              </a:srgbClr>
-            </a:outerShdw>
-          </a:effectLst>
-        </a:effectStyle>
-        <a:effectStyle>
-          <a:effectLst>
-            <a:outerShdw blurRad="40000" dist="23000" dir="5400000" rotWithShape="0">
-              <a:srgbClr val="000000">
-                <a:alpha val="35000"/>
-              </a:srgbClr>
-            </a:outerShdw>
-          </a:effectLst>
-          <a:scene3d>
-            <a:camera prst="orthographicFront">
-              <a:rot lat="0" lon="0" rev="0"/>
-            </a:camera>
-            <a:lightRig rig="threePt" dir="t">
-              <a:rot lat="0" lon="0" rev="1200000"/>
-            </a:lightRig>
-          </a:scene3d>
-          <a:sp3d>
-            <a:bevelT w="63500" h="25400"/>
-          </a:sp3d>
-        </a:effectStyle>
-      </a:effectStyleLst>
-      <a:bgFillStyleLst>
-        <a:solidFill>
-          <a:schemeClr val="phClr"/>
-        </a:solidFill>
-        <a:gradFill rotWithShape="1">
-          <a:gsLst>
-            <a:gs pos="0">
-              <a:schemeClr val="phClr">
-                <a:tint val="40000"/>
-                <a:satMod val="350000"/>
-              </a:schemeClr>
-            </a:gs>
-            <a:gs pos="40000">
-              <a:schemeClr val="phClr">
-                <a:tint val="45000"/>
-                <a:shade val="99000"/>
-                <a:satMod val="350000"/>
-              </a:schemeClr>
-            </a:gs>
-            <a:gs pos="100000">
-              <a:schemeClr val="phClr">
-                <a:shade val="20000"/>
-                <a:satMod val="255000"/>
-              </a:schemeClr>
-            </a:gs>
-          </a:gsLst>
-          <a:path path="circle">
-            <a:fillToRect l="50000" t="-80000" r="50000" b="180000"/>
-          </a:path>
-        </a:gradFill>
-        <a:gradFill rotWithShape="1">
-          <a:gsLst>
-            <a:gs pos="0">
-              <a:schemeClr val="phClr">
-                <a:tint val="80000"/>
-                <a:satMod val="300000"/>
-              </a:schemeClr>
-            </a:gs>
-            <a:gs pos="100000">
-              <a:schemeClr val="phClr">
-                <a:shade val="30000"/>
-                <a:satMod val="200000"/>
-              </a:schemeClr>
-            </a:gs>
-          </a:gsLst>
-          <a:path path="circle">
-            <a:fillToRect l="50000" t="50000" r="50000" b="50000"/>
-          </a:path>
-        </a:gradFill>
-      </a:bgFillStyleLst>
-    </a:fmtScheme>
-  </a:themeElements>
-</a:theme>
 </file>